--- a/curso/pptx/S36.pptx
+++ b/curso/pptx/S36.pptx
@@ -3819,8 +3819,8 @@
         </p:nvSpPr>
         <p:spPr>
           <a:xfrm>
-            <a:off x="640000" y="420000"/>
-            <a:ext cx="10912000" cy="420000"/>
+            <a:off x="10652000" y="380000"/>
+            <a:ext cx="900000" cy="800000"/>
           </a:xfrm>
           <a:prstGeom prst="rect">
             <a:avLst/>
@@ -3835,17 +3835,17 @@
           <a:p>
             <a:pPr>
               <a:spcAft>
-                <a:spcPts val="810"/>
+                <a:spcPts val="1980"/>
               </a:spcAft>
             </a:pPr>
             <a:r>
-              <a:rPr sz="1800" b="1">
+              <a:rPr sz="4400" b="0">
                 <a:solidFill>
                   <a:srgbClr val="1F2A44"/>
                 </a:solidFill>
                 <a:latin typeface="Nunito Sans"/>
               </a:rPr>
-              <a:t>🦉 Aula de Filosofía</a:t>
+              <a:t>🙃</a:t>
             </a:r>
           </a:p>
         </p:txBody>

--- a/curso/pptx/S36.pptx
+++ b/curso/pptx/S36.pptx
@@ -470,356 +470,6 @@
     </a:lvl9pPr>
   </p:notesStyle>
 </p:notesMaster>
-</file>
-
-<file path=ppt/notesSlides/notesSlide1.xml><?xml version="1.0" encoding="utf-8"?>
-<p:notes xmlns:a="http://schemas.openxmlformats.org/drawingml/2006/main" xmlns:p="http://schemas.openxmlformats.org/presentationml/2006/main" xmlns:r="http://schemas.openxmlformats.org/officeDocument/2006/relationships">
-  <p:cSld>
-    <p:spTree>
-      <p:nvGrpSpPr>
-        <p:cNvPr id="1" name=""/>
-        <p:cNvGrpSpPr/>
-        <p:nvPr/>
-      </p:nvGrpSpPr>
-      <p:grpSpPr>
-        <a:xfrm>
-          <a:off x="0" y="0"/>
-          <a:ext cx="0" cy="0"/>
-          <a:chOff x="0" y="0"/>
-          <a:chExt cx="0" cy="0"/>
-        </a:xfrm>
-      </p:grpSpPr>
-      <p:sp>
-        <p:nvSpPr>
-          <p:cNvPr id="2" name="Slide Image Placeholder 1"/>
-          <p:cNvSpPr>
-            <a:spLocks noGrp="1"/>
-          </p:cNvSpPr>
-          <p:nvPr>
-            <p:ph type="sldImg" idx="2"/>
-          </p:nvPr>
-        </p:nvSpPr>
-        <p:spPr/>
-      </p:sp>
-      <p:sp>
-        <p:nvSpPr>
-          <p:cNvPr id="3" name="Notes Placeholder 2"/>
-          <p:cNvSpPr>
-            <a:spLocks noGrp="1"/>
-          </p:cNvSpPr>
-          <p:nvPr>
-            <p:ph type="body" idx="3" sz="quarter"/>
-          </p:nvPr>
-        </p:nvSpPr>
-        <p:spPr/>
-        <p:txBody>
-          <a:bodyPr/>
-          <a:lstStyle/>
-          <a:p>
-            <a:r>
-              <a:t>3 minutos. Sin apuntes. Es para recordar, no cuenta para nota.</a:t>
-            </a:r>
-          </a:p>
-        </p:txBody>
-      </p:sp>
-      <p:sp>
-        <p:nvSpPr>
-          <p:cNvPr id="4" name="Slide Number Placeholder 3"/>
-          <p:cNvSpPr>
-            <a:spLocks noGrp="1"/>
-          </p:cNvSpPr>
-          <p:nvPr>
-            <p:ph type="sldNum" idx="5" sz="quarter"/>
-          </p:nvPr>
-        </p:nvSpPr>
-        <p:spPr/>
-      </p:sp>
-    </p:spTree>
-  </p:cSld>
-  <p:clrMapOvr>
-    <a:masterClrMapping/>
-  </p:clrMapOvr>
-</p:notes>
-</file>
-
-<file path=ppt/notesSlides/notesSlide2.xml><?xml version="1.0" encoding="utf-8"?>
-<p:notes xmlns:a="http://schemas.openxmlformats.org/drawingml/2006/main" xmlns:p="http://schemas.openxmlformats.org/presentationml/2006/main" xmlns:r="http://schemas.openxmlformats.org/officeDocument/2006/relationships">
-  <p:cSld>
-    <p:spTree>
-      <p:nvGrpSpPr>
-        <p:cNvPr id="1" name=""/>
-        <p:cNvGrpSpPr/>
-        <p:nvPr/>
-      </p:nvGrpSpPr>
-      <p:grpSpPr>
-        <a:xfrm>
-          <a:off x="0" y="0"/>
-          <a:ext cx="0" cy="0"/>
-          <a:chOff x="0" y="0"/>
-          <a:chExt cx="0" cy="0"/>
-        </a:xfrm>
-      </p:grpSpPr>
-      <p:sp>
-        <p:nvSpPr>
-          <p:cNvPr id="2" name="Slide Image Placeholder 1"/>
-          <p:cNvSpPr>
-            <a:spLocks noGrp="1"/>
-          </p:cNvSpPr>
-          <p:nvPr>
-            <p:ph type="sldImg" idx="2"/>
-          </p:nvPr>
-        </p:nvSpPr>
-        <p:spPr/>
-      </p:sp>
-      <p:sp>
-        <p:nvSpPr>
-          <p:cNvPr id="3" name="Notes Placeholder 2"/>
-          <p:cNvSpPr>
-            <a:spLocks noGrp="1"/>
-          </p:cNvSpPr>
-          <p:nvPr>
-            <p:ph type="body" idx="3" sz="quarter"/>
-          </p:nvPr>
-        </p:nvSpPr>
-        <p:spPr/>
-        <p:txBody>
-          <a:bodyPr/>
-          <a:lstStyle/>
-          <a:p>
-            <a:r>
-              <a:t>3 minutos. Sin apuntes. Es para recordar, no cuenta para nota.</a:t>
-            </a:r>
-          </a:p>
-        </p:txBody>
-      </p:sp>
-      <p:sp>
-        <p:nvSpPr>
-          <p:cNvPr id="4" name="Slide Number Placeholder 3"/>
-          <p:cNvSpPr>
-            <a:spLocks noGrp="1"/>
-          </p:cNvSpPr>
-          <p:nvPr>
-            <p:ph type="sldNum" idx="5" sz="quarter"/>
-          </p:nvPr>
-        </p:nvSpPr>
-        <p:spPr/>
-      </p:sp>
-    </p:spTree>
-  </p:cSld>
-  <p:clrMapOvr>
-    <a:masterClrMapping/>
-  </p:clrMapOvr>
-</p:notes>
-</file>
-
-<file path=ppt/notesSlides/notesSlide3.xml><?xml version="1.0" encoding="utf-8"?>
-<p:notes xmlns:a="http://schemas.openxmlformats.org/drawingml/2006/main" xmlns:p="http://schemas.openxmlformats.org/presentationml/2006/main" xmlns:r="http://schemas.openxmlformats.org/officeDocument/2006/relationships">
-  <p:cSld>
-    <p:spTree>
-      <p:nvGrpSpPr>
-        <p:cNvPr id="1" name=""/>
-        <p:cNvGrpSpPr/>
-        <p:nvPr/>
-      </p:nvGrpSpPr>
-      <p:grpSpPr>
-        <a:xfrm>
-          <a:off x="0" y="0"/>
-          <a:ext cx="0" cy="0"/>
-          <a:chOff x="0" y="0"/>
-          <a:chExt cx="0" cy="0"/>
-        </a:xfrm>
-      </p:grpSpPr>
-      <p:sp>
-        <p:nvSpPr>
-          <p:cNvPr id="2" name="Slide Image Placeholder 1"/>
-          <p:cNvSpPr>
-            <a:spLocks noGrp="1"/>
-          </p:cNvSpPr>
-          <p:nvPr>
-            <p:ph type="sldImg" idx="2"/>
-          </p:nvPr>
-        </p:nvSpPr>
-        <p:spPr/>
-      </p:sp>
-      <p:sp>
-        <p:nvSpPr>
-          <p:cNvPr id="3" name="Notes Placeholder 2"/>
-          <p:cNvSpPr>
-            <a:spLocks noGrp="1"/>
-          </p:cNvSpPr>
-          <p:nvPr>
-            <p:ph type="body" idx="3" sz="quarter"/>
-          </p:nvPr>
-        </p:nvSpPr>
-        <p:spPr/>
-        <p:txBody>
-          <a:bodyPr/>
-          <a:lstStyle/>
-          <a:p>
-            <a:r>
-              <a:t>Nadie tiene que contestar: solo pensarlo.</a:t>
-            </a:r>
-          </a:p>
-        </p:txBody>
-      </p:sp>
-      <p:sp>
-        <p:nvSpPr>
-          <p:cNvPr id="4" name="Slide Number Placeholder 3"/>
-          <p:cNvSpPr>
-            <a:spLocks noGrp="1"/>
-          </p:cNvSpPr>
-          <p:nvPr>
-            <p:ph type="sldNum" idx="5" sz="quarter"/>
-          </p:nvPr>
-        </p:nvSpPr>
-        <p:spPr/>
-      </p:sp>
-    </p:spTree>
-  </p:cSld>
-  <p:clrMapOvr>
-    <a:masterClrMapping/>
-  </p:clrMapOvr>
-</p:notes>
-</file>
-
-<file path=ppt/notesSlides/notesSlide4.xml><?xml version="1.0" encoding="utf-8"?>
-<p:notes xmlns:a="http://schemas.openxmlformats.org/drawingml/2006/main" xmlns:p="http://schemas.openxmlformats.org/presentationml/2006/main" xmlns:r="http://schemas.openxmlformats.org/officeDocument/2006/relationships">
-  <p:cSld>
-    <p:spTree>
-      <p:nvGrpSpPr>
-        <p:cNvPr id="1" name=""/>
-        <p:cNvGrpSpPr/>
-        <p:nvPr/>
-      </p:nvGrpSpPr>
-      <p:grpSpPr>
-        <a:xfrm>
-          <a:off x="0" y="0"/>
-          <a:ext cx="0" cy="0"/>
-          <a:chOff x="0" y="0"/>
-          <a:chExt cx="0" cy="0"/>
-        </a:xfrm>
-      </p:grpSpPr>
-      <p:sp>
-        <p:nvSpPr>
-          <p:cNvPr id="2" name="Slide Image Placeholder 1"/>
-          <p:cNvSpPr>
-            <a:spLocks noGrp="1"/>
-          </p:cNvSpPr>
-          <p:nvPr>
-            <p:ph type="sldImg" idx="2"/>
-          </p:nvPr>
-        </p:nvSpPr>
-        <p:spPr/>
-      </p:sp>
-      <p:sp>
-        <p:nvSpPr>
-          <p:cNvPr id="3" name="Notes Placeholder 2"/>
-          <p:cNvSpPr>
-            <a:spLocks noGrp="1"/>
-          </p:cNvSpPr>
-          <p:nvPr>
-            <p:ph type="body" idx="3" sz="quarter"/>
-          </p:nvPr>
-        </p:nvSpPr>
-        <p:spPr/>
-        <p:txBody>
-          <a:bodyPr/>
-          <a:lstStyle/>
-          <a:p>
-            <a:r>
-              <a:t>Dejar unos segundos para que piensen la respuesta fácil antes de enseñar los pasos.</a:t>
-            </a:r>
-          </a:p>
-        </p:txBody>
-      </p:sp>
-      <p:sp>
-        <p:nvSpPr>
-          <p:cNvPr id="4" name="Slide Number Placeholder 3"/>
-          <p:cNvSpPr>
-            <a:spLocks noGrp="1"/>
-          </p:cNvSpPr>
-          <p:nvPr>
-            <p:ph type="sldNum" idx="5" sz="quarter"/>
-          </p:nvPr>
-        </p:nvSpPr>
-        <p:spPr/>
-      </p:sp>
-    </p:spTree>
-  </p:cSld>
-  <p:clrMapOvr>
-    <a:masterClrMapping/>
-  </p:clrMapOvr>
-</p:notes>
-</file>
-
-<file path=ppt/notesSlides/notesSlide5.xml><?xml version="1.0" encoding="utf-8"?>
-<p:notes xmlns:a="http://schemas.openxmlformats.org/drawingml/2006/main" xmlns:p="http://schemas.openxmlformats.org/presentationml/2006/main" xmlns:r="http://schemas.openxmlformats.org/officeDocument/2006/relationships">
-  <p:cSld>
-    <p:spTree>
-      <p:nvGrpSpPr>
-        <p:cNvPr id="1" name=""/>
-        <p:cNvGrpSpPr/>
-        <p:nvPr/>
-      </p:nvGrpSpPr>
-      <p:grpSpPr>
-        <a:xfrm>
-          <a:off x="0" y="0"/>
-          <a:ext cx="0" cy="0"/>
-          <a:chOff x="0" y="0"/>
-          <a:chExt cx="0" cy="0"/>
-        </a:xfrm>
-      </p:grpSpPr>
-      <p:sp>
-        <p:nvSpPr>
-          <p:cNvPr id="2" name="Slide Image Placeholder 1"/>
-          <p:cNvSpPr>
-            <a:spLocks noGrp="1"/>
-          </p:cNvSpPr>
-          <p:nvPr>
-            <p:ph type="sldImg" idx="2"/>
-          </p:nvPr>
-        </p:nvSpPr>
-        <p:spPr/>
-      </p:sp>
-      <p:sp>
-        <p:nvSpPr>
-          <p:cNvPr id="3" name="Notes Placeholder 2"/>
-          <p:cNvSpPr>
-            <a:spLocks noGrp="1"/>
-          </p:cNvSpPr>
-          <p:nvPr>
-            <p:ph type="body" idx="3" sz="quarter"/>
-          </p:nvPr>
-        </p:nvSpPr>
-        <p:spPr/>
-        <p:txBody>
-          <a:bodyPr/>
-          <a:lstStyle/>
-          <a:p>
-            <a:r>
-              <a:t>Dejar 2 minutos para que lo escriban. La diapositiva siguiente muestra el resumen.</a:t>
-            </a:r>
-          </a:p>
-        </p:txBody>
-      </p:sp>
-      <p:sp>
-        <p:nvSpPr>
-          <p:cNvPr id="4" name="Slide Number Placeholder 3"/>
-          <p:cNvSpPr>
-            <a:spLocks noGrp="1"/>
-          </p:cNvSpPr>
-          <p:nvPr>
-            <p:ph type="sldNum" idx="5" sz="quarter"/>
-          </p:nvPr>
-        </p:nvSpPr>
-        <p:spPr/>
-      </p:sp>
-    </p:spTree>
-  </p:cSld>
-  <p:clrMapOvr>
-    <a:masterClrMapping/>
-  </p:clrMapOvr>
-</p:notes>
 </file>
 
 <file path=ppt/slideLayouts/slideLayout1.xml><?xml version="1.0" encoding="utf-8"?>

--- a/curso/pptx/S36.pptx
+++ b/curso/pptx/S36.pptx
@@ -21,6 +21,7 @@
     <p:sldId id="269" r:id="rId21"/>
     <p:sldId id="270" r:id="rId22"/>
     <p:sldId id="271" r:id="rId23"/>
+    <p:sldId id="272" r:id="rId24"/>
   </p:sldIdLst>
   <p:sldSz cx="12192000" cy="6858000" type="screen4x3"/>
   <p:notesSz cx="6858000" cy="9144000"/>
@@ -3573,7 +3574,7 @@
                 </a:solidFill>
                 <a:latin typeface="Fredoka"/>
               </a:rPr>
-              <a:t>Repaso y examen de la unidad 6</a:t>
+              <a:t>Imágenes y vídeos manipulados</a:t>
             </a:r>
           </a:p>
         </p:txBody>
@@ -3612,7 +3613,7 @@
                 </a:solidFill>
                 <a:latin typeface="Nunito Sans"/>
               </a:rPr>
-              <a:t>Repasamos qué hace fiable una fuente, el clickbait, los bulos, cómo verificar y cómo se manipulan imágenes y vídeos.</a:t>
+              <a:t>Una imagen puede engañar con recortes, montajes, sacándola de contexto o con deepfakes hechos con inteligencia artificial.</a:t>
             </a:r>
           </a:p>
         </p:txBody>
@@ -3677,7 +3678,7 @@
                 </a:solidFill>
                 <a:latin typeface="Nunito Sans"/>
               </a:rPr>
-              <a:t>BLOQUE 1 · REPASO DE LA UNIDAD</a:t>
+              <a:t>BLOQUE 2 · CASOS RESUELTOS</a:t>
             </a:r>
           </a:p>
         </p:txBody>
@@ -3716,7 +3717,2971 @@
                 </a:solidFill>
                 <a:latin typeface="Fredoka"/>
               </a:rPr>
-              <a:t>Imágenes manipuladas (sesión 35)</a:t>
+              <a:t>Caso 1 · La «pelea»</a:t>
+            </a:r>
+          </a:p>
+        </p:txBody>
+      </p:sp>
+      <p:sp>
+        <p:nvSpPr>
+          <p:cNvPr id="4" name="Rectangle 3"/>
+          <p:cNvSpPr/>
+          <p:nvPr/>
+        </p:nvSpPr>
+        <p:spPr>
+          <a:xfrm>
+            <a:off x="640000" y="1600000"/>
+            <a:ext cx="10912000" cy="1100000"/>
+          </a:xfrm>
+          <a:prstGeom prst="rect">
+            <a:avLst/>
+          </a:prstGeom>
+          <a:solidFill>
+            <a:srgbClr val="FFFFFF"/>
+          </a:solidFill>
+          <a:ln>
+            <a:noFill/>
+          </a:ln>
+        </p:spPr>
+        <p:style>
+          <a:lnRef idx="1">
+            <a:schemeClr val="accent1"/>
+          </a:lnRef>
+          <a:fillRef idx="3">
+            <a:schemeClr val="accent1"/>
+          </a:fillRef>
+          <a:effectRef idx="2">
+            <a:schemeClr val="accent1"/>
+          </a:effectRef>
+          <a:fontRef idx="minor">
+            <a:schemeClr val="lt1"/>
+          </a:fontRef>
+        </p:style>
+        <p:txBody>
+          <a:bodyPr rtlCol="0" anchor="ctr"/>
+          <a:lstStyle/>
+          <a:p>
+            <a:pPr algn="ctr"/>
+          </a:p>
+        </p:txBody>
+      </p:sp>
+      <p:sp>
+        <p:nvSpPr>
+          <p:cNvPr id="5" name="TextBox 4"/>
+          <p:cNvSpPr txBox="1"/>
+          <p:nvPr/>
+        </p:nvSpPr>
+        <p:spPr>
+          <a:xfrm>
+            <a:off x="840000" y="1650000"/>
+            <a:ext cx="10512000" cy="1000000"/>
+          </a:xfrm>
+          <a:prstGeom prst="rect">
+            <a:avLst/>
+          </a:prstGeom>
+          <a:noFill/>
+        </p:spPr>
+        <p:txBody>
+          <a:bodyPr wrap="square" anchor="ctr">
+            <a:spAutoFit/>
+          </a:bodyPr>
+          <a:lstStyle/>
+          <a:p>
+            <a:pPr>
+              <a:spcAft>
+                <a:spcPts val="1170"/>
+              </a:spcAft>
+            </a:pPr>
+            <a:r>
+              <a:rPr sz="2600" b="1">
+                <a:solidFill>
+                  <a:srgbClr val="1F2A44"/>
+                </a:solidFill>
+                <a:latin typeface="Nunito Sans"/>
+              </a:rPr>
+              <a:t>Una foto del patio muestra a dos alumnos gritándose. El texto dice: «Pelea en el instituto». La foto completa muestra a más gente: estaban ensayando una obra de teatro.</a:t>
+            </a:r>
+          </a:p>
+        </p:txBody>
+      </p:sp>
+      <p:sp>
+        <p:nvSpPr>
+          <p:cNvPr id="6" name="TextBox 5"/>
+          <p:cNvSpPr txBox="1"/>
+          <p:nvPr/>
+        </p:nvSpPr>
+        <p:spPr>
+          <a:xfrm>
+            <a:off x="640000" y="2900000"/>
+            <a:ext cx="10912000" cy="3500000"/>
+          </a:xfrm>
+          <a:prstGeom prst="rect">
+            <a:avLst/>
+          </a:prstGeom>
+          <a:noFill/>
+        </p:spPr>
+        <p:txBody>
+          <a:bodyPr wrap="square">
+            <a:spAutoFit/>
+          </a:bodyPr>
+          <a:lstStyle/>
+          <a:p>
+            <a:pPr>
+              <a:spcAft>
+                <a:spcPts val="1080"/>
+              </a:spcAft>
+            </a:pPr>
+            <a:r>
+              <a:rPr sz="2400" b="1">
+                <a:solidFill>
+                  <a:srgbClr val="E8793A"/>
+                </a:solidFill>
+                <a:latin typeface="Nunito Sans"/>
+              </a:rPr>
+              <a:t>1. </a:t>
+            </a:r>
+            <a:r>
+              <a:rPr sz="2400" b="0">
+                <a:solidFill>
+                  <a:srgbClr val="1F2A44"/>
+                </a:solidFill>
+                <a:latin typeface="Nunito Sans"/>
+              </a:rPr>
+              <a:t>¿Qué truco es? Un recorte: se ha quitado lo que explicaba la escena.</a:t>
+            </a:r>
+          </a:p>
+          <a:p>
+            <a:pPr>
+              <a:spcAft>
+                <a:spcPts val="1080"/>
+              </a:spcAft>
+            </a:pPr>
+            <a:r>
+              <a:rPr sz="2400" b="1">
+                <a:solidFill>
+                  <a:srgbClr val="E8793A"/>
+                </a:solidFill>
+                <a:latin typeface="Nunito Sans"/>
+              </a:rPr>
+              <a:t>2. </a:t>
+            </a:r>
+            <a:r>
+              <a:rPr sz="2400" b="0">
+                <a:solidFill>
+                  <a:srgbClr val="1F2A44"/>
+                </a:solidFill>
+                <a:latin typeface="Nunito Sans"/>
+              </a:rPr>
+              <a:t>La foto no es falsa, pero lo que se ve está elegido para engañar.</a:t>
+            </a:r>
+          </a:p>
+          <a:p>
+            <a:pPr>
+              <a:spcAft>
+                <a:spcPts val="1080"/>
+              </a:spcAft>
+            </a:pPr>
+            <a:r>
+              <a:rPr sz="2400" b="1">
+                <a:solidFill>
+                  <a:srgbClr val="E8793A"/>
+                </a:solidFill>
+                <a:latin typeface="Nunito Sans"/>
+              </a:rPr>
+              <a:t>3. </a:t>
+            </a:r>
+            <a:r>
+              <a:rPr sz="2400" b="0">
+                <a:solidFill>
+                  <a:srgbClr val="1F2A44"/>
+                </a:solidFill>
+                <a:latin typeface="Nunito Sans"/>
+              </a:rPr>
+              <a:t>¿Cómo lo descubro? Buscando la foto completa o preguntando a quien estaba.</a:t>
+            </a:r>
+          </a:p>
+          <a:p>
+            <a:pPr>
+              <a:spcAft>
+                <a:spcPts val="1080"/>
+              </a:spcAft>
+            </a:pPr>
+            <a:r>
+              <a:rPr sz="2400" b="1">
+                <a:solidFill>
+                  <a:srgbClr val="E8793A"/>
+                </a:solidFill>
+                <a:latin typeface="Nunito Sans"/>
+              </a:rPr>
+              <a:t>4. </a:t>
+            </a:r>
+            <a:r>
+              <a:rPr sz="2400" b="0">
+                <a:solidFill>
+                  <a:srgbClr val="1F2A44"/>
+                </a:solidFill>
+                <a:latin typeface="Nunito Sans"/>
+              </a:rPr>
+              <a:t>Conclusión: lo que se queda fuera de la foto también cuenta.</a:t>
+            </a:r>
+          </a:p>
+        </p:txBody>
+      </p:sp>
+    </p:spTree>
+  </p:cSld>
+  <p:clrMapOvr>
+    <a:masterClrMapping/>
+  </p:clrMapOvr>
+</p:sld>
+</file>
+
+<file path=ppt/slides/slide11.xml><?xml version="1.0" encoding="utf-8"?>
+<p:sld xmlns:a="http://schemas.openxmlformats.org/drawingml/2006/main" xmlns:p="http://schemas.openxmlformats.org/presentationml/2006/main" xmlns:r="http://schemas.openxmlformats.org/officeDocument/2006/relationships">
+  <p:cSld>
+    <p:bg>
+      <p:bgPr>
+        <a:solidFill>
+          <a:srgbClr val="FBF7EF"/>
+        </a:solidFill>
+        <a:effectLst/>
+      </p:bgPr>
+    </p:bg>
+    <p:spTree>
+      <p:nvGrpSpPr>
+        <p:cNvPr id="1" name=""/>
+        <p:cNvGrpSpPr/>
+        <p:nvPr/>
+      </p:nvGrpSpPr>
+      <p:grpSpPr/>
+      <p:sp>
+        <p:nvSpPr>
+          <p:cNvPr id="2" name="TextBox 1"/>
+          <p:cNvSpPr txBox="1"/>
+          <p:nvPr/>
+        </p:nvSpPr>
+        <p:spPr>
+          <a:xfrm>
+            <a:off x="640000" y="380000"/>
+            <a:ext cx="10912000" cy="420000"/>
+          </a:xfrm>
+          <a:prstGeom prst="rect">
+            <a:avLst/>
+          </a:prstGeom>
+          <a:noFill/>
+        </p:spPr>
+        <p:txBody>
+          <a:bodyPr wrap="square">
+            <a:spAutoFit/>
+          </a:bodyPr>
+          <a:lstStyle/>
+          <a:p>
+            <a:pPr>
+              <a:spcAft>
+                <a:spcPts val="630"/>
+              </a:spcAft>
+            </a:pPr>
+            <a:r>
+              <a:rPr sz="1400" b="1">
+                <a:solidFill>
+                  <a:srgbClr val="E8793A"/>
+                </a:solidFill>
+                <a:latin typeface="Nunito Sans"/>
+              </a:rPr>
+              <a:t>BLOQUE 2 · CASOS RESUELTOS</a:t>
+            </a:r>
+          </a:p>
+        </p:txBody>
+      </p:sp>
+      <p:sp>
+        <p:nvSpPr>
+          <p:cNvPr id="3" name="TextBox 2"/>
+          <p:cNvSpPr txBox="1"/>
+          <p:nvPr/>
+        </p:nvSpPr>
+        <p:spPr>
+          <a:xfrm>
+            <a:off x="640000" y="760000"/>
+            <a:ext cx="10912000" cy="800000"/>
+          </a:xfrm>
+          <a:prstGeom prst="rect">
+            <a:avLst/>
+          </a:prstGeom>
+          <a:noFill/>
+        </p:spPr>
+        <p:txBody>
+          <a:bodyPr wrap="square">
+            <a:spAutoFit/>
+          </a:bodyPr>
+          <a:lstStyle/>
+          <a:p>
+            <a:pPr>
+              <a:spcAft>
+                <a:spcPts val="1710"/>
+              </a:spcAft>
+            </a:pPr>
+            <a:r>
+              <a:rPr sz="3800" b="1">
+                <a:solidFill>
+                  <a:srgbClr val="1F2A44"/>
+                </a:solidFill>
+                <a:latin typeface="Fredoka"/>
+              </a:rPr>
+              <a:t>Caso 2 · La alcaldesa</a:t>
+            </a:r>
+          </a:p>
+        </p:txBody>
+      </p:sp>
+      <p:sp>
+        <p:nvSpPr>
+          <p:cNvPr id="4" name="Rectangle 3"/>
+          <p:cNvSpPr/>
+          <p:nvPr/>
+        </p:nvSpPr>
+        <p:spPr>
+          <a:xfrm>
+            <a:off x="640000" y="1600000"/>
+            <a:ext cx="10912000" cy="1100000"/>
+          </a:xfrm>
+          <a:prstGeom prst="rect">
+            <a:avLst/>
+          </a:prstGeom>
+          <a:solidFill>
+            <a:srgbClr val="FFFFFF"/>
+          </a:solidFill>
+          <a:ln>
+            <a:noFill/>
+          </a:ln>
+        </p:spPr>
+        <p:style>
+          <a:lnRef idx="1">
+            <a:schemeClr val="accent1"/>
+          </a:lnRef>
+          <a:fillRef idx="3">
+            <a:schemeClr val="accent1"/>
+          </a:fillRef>
+          <a:effectRef idx="2">
+            <a:schemeClr val="accent1"/>
+          </a:effectRef>
+          <a:fontRef idx="minor">
+            <a:schemeClr val="lt1"/>
+          </a:fontRef>
+        </p:style>
+        <p:txBody>
+          <a:bodyPr rtlCol="0" anchor="ctr"/>
+          <a:lstStyle/>
+          <a:p>
+            <a:pPr algn="ctr"/>
+          </a:p>
+        </p:txBody>
+      </p:sp>
+      <p:sp>
+        <p:nvSpPr>
+          <p:cNvPr id="5" name="TextBox 4"/>
+          <p:cNvSpPr txBox="1"/>
+          <p:nvPr/>
+        </p:nvSpPr>
+        <p:spPr>
+          <a:xfrm>
+            <a:off x="840000" y="1650000"/>
+            <a:ext cx="10512000" cy="1000000"/>
+          </a:xfrm>
+          <a:prstGeom prst="rect">
+            <a:avLst/>
+          </a:prstGeom>
+          <a:noFill/>
+        </p:spPr>
+        <p:txBody>
+          <a:bodyPr wrap="square" anchor="ctr">
+            <a:spAutoFit/>
+          </a:bodyPr>
+          <a:lstStyle/>
+          <a:p>
+            <a:pPr>
+              <a:spcAft>
+                <a:spcPts val="1170"/>
+              </a:spcAft>
+            </a:pPr>
+            <a:r>
+              <a:rPr sz="2600" b="1">
+                <a:solidFill>
+                  <a:srgbClr val="1F2A44"/>
+                </a:solidFill>
+                <a:latin typeface="Nunito Sans"/>
+              </a:rPr>
+              <a:t>Un vídeo muestra a una alcaldesa (inventada) diciendo que mañana no hay clase en toda Bizkaia. La voz parece la suya.</a:t>
+            </a:r>
+          </a:p>
+        </p:txBody>
+      </p:sp>
+      <p:sp>
+        <p:nvSpPr>
+          <p:cNvPr id="6" name="TextBox 5"/>
+          <p:cNvSpPr txBox="1"/>
+          <p:nvPr/>
+        </p:nvSpPr>
+        <p:spPr>
+          <a:xfrm>
+            <a:off x="640000" y="2900000"/>
+            <a:ext cx="10912000" cy="3500000"/>
+          </a:xfrm>
+          <a:prstGeom prst="rect">
+            <a:avLst/>
+          </a:prstGeom>
+          <a:noFill/>
+        </p:spPr>
+        <p:txBody>
+          <a:bodyPr wrap="square">
+            <a:spAutoFit/>
+          </a:bodyPr>
+          <a:lstStyle/>
+          <a:p>
+            <a:pPr>
+              <a:spcAft>
+                <a:spcPts val="1080"/>
+              </a:spcAft>
+            </a:pPr>
+            <a:r>
+              <a:rPr sz="2400" b="1">
+                <a:solidFill>
+                  <a:srgbClr val="E8793A"/>
+                </a:solidFill>
+                <a:latin typeface="Nunito Sans"/>
+              </a:rPr>
+              <a:t>1. </a:t>
+            </a:r>
+            <a:r>
+              <a:rPr sz="2400" b="0">
+                <a:solidFill>
+                  <a:srgbClr val="1F2A44"/>
+                </a:solidFill>
+                <a:latin typeface="Nunito Sans"/>
+              </a:rPr>
+              <a:t>Emoción y urgencia: es justo lo que muchos quieren oír.</a:t>
+            </a:r>
+          </a:p>
+          <a:p>
+            <a:pPr>
+              <a:spcAft>
+                <a:spcPts val="1080"/>
+              </a:spcAft>
+            </a:pPr>
+            <a:r>
+              <a:rPr sz="2400" b="1">
+                <a:solidFill>
+                  <a:srgbClr val="E8793A"/>
+                </a:solidFill>
+                <a:latin typeface="Nunito Sans"/>
+              </a:rPr>
+              <a:t>2. </a:t>
+            </a:r>
+            <a:r>
+              <a:rPr sz="2400" b="0">
+                <a:solidFill>
+                  <a:srgbClr val="1F2A44"/>
+                </a:solidFill>
+                <a:latin typeface="Nunito Sans"/>
+              </a:rPr>
+              <a:t>El vídeo parece perfecto, pero hoy eso ya no demuestra nada.</a:t>
+            </a:r>
+          </a:p>
+          <a:p>
+            <a:pPr>
+              <a:spcAft>
+                <a:spcPts val="1080"/>
+              </a:spcAft>
+            </a:pPr>
+            <a:r>
+              <a:rPr sz="2400" b="1">
+                <a:solidFill>
+                  <a:srgbClr val="E8793A"/>
+                </a:solidFill>
+                <a:latin typeface="Nunito Sans"/>
+              </a:rPr>
+              <a:t>3. </a:t>
+            </a:r>
+            <a:r>
+              <a:rPr sz="2400" b="0">
+                <a:solidFill>
+                  <a:srgbClr val="1F2A44"/>
+                </a:solidFill>
+                <a:latin typeface="Nunito Sans"/>
+              </a:rPr>
+              <a:t>¿Lo dicen su web oficial o los medios serios? No.</a:t>
+            </a:r>
+          </a:p>
+          <a:p>
+            <a:pPr>
+              <a:spcAft>
+                <a:spcPts val="1080"/>
+              </a:spcAft>
+            </a:pPr>
+            <a:r>
+              <a:rPr sz="2400" b="1">
+                <a:solidFill>
+                  <a:srgbClr val="E8793A"/>
+                </a:solidFill>
+                <a:latin typeface="Nunito Sans"/>
+              </a:rPr>
+              <a:t>4. </a:t>
+            </a:r>
+            <a:r>
+              <a:rPr sz="2400" b="0">
+                <a:solidFill>
+                  <a:srgbClr val="1F2A44"/>
+                </a:solidFill>
+                <a:latin typeface="Nunito Sans"/>
+              </a:rPr>
+              <a:t>Conclusión: puede ser un deepfake. Manda la fuente oficial, no lo real que parezca el vídeo.</a:t>
+            </a:r>
+          </a:p>
+        </p:txBody>
+      </p:sp>
+    </p:spTree>
+  </p:cSld>
+  <p:clrMapOvr>
+    <a:masterClrMapping/>
+  </p:clrMapOvr>
+</p:sld>
+</file>
+
+<file path=ppt/slides/slide12.xml><?xml version="1.0" encoding="utf-8"?>
+<p:sld xmlns:a="http://schemas.openxmlformats.org/drawingml/2006/main" xmlns:p="http://schemas.openxmlformats.org/presentationml/2006/main" xmlns:r="http://schemas.openxmlformats.org/officeDocument/2006/relationships">
+  <p:cSld>
+    <p:bg>
+      <p:bgPr>
+        <a:solidFill>
+          <a:srgbClr val="FBF7EF"/>
+        </a:solidFill>
+        <a:effectLst/>
+      </p:bgPr>
+    </p:bg>
+    <p:spTree>
+      <p:nvGrpSpPr>
+        <p:cNvPr id="1" name=""/>
+        <p:cNvGrpSpPr/>
+        <p:nvPr/>
+      </p:nvGrpSpPr>
+      <p:grpSpPr/>
+      <p:sp>
+        <p:nvSpPr>
+          <p:cNvPr id="2" name="TextBox 1"/>
+          <p:cNvSpPr txBox="1"/>
+          <p:nvPr/>
+        </p:nvSpPr>
+        <p:spPr>
+          <a:xfrm>
+            <a:off x="640000" y="380000"/>
+            <a:ext cx="10912000" cy="420000"/>
+          </a:xfrm>
+          <a:prstGeom prst="rect">
+            <a:avLst/>
+          </a:prstGeom>
+          <a:noFill/>
+        </p:spPr>
+        <p:txBody>
+          <a:bodyPr wrap="square">
+            <a:spAutoFit/>
+          </a:bodyPr>
+          <a:lstStyle/>
+          <a:p>
+            <a:pPr>
+              <a:spcAft>
+                <a:spcPts val="630"/>
+              </a:spcAft>
+            </a:pPr>
+            <a:r>
+              <a:rPr sz="1400" b="1">
+                <a:solidFill>
+                  <a:srgbClr val="E8793A"/>
+                </a:solidFill>
+                <a:latin typeface="Nunito Sans"/>
+              </a:rPr>
+              <a:t>BLOQUE 2 · CASOS RESUELTOS</a:t>
+            </a:r>
+          </a:p>
+        </p:txBody>
+      </p:sp>
+      <p:sp>
+        <p:nvSpPr>
+          <p:cNvPr id="3" name="TextBox 2"/>
+          <p:cNvSpPr txBox="1"/>
+          <p:nvPr/>
+        </p:nvSpPr>
+        <p:spPr>
+          <a:xfrm>
+            <a:off x="640000" y="760000"/>
+            <a:ext cx="10912000" cy="800000"/>
+          </a:xfrm>
+          <a:prstGeom prst="rect">
+            <a:avLst/>
+          </a:prstGeom>
+          <a:noFill/>
+        </p:spPr>
+        <p:txBody>
+          <a:bodyPr wrap="square">
+            <a:spAutoFit/>
+          </a:bodyPr>
+          <a:lstStyle/>
+          <a:p>
+            <a:pPr>
+              <a:spcAft>
+                <a:spcPts val="1710"/>
+              </a:spcAft>
+            </a:pPr>
+            <a:r>
+              <a:rPr sz="3800" b="1">
+                <a:solidFill>
+                  <a:srgbClr val="1F2A44"/>
+                </a:solidFill>
+                <a:latin typeface="Fredoka"/>
+              </a:rPr>
+              <a:t>Caso 3 · La cara de una compañera</a:t>
+            </a:r>
+          </a:p>
+        </p:txBody>
+      </p:sp>
+      <p:sp>
+        <p:nvSpPr>
+          <p:cNvPr id="4" name="Rectangle 3"/>
+          <p:cNvSpPr/>
+          <p:nvPr/>
+        </p:nvSpPr>
+        <p:spPr>
+          <a:xfrm>
+            <a:off x="640000" y="1600000"/>
+            <a:ext cx="10912000" cy="1100000"/>
+          </a:xfrm>
+          <a:prstGeom prst="rect">
+            <a:avLst/>
+          </a:prstGeom>
+          <a:solidFill>
+            <a:srgbClr val="FFFFFF"/>
+          </a:solidFill>
+          <a:ln>
+            <a:noFill/>
+          </a:ln>
+        </p:spPr>
+        <p:style>
+          <a:lnRef idx="1">
+            <a:schemeClr val="accent1"/>
+          </a:lnRef>
+          <a:fillRef idx="3">
+            <a:schemeClr val="accent1"/>
+          </a:fillRef>
+          <a:effectRef idx="2">
+            <a:schemeClr val="accent1"/>
+          </a:effectRef>
+          <a:fontRef idx="minor">
+            <a:schemeClr val="lt1"/>
+          </a:fontRef>
+        </p:style>
+        <p:txBody>
+          <a:bodyPr rtlCol="0" anchor="ctr"/>
+          <a:lstStyle/>
+          <a:p>
+            <a:pPr algn="ctr"/>
+          </a:p>
+        </p:txBody>
+      </p:sp>
+      <p:sp>
+        <p:nvSpPr>
+          <p:cNvPr id="5" name="TextBox 4"/>
+          <p:cNvSpPr txBox="1"/>
+          <p:nvPr/>
+        </p:nvSpPr>
+        <p:spPr>
+          <a:xfrm>
+            <a:off x="840000" y="1650000"/>
+            <a:ext cx="10512000" cy="1000000"/>
+          </a:xfrm>
+          <a:prstGeom prst="rect">
+            <a:avLst/>
+          </a:prstGeom>
+          <a:noFill/>
+        </p:spPr>
+        <p:txBody>
+          <a:bodyPr wrap="square" anchor="ctr">
+            <a:spAutoFit/>
+          </a:bodyPr>
+          <a:lstStyle/>
+          <a:p>
+            <a:pPr>
+              <a:spcAft>
+                <a:spcPts val="1170"/>
+              </a:spcAft>
+            </a:pPr>
+            <a:r>
+              <a:rPr sz="2600" b="1">
+                <a:solidFill>
+                  <a:srgbClr val="1F2A44"/>
+                </a:solidFill>
+                <a:latin typeface="Nunito Sans"/>
+              </a:rPr>
+              <a:t>Alguien pone la cara de un presentador de la tele en un vídeo ridículo y lo sube a TikTok.</a:t>
+            </a:r>
+          </a:p>
+        </p:txBody>
+      </p:sp>
+      <p:sp>
+        <p:nvSpPr>
+          <p:cNvPr id="6" name="TextBox 5"/>
+          <p:cNvSpPr txBox="1"/>
+          <p:nvPr/>
+        </p:nvSpPr>
+        <p:spPr>
+          <a:xfrm>
+            <a:off x="640000" y="2900000"/>
+            <a:ext cx="10912000" cy="3500000"/>
+          </a:xfrm>
+          <a:prstGeom prst="rect">
+            <a:avLst/>
+          </a:prstGeom>
+          <a:noFill/>
+        </p:spPr>
+        <p:txBody>
+          <a:bodyPr wrap="square">
+            <a:spAutoFit/>
+          </a:bodyPr>
+          <a:lstStyle/>
+          <a:p>
+            <a:pPr>
+              <a:spcAft>
+                <a:spcPts val="1080"/>
+              </a:spcAft>
+            </a:pPr>
+            <a:r>
+              <a:rPr sz="2400" b="1">
+                <a:solidFill>
+                  <a:srgbClr val="E8793A"/>
+                </a:solidFill>
+                <a:latin typeface="Nunito Sans"/>
+              </a:rPr>
+              <a:t>1. </a:t>
+            </a:r>
+            <a:r>
+              <a:rPr sz="2400" b="0">
+                <a:solidFill>
+                  <a:srgbClr val="1F2A44"/>
+                </a:solidFill>
+                <a:latin typeface="Nunito Sans"/>
+              </a:rPr>
+              <a:t>¿Qué es? Un deepfake de una persona real, sin su permiso.</a:t>
+            </a:r>
+          </a:p>
+          <a:p>
+            <a:pPr>
+              <a:spcAft>
+                <a:spcPts val="1080"/>
+              </a:spcAft>
+            </a:pPr>
+            <a:r>
+              <a:rPr sz="2400" b="1">
+                <a:solidFill>
+                  <a:srgbClr val="E8793A"/>
+                </a:solidFill>
+                <a:latin typeface="Nunito Sans"/>
+              </a:rPr>
+              <a:t>2. </a:t>
+            </a:r>
+            <a:r>
+              <a:rPr sz="2400" b="0">
+                <a:solidFill>
+                  <a:srgbClr val="1F2A44"/>
+                </a:solidFill>
+                <a:latin typeface="Nunito Sans"/>
+              </a:rPr>
+              <a:t>Hace daño de verdad, aunque «solo sea una broma».</a:t>
+            </a:r>
+          </a:p>
+          <a:p>
+            <a:pPr>
+              <a:spcAft>
+                <a:spcPts val="1080"/>
+              </a:spcAft>
+            </a:pPr>
+            <a:r>
+              <a:rPr sz="2400" b="1">
+                <a:solidFill>
+                  <a:srgbClr val="E8793A"/>
+                </a:solidFill>
+                <a:latin typeface="Nunito Sans"/>
+              </a:rPr>
+              <a:t>3. </a:t>
+            </a:r>
+            <a:r>
+              <a:rPr sz="2400" b="0">
+                <a:solidFill>
+                  <a:srgbClr val="1F2A44"/>
+                </a:solidFill>
+                <a:latin typeface="Nunito Sans"/>
+              </a:rPr>
+              <a:t>Qué hago: no lo reenvío, se lo cuento a un adulto y apoyo a esa compañera.</a:t>
+            </a:r>
+          </a:p>
+          <a:p>
+            <a:pPr>
+              <a:spcAft>
+                <a:spcPts val="1080"/>
+              </a:spcAft>
+            </a:pPr>
+            <a:r>
+              <a:rPr sz="2400" b="1">
+                <a:solidFill>
+                  <a:srgbClr val="E8793A"/>
+                </a:solidFill>
+                <a:latin typeface="Nunito Sans"/>
+              </a:rPr>
+              <a:t>4. </a:t>
+            </a:r>
+            <a:r>
+              <a:rPr sz="2400" b="0">
+                <a:solidFill>
+                  <a:srgbClr val="1F2A44"/>
+                </a:solidFill>
+                <a:latin typeface="Nunito Sans"/>
+              </a:rPr>
+              <a:t>Conclusión: pensar críticamente también es no compartir lo que hace daño.</a:t>
+            </a:r>
+          </a:p>
+        </p:txBody>
+      </p:sp>
+    </p:spTree>
+  </p:cSld>
+  <p:clrMapOvr>
+    <a:masterClrMapping/>
+  </p:clrMapOvr>
+</p:sld>
+</file>
+
+<file path=ppt/slides/slide13.xml><?xml version="1.0" encoding="utf-8"?>
+<p:sld xmlns:a="http://schemas.openxmlformats.org/drawingml/2006/main" xmlns:p="http://schemas.openxmlformats.org/presentationml/2006/main" xmlns:r="http://schemas.openxmlformats.org/officeDocument/2006/relationships">
+  <p:cSld>
+    <p:bg>
+      <p:bgPr>
+        <a:solidFill>
+          <a:srgbClr val="F6C9A8"/>
+        </a:solidFill>
+        <a:effectLst/>
+      </p:bgPr>
+    </p:bg>
+    <p:spTree>
+      <p:nvGrpSpPr>
+        <p:cNvPr id="1" name=""/>
+        <p:cNvGrpSpPr/>
+        <p:nvPr/>
+      </p:nvGrpSpPr>
+      <p:grpSpPr/>
+      <p:sp>
+        <p:nvSpPr>
+          <p:cNvPr id="2" name="TextBox 1"/>
+          <p:cNvSpPr txBox="1"/>
+          <p:nvPr/>
+        </p:nvSpPr>
+        <p:spPr>
+          <a:xfrm>
+            <a:off x="640000" y="380000"/>
+            <a:ext cx="10912000" cy="420000"/>
+          </a:xfrm>
+          <a:prstGeom prst="rect">
+            <a:avLst/>
+          </a:prstGeom>
+          <a:noFill/>
+        </p:spPr>
+        <p:txBody>
+          <a:bodyPr wrap="square">
+            <a:spAutoFit/>
+          </a:bodyPr>
+          <a:lstStyle/>
+          <a:p>
+            <a:pPr>
+              <a:spcAft>
+                <a:spcPts val="630"/>
+              </a:spcAft>
+            </a:pPr>
+            <a:r>
+              <a:rPr sz="1400" b="1">
+                <a:solidFill>
+                  <a:srgbClr val="1F2A44"/>
+                </a:solidFill>
+                <a:latin typeface="Nunito Sans"/>
+              </a:rPr>
+              <a:t>CASO TRAMPA · BLOQUE 2 · CASOS RESUELTOS</a:t>
+            </a:r>
+          </a:p>
+        </p:txBody>
+      </p:sp>
+      <p:sp>
+        <p:nvSpPr>
+          <p:cNvPr id="3" name="TextBox 2"/>
+          <p:cNvSpPr txBox="1"/>
+          <p:nvPr/>
+        </p:nvSpPr>
+        <p:spPr>
+          <a:xfrm>
+            <a:off x="640000" y="760000"/>
+            <a:ext cx="10912000" cy="800000"/>
+          </a:xfrm>
+          <a:prstGeom prst="rect">
+            <a:avLst/>
+          </a:prstGeom>
+          <a:noFill/>
+        </p:spPr>
+        <p:txBody>
+          <a:bodyPr wrap="square">
+            <a:spAutoFit/>
+          </a:bodyPr>
+          <a:lstStyle/>
+          <a:p>
+            <a:pPr>
+              <a:spcAft>
+                <a:spcPts val="1710"/>
+              </a:spcAft>
+            </a:pPr>
+            <a:r>
+              <a:rPr sz="3800" b="1">
+                <a:solidFill>
+                  <a:srgbClr val="1F2A44"/>
+                </a:solidFill>
+                <a:latin typeface="Fredoka"/>
+              </a:rPr>
+              <a:t>⚠ «Es un deepfake»</a:t>
+            </a:r>
+          </a:p>
+        </p:txBody>
+      </p:sp>
+      <p:sp>
+        <p:nvSpPr>
+          <p:cNvPr id="4" name="Rectangle 3"/>
+          <p:cNvSpPr/>
+          <p:nvPr/>
+        </p:nvSpPr>
+        <p:spPr>
+          <a:xfrm>
+            <a:off x="640000" y="1600000"/>
+            <a:ext cx="10912000" cy="1100000"/>
+          </a:xfrm>
+          <a:prstGeom prst="rect">
+            <a:avLst/>
+          </a:prstGeom>
+          <a:solidFill>
+            <a:srgbClr val="FBF7EF"/>
+          </a:solidFill>
+          <a:ln>
+            <a:noFill/>
+          </a:ln>
+        </p:spPr>
+        <p:style>
+          <a:lnRef idx="1">
+            <a:schemeClr val="accent1"/>
+          </a:lnRef>
+          <a:fillRef idx="3">
+            <a:schemeClr val="accent1"/>
+          </a:fillRef>
+          <a:effectRef idx="2">
+            <a:schemeClr val="accent1"/>
+          </a:effectRef>
+          <a:fontRef idx="minor">
+            <a:schemeClr val="lt1"/>
+          </a:fontRef>
+        </p:style>
+        <p:txBody>
+          <a:bodyPr rtlCol="0" anchor="ctr"/>
+          <a:lstStyle/>
+          <a:p>
+            <a:pPr algn="ctr"/>
+          </a:p>
+        </p:txBody>
+      </p:sp>
+      <p:sp>
+        <p:nvSpPr>
+          <p:cNvPr id="5" name="TextBox 4"/>
+          <p:cNvSpPr txBox="1"/>
+          <p:nvPr/>
+        </p:nvSpPr>
+        <p:spPr>
+          <a:xfrm>
+            <a:off x="840000" y="1650000"/>
+            <a:ext cx="10512000" cy="1000000"/>
+          </a:xfrm>
+          <a:prstGeom prst="rect">
+            <a:avLst/>
+          </a:prstGeom>
+          <a:noFill/>
+        </p:spPr>
+        <p:txBody>
+          <a:bodyPr wrap="square" anchor="ctr">
+            <a:spAutoFit/>
+          </a:bodyPr>
+          <a:lstStyle/>
+          <a:p>
+            <a:pPr>
+              <a:spcAft>
+                <a:spcPts val="1170"/>
+              </a:spcAft>
+            </a:pPr>
+            <a:r>
+              <a:rPr sz="2600" b="1">
+                <a:solidFill>
+                  <a:srgbClr val="1F2A44"/>
+                </a:solidFill>
+                <a:latin typeface="Nunito Sans"/>
+              </a:rPr>
+              <a:t>Sale un vídeo de un entrenador (inventado) insultando a un árbitro. Él responde: «Es un deepfake, yo nunca dije eso».</a:t>
+            </a:r>
+          </a:p>
+        </p:txBody>
+      </p:sp>
+      <p:sp>
+        <p:nvSpPr>
+          <p:cNvPr id="6" name="TextBox 5"/>
+          <p:cNvSpPr txBox="1"/>
+          <p:nvPr/>
+        </p:nvSpPr>
+        <p:spPr>
+          <a:xfrm>
+            <a:off x="640000" y="2900000"/>
+            <a:ext cx="10912000" cy="3500000"/>
+          </a:xfrm>
+          <a:prstGeom prst="rect">
+            <a:avLst/>
+          </a:prstGeom>
+          <a:noFill/>
+        </p:spPr>
+        <p:txBody>
+          <a:bodyPr wrap="square">
+            <a:spAutoFit/>
+          </a:bodyPr>
+          <a:lstStyle/>
+          <a:p>
+            <a:pPr>
+              <a:spcAft>
+                <a:spcPts val="1080"/>
+              </a:spcAft>
+            </a:pPr>
+            <a:r>
+              <a:rPr sz="2400" b="1">
+                <a:solidFill>
+                  <a:srgbClr val="E8793A"/>
+                </a:solidFill>
+                <a:latin typeface="Nunito Sans"/>
+              </a:rPr>
+              <a:t>1. </a:t>
+            </a:r>
+            <a:r>
+              <a:rPr sz="2400" b="0">
+                <a:solidFill>
+                  <a:srgbClr val="1F2A44"/>
+                </a:solidFill>
+                <a:latin typeface="Nunito Sans"/>
+              </a:rPr>
+              <a:t>Si él dice que es falso, ¿ya está: es un deepfake?</a:t>
+            </a:r>
+          </a:p>
+          <a:p>
+            <a:pPr>
+              <a:spcAft>
+                <a:spcPts val="1080"/>
+              </a:spcAft>
+            </a:pPr>
+            <a:r>
+              <a:rPr sz="2400" b="1">
+                <a:solidFill>
+                  <a:srgbClr val="E8793A"/>
+                </a:solidFill>
+                <a:latin typeface="Nunito Sans"/>
+              </a:rPr>
+              <a:t>2. </a:t>
+            </a:r>
+            <a:r>
+              <a:rPr sz="2400" b="0">
+                <a:solidFill>
+                  <a:srgbClr val="1F2A44"/>
+                </a:solidFill>
+                <a:latin typeface="Nunito Sans"/>
+              </a:rPr>
+              <a:t>Ahora que existen los deepfakes, cualquiera puede decir «es falso» para librarse.</a:t>
+            </a:r>
+          </a:p>
+          <a:p>
+            <a:pPr>
+              <a:spcAft>
+                <a:spcPts val="1080"/>
+              </a:spcAft>
+            </a:pPr>
+            <a:r>
+              <a:rPr sz="2400" b="1">
+                <a:solidFill>
+                  <a:srgbClr val="E8793A"/>
+                </a:solidFill>
+                <a:latin typeface="Nunito Sans"/>
+              </a:rPr>
+              <a:t>3. </a:t>
+            </a:r>
+            <a:r>
+              <a:rPr sz="2400" b="0">
+                <a:solidFill>
+                  <a:srgbClr val="1F2A44"/>
+                </a:solidFill>
+                <a:latin typeface="Nunito Sans"/>
+              </a:rPr>
+              <a:t>Busco la fuente: varios periodistas lo grabaron desde sitios distintos y lo cuentan medios serios.</a:t>
+            </a:r>
+          </a:p>
+          <a:p>
+            <a:pPr>
+              <a:spcAft>
+                <a:spcPts val="1080"/>
+              </a:spcAft>
+            </a:pPr>
+            <a:r>
+              <a:rPr sz="2400" b="1">
+                <a:solidFill>
+                  <a:srgbClr val="E8793A"/>
+                </a:solidFill>
+                <a:latin typeface="Nunito Sans"/>
+              </a:rPr>
+              <a:t>4. </a:t>
+            </a:r>
+            <a:r>
+              <a:rPr sz="2400" b="0">
+                <a:solidFill>
+                  <a:srgbClr val="1F2A44"/>
+                </a:solidFill>
+                <a:latin typeface="Nunito Sans"/>
+              </a:rPr>
+              <a:t>Todo apunta a que el vídeo es real.</a:t>
+            </a:r>
+          </a:p>
+          <a:p>
+            <a:pPr>
+              <a:spcAft>
+                <a:spcPts val="1080"/>
+              </a:spcAft>
+            </a:pPr>
+            <a:r>
+              <a:rPr sz="2400" b="1">
+                <a:solidFill>
+                  <a:srgbClr val="E8793A"/>
+                </a:solidFill>
+                <a:latin typeface="Nunito Sans"/>
+              </a:rPr>
+              <a:t>5. </a:t>
+            </a:r>
+            <a:r>
+              <a:rPr sz="2400" b="0">
+                <a:solidFill>
+                  <a:srgbClr val="1F2A44"/>
+                </a:solidFill>
+                <a:latin typeface="Nunito Sans"/>
+              </a:rPr>
+              <a:t>Conclusión: los deepfakes también sirven para negar vídeos reales. Ni «es real» ni «es falso» sin comprobar.</a:t>
+            </a:r>
+          </a:p>
+        </p:txBody>
+      </p:sp>
+    </p:spTree>
+  </p:cSld>
+  <p:clrMapOvr>
+    <a:masterClrMapping/>
+  </p:clrMapOvr>
+</p:sld>
+</file>
+
+<file path=ppt/slides/slide14.xml><?xml version="1.0" encoding="utf-8"?>
+<p:sld xmlns:a="http://schemas.openxmlformats.org/drawingml/2006/main" xmlns:p="http://schemas.openxmlformats.org/presentationml/2006/main" xmlns:r="http://schemas.openxmlformats.org/officeDocument/2006/relationships">
+  <p:cSld>
+    <p:bg>
+      <p:bgPr>
+        <a:solidFill>
+          <a:srgbClr val="FBF7EF"/>
+        </a:solidFill>
+        <a:effectLst/>
+      </p:bgPr>
+    </p:bg>
+    <p:spTree>
+      <p:nvGrpSpPr>
+        <p:cNvPr id="1" name=""/>
+        <p:cNvGrpSpPr/>
+        <p:nvPr/>
+      </p:nvGrpSpPr>
+      <p:grpSpPr/>
+      <p:sp>
+        <p:nvSpPr>
+          <p:cNvPr id="2" name="TextBox 1"/>
+          <p:cNvSpPr txBox="1"/>
+          <p:nvPr/>
+        </p:nvSpPr>
+        <p:spPr>
+          <a:xfrm>
+            <a:off x="640000" y="380000"/>
+            <a:ext cx="10912000" cy="420000"/>
+          </a:xfrm>
+          <a:prstGeom prst="rect">
+            <a:avLst/>
+          </a:prstGeom>
+          <a:noFill/>
+        </p:spPr>
+        <p:txBody>
+          <a:bodyPr wrap="square">
+            <a:spAutoFit/>
+          </a:bodyPr>
+          <a:lstStyle/>
+          <a:p>
+            <a:pPr>
+              <a:spcAft>
+                <a:spcPts val="630"/>
+              </a:spcAft>
+            </a:pPr>
+            <a:r>
+              <a:rPr sz="1400" b="1">
+                <a:solidFill>
+                  <a:srgbClr val="E8793A"/>
+                </a:solidFill>
+                <a:latin typeface="Nunito Sans"/>
+              </a:rPr>
+              <a:t>LO DE HOY EN TRES LÍNEAS</a:t>
+            </a:r>
+          </a:p>
+        </p:txBody>
+      </p:sp>
+      <p:sp>
+        <p:nvSpPr>
+          <p:cNvPr id="3" name="TextBox 2"/>
+          <p:cNvSpPr txBox="1"/>
+          <p:nvPr/>
+        </p:nvSpPr>
+        <p:spPr>
+          <a:xfrm>
+            <a:off x="640000" y="760000"/>
+            <a:ext cx="10912000" cy="800000"/>
+          </a:xfrm>
+          <a:prstGeom prst="rect">
+            <a:avLst/>
+          </a:prstGeom>
+          <a:noFill/>
+        </p:spPr>
+        <p:txBody>
+          <a:bodyPr wrap="square">
+            <a:spAutoFit/>
+          </a:bodyPr>
+          <a:lstStyle/>
+          <a:p>
+            <a:pPr>
+              <a:spcAft>
+                <a:spcPts val="1710"/>
+              </a:spcAft>
+            </a:pPr>
+            <a:r>
+              <a:rPr sz="3800" b="1">
+                <a:solidFill>
+                  <a:srgbClr val="1F2A44"/>
+                </a:solidFill>
+                <a:latin typeface="Fredoka"/>
+              </a:rPr>
+              <a:t>Escríbelo tú primero, sin mirar</a:t>
+            </a:r>
+          </a:p>
+        </p:txBody>
+      </p:sp>
+      <p:sp>
+        <p:nvSpPr>
+          <p:cNvPr id="4" name="TextBox 3"/>
+          <p:cNvSpPr txBox="1"/>
+          <p:nvPr/>
+        </p:nvSpPr>
+        <p:spPr>
+          <a:xfrm>
+            <a:off x="640000" y="1800000"/>
+            <a:ext cx="10912000" cy="1500000"/>
+          </a:xfrm>
+          <a:prstGeom prst="rect">
+            <a:avLst/>
+          </a:prstGeom>
+          <a:noFill/>
+        </p:spPr>
+        <p:txBody>
+          <a:bodyPr wrap="square">
+            <a:spAutoFit/>
+          </a:bodyPr>
+          <a:lstStyle/>
+          <a:p>
+            <a:pPr>
+              <a:spcAft>
+                <a:spcPts val="1170"/>
+              </a:spcAft>
+            </a:pPr>
+            <a:r>
+              <a:rPr sz="2600" b="0">
+                <a:solidFill>
+                  <a:srgbClr val="4A5568"/>
+                </a:solidFill>
+                <a:latin typeface="Nunito Sans"/>
+              </a:rPr>
+              <a:t>Dos minutos. Después lo comparamos.</a:t>
+            </a:r>
+          </a:p>
+        </p:txBody>
+      </p:sp>
+    </p:spTree>
+  </p:cSld>
+  <p:clrMapOvr>
+    <a:masterClrMapping/>
+  </p:clrMapOvr>
+</p:sld>
+</file>
+
+<file path=ppt/slides/slide15.xml><?xml version="1.0" encoding="utf-8"?>
+<p:sld xmlns:a="http://schemas.openxmlformats.org/drawingml/2006/main" xmlns:p="http://schemas.openxmlformats.org/presentationml/2006/main" xmlns:r="http://schemas.openxmlformats.org/officeDocument/2006/relationships">
+  <p:cSld>
+    <p:bg>
+      <p:bgPr>
+        <a:solidFill>
+          <a:srgbClr val="FBF7EF"/>
+        </a:solidFill>
+        <a:effectLst/>
+      </p:bgPr>
+    </p:bg>
+    <p:spTree>
+      <p:nvGrpSpPr>
+        <p:cNvPr id="1" name=""/>
+        <p:cNvGrpSpPr/>
+        <p:nvPr/>
+      </p:nvGrpSpPr>
+      <p:grpSpPr/>
+      <p:sp>
+        <p:nvSpPr>
+          <p:cNvPr id="2" name="TextBox 1"/>
+          <p:cNvSpPr txBox="1"/>
+          <p:nvPr/>
+        </p:nvSpPr>
+        <p:spPr>
+          <a:xfrm>
+            <a:off x="640000" y="380000"/>
+            <a:ext cx="10912000" cy="420000"/>
+          </a:xfrm>
+          <a:prstGeom prst="rect">
+            <a:avLst/>
+          </a:prstGeom>
+          <a:noFill/>
+        </p:spPr>
+        <p:txBody>
+          <a:bodyPr wrap="square">
+            <a:spAutoFit/>
+          </a:bodyPr>
+          <a:lstStyle/>
+          <a:p>
+            <a:pPr>
+              <a:spcAft>
+                <a:spcPts val="630"/>
+              </a:spcAft>
+            </a:pPr>
+            <a:r>
+              <a:rPr sz="1400" b="1">
+                <a:solidFill>
+                  <a:srgbClr val="E8793A"/>
+                </a:solidFill>
+                <a:latin typeface="Nunito Sans"/>
+              </a:rPr>
+              <a:t>LO DE HOY EN TRES LÍNEAS</a:t>
+            </a:r>
+          </a:p>
+        </p:txBody>
+      </p:sp>
+      <p:sp>
+        <p:nvSpPr>
+          <p:cNvPr id="3" name="TextBox 2"/>
+          <p:cNvSpPr txBox="1"/>
+          <p:nvPr/>
+        </p:nvSpPr>
+        <p:spPr>
+          <a:xfrm>
+            <a:off x="640000" y="1300000"/>
+            <a:ext cx="10912000" cy="4800000"/>
+          </a:xfrm>
+          <a:prstGeom prst="rect">
+            <a:avLst/>
+          </a:prstGeom>
+          <a:noFill/>
+        </p:spPr>
+        <p:txBody>
+          <a:bodyPr wrap="square">
+            <a:spAutoFit/>
+          </a:bodyPr>
+          <a:lstStyle/>
+          <a:p>
+            <a:pPr>
+              <a:spcAft>
+                <a:spcPts val="1350"/>
+              </a:spcAft>
+            </a:pPr>
+            <a:r>
+              <a:rPr sz="3000" b="1">
+                <a:solidFill>
+                  <a:srgbClr val="E8793A"/>
+                </a:solidFill>
+                <a:latin typeface="Nunito Sans"/>
+              </a:rPr>
+              <a:t>1. </a:t>
+            </a:r>
+            <a:r>
+              <a:rPr sz="3000" b="0">
+                <a:solidFill>
+                  <a:srgbClr val="1F2A44"/>
+                </a:solidFill>
+                <a:latin typeface="Nunito Sans"/>
+              </a:rPr>
+              <a:t>Una imagen puede engañar con recortes, montajes, fuera de contexto o con deepfakes.</a:t>
+            </a:r>
+          </a:p>
+          <a:p>
+            <a:pPr>
+              <a:spcAft>
+                <a:spcPts val="1350"/>
+              </a:spcAft>
+            </a:pPr>
+            <a:r>
+              <a:rPr sz="3000" b="1">
+                <a:solidFill>
+                  <a:srgbClr val="E8793A"/>
+                </a:solidFill>
+                <a:latin typeface="Nunito Sans"/>
+              </a:rPr>
+              <a:t>2. </a:t>
+            </a:r>
+            <a:r>
+              <a:rPr sz="3000" b="0">
+                <a:solidFill>
+                  <a:srgbClr val="1F2A44"/>
+                </a:solidFill>
+                <a:latin typeface="Nunito Sans"/>
+              </a:rPr>
+              <a:t>Un deepfake es un vídeo, audio o imagen falso hecho con inteligencia artificial.</a:t>
+            </a:r>
+          </a:p>
+          <a:p>
+            <a:pPr>
+              <a:spcAft>
+                <a:spcPts val="1350"/>
+              </a:spcAft>
+            </a:pPr>
+            <a:r>
+              <a:rPr sz="3000" b="1">
+                <a:solidFill>
+                  <a:srgbClr val="E8793A"/>
+                </a:solidFill>
+                <a:latin typeface="Nunito Sans"/>
+              </a:rPr>
+              <a:t>3. </a:t>
+            </a:r>
+            <a:r>
+              <a:rPr sz="3000" b="0">
+                <a:solidFill>
+                  <a:srgbClr val="1F2A44"/>
+                </a:solidFill>
+                <a:latin typeface="Nunito Sans"/>
+              </a:rPr>
+              <a:t>Mirar bien ya no basta: busca el origen y la fuente antes de creer o compartir.</a:t>
+            </a:r>
+          </a:p>
+        </p:txBody>
+      </p:sp>
+    </p:spTree>
+  </p:cSld>
+  <p:clrMapOvr>
+    <a:masterClrMapping/>
+  </p:clrMapOvr>
+</p:sld>
+</file>
+
+<file path=ppt/slides/slide16.xml><?xml version="1.0" encoding="utf-8"?>
+<p:sld xmlns:a="http://schemas.openxmlformats.org/drawingml/2006/main" xmlns:p="http://schemas.openxmlformats.org/presentationml/2006/main" xmlns:r="http://schemas.openxmlformats.org/officeDocument/2006/relationships">
+  <p:cSld>
+    <p:bg>
+      <p:bgPr>
+        <a:solidFill>
+          <a:srgbClr val="1F2A44"/>
+        </a:solidFill>
+        <a:effectLst/>
+      </p:bgPr>
+    </p:bg>
+    <p:spTree>
+      <p:nvGrpSpPr>
+        <p:cNvPr id="1" name=""/>
+        <p:cNvGrpSpPr/>
+        <p:nvPr/>
+      </p:nvGrpSpPr>
+      <p:grpSpPr/>
+      <p:sp>
+        <p:nvSpPr>
+          <p:cNvPr id="2" name="TextBox 1"/>
+          <p:cNvSpPr txBox="1"/>
+          <p:nvPr/>
+        </p:nvSpPr>
+        <p:spPr>
+          <a:xfrm>
+            <a:off x="640000" y="380000"/>
+            <a:ext cx="10912000" cy="420000"/>
+          </a:xfrm>
+          <a:prstGeom prst="rect">
+            <a:avLst/>
+          </a:prstGeom>
+          <a:noFill/>
+        </p:spPr>
+        <p:txBody>
+          <a:bodyPr wrap="square">
+            <a:spAutoFit/>
+          </a:bodyPr>
+          <a:lstStyle/>
+          <a:p>
+            <a:pPr>
+              <a:spcAft>
+                <a:spcPts val="630"/>
+              </a:spcAft>
+            </a:pPr>
+            <a:r>
+              <a:rPr sz="1400" b="1">
+                <a:solidFill>
+                  <a:srgbClr val="F4B183"/>
+                </a:solidFill>
+                <a:latin typeface="Nunito Sans"/>
+              </a:rPr>
+              <a:t>VÍDEO</a:t>
+            </a:r>
+          </a:p>
+        </p:txBody>
+      </p:sp>
+      <p:sp>
+        <p:nvSpPr>
+          <p:cNvPr id="3" name="TextBox 2"/>
+          <p:cNvSpPr txBox="1"/>
+          <p:nvPr/>
+        </p:nvSpPr>
+        <p:spPr>
+          <a:xfrm>
+            <a:off x="640000" y="760000"/>
+            <a:ext cx="10912000" cy="800000"/>
+          </a:xfrm>
+          <a:prstGeom prst="rect">
+            <a:avLst/>
+          </a:prstGeom>
+          <a:noFill/>
+        </p:spPr>
+        <p:txBody>
+          <a:bodyPr wrap="square">
+            <a:spAutoFit/>
+          </a:bodyPr>
+          <a:lstStyle/>
+          <a:p>
+            <a:pPr>
+              <a:spcAft>
+                <a:spcPts val="1620"/>
+              </a:spcAft>
+            </a:pPr>
+            <a:r>
+              <a:rPr sz="3600" b="1">
+                <a:solidFill>
+                  <a:srgbClr val="FBF7EF"/>
+                </a:solidFill>
+                <a:latin typeface="Fredoka"/>
+              </a:rPr>
+              <a:t>Qué es un deepfake y cómo se puede detectar</a:t>
+            </a:r>
+          </a:p>
+        </p:txBody>
+      </p:sp>
+      <p:sp>
+        <p:nvSpPr>
+          <p:cNvPr id="4" name="TextBox 3"/>
+          <p:cNvSpPr txBox="1"/>
+          <p:nvPr/>
+        </p:nvSpPr>
+        <p:spPr>
+          <a:xfrm>
+            <a:off x="640000" y="2200000"/>
+            <a:ext cx="10912000" cy="2000000"/>
+          </a:xfrm>
+          <a:prstGeom prst="rect">
+            <a:avLst/>
+          </a:prstGeom>
+          <a:noFill/>
+        </p:spPr>
+        <p:txBody>
+          <a:bodyPr wrap="square">
+            <a:spAutoFit/>
+          </a:bodyPr>
+          <a:lstStyle/>
+          <a:p>
+            <a:pPr>
+              <a:spcAft>
+                <a:spcPts val="1080"/>
+              </a:spcAft>
+            </a:pPr>
+            <a:r>
+              <a:rPr sz="2400" b="0">
+                <a:solidFill>
+                  <a:srgbClr val="C9D3E6"/>
+                </a:solidFill>
+                <a:latin typeface="Nunito Sans"/>
+              </a:rPr>
+              <a:t>Que vean lo reales que pueden parecer los deepfakes y por qué no basta con mirar bien.</a:t>
+            </a:r>
+          </a:p>
+        </p:txBody>
+      </p:sp>
+    </p:spTree>
+  </p:cSld>
+  <p:clrMapOvr>
+    <a:masterClrMapping/>
+  </p:clrMapOvr>
+</p:sld>
+</file>
+
+<file path=ppt/slides/slide17.xml><?xml version="1.0" encoding="utf-8"?>
+<p:sld xmlns:a="http://schemas.openxmlformats.org/drawingml/2006/main" xmlns:p="http://schemas.openxmlformats.org/presentationml/2006/main" xmlns:r="http://schemas.openxmlformats.org/officeDocument/2006/relationships">
+  <p:cSld>
+    <p:bg>
+      <p:bgPr>
+        <a:solidFill>
+          <a:srgbClr val="1F2A44"/>
+        </a:solidFill>
+        <a:effectLst/>
+      </p:bgPr>
+    </p:bg>
+    <p:spTree>
+      <p:nvGrpSpPr>
+        <p:cNvPr id="1" name=""/>
+        <p:cNvGrpSpPr/>
+        <p:nvPr/>
+      </p:nvGrpSpPr>
+      <p:grpSpPr/>
+      <p:sp>
+        <p:nvSpPr>
+          <p:cNvPr id="2" name="TextBox 1"/>
+          <p:cNvSpPr txBox="1"/>
+          <p:nvPr/>
+        </p:nvSpPr>
+        <p:spPr>
+          <a:xfrm>
+            <a:off x="640000" y="380000"/>
+            <a:ext cx="10912000" cy="420000"/>
+          </a:xfrm>
+          <a:prstGeom prst="rect">
+            <a:avLst/>
+          </a:prstGeom>
+          <a:noFill/>
+        </p:spPr>
+        <p:txBody>
+          <a:bodyPr wrap="square">
+            <a:spAutoFit/>
+          </a:bodyPr>
+          <a:lstStyle/>
+          <a:p>
+            <a:pPr>
+              <a:spcAft>
+                <a:spcPts val="630"/>
+              </a:spcAft>
+            </a:pPr>
+            <a:r>
+              <a:rPr sz="1400" b="1">
+                <a:solidFill>
+                  <a:srgbClr val="F4B183"/>
+                </a:solidFill>
+                <a:latin typeface="Nunito Sans"/>
+              </a:rPr>
+              <a:t>AHORA, LA HOJA DEL DÍA</a:t>
+            </a:r>
+          </a:p>
+        </p:txBody>
+      </p:sp>
+      <p:sp>
+        <p:nvSpPr>
+          <p:cNvPr id="3" name="TextBox 2"/>
+          <p:cNvSpPr txBox="1"/>
+          <p:nvPr/>
+        </p:nvSpPr>
+        <p:spPr>
+          <a:xfrm>
+            <a:off x="640000" y="760000"/>
+            <a:ext cx="10912000" cy="800000"/>
+          </a:xfrm>
+          <a:prstGeom prst="rect">
+            <a:avLst/>
+          </a:prstGeom>
+          <a:noFill/>
+        </p:spPr>
+        <p:txBody>
+          <a:bodyPr wrap="square">
+            <a:spAutoFit/>
+          </a:bodyPr>
+          <a:lstStyle/>
+          <a:p>
+            <a:pPr>
+              <a:spcAft>
+                <a:spcPts val="1710"/>
+              </a:spcAft>
+            </a:pPr>
+            <a:r>
+              <a:rPr sz="3800" b="1">
+                <a:solidFill>
+                  <a:srgbClr val="FBF7EF"/>
+                </a:solidFill>
+                <a:latin typeface="Fredoka"/>
+              </a:rPr>
+              <a:t>20 minutos · individual · en silencio</a:t>
+            </a:r>
+          </a:p>
+        </p:txBody>
+      </p:sp>
+      <p:sp>
+        <p:nvSpPr>
+          <p:cNvPr id="4" name="Rectangle 3"/>
+          <p:cNvSpPr/>
+          <p:nvPr/>
+        </p:nvSpPr>
+        <p:spPr>
+          <a:xfrm>
+            <a:off x="640000" y="2000000"/>
+            <a:ext cx="3504000" cy="1800000"/>
+          </a:xfrm>
+          <a:prstGeom prst="rect">
+            <a:avLst/>
+          </a:prstGeom>
+          <a:solidFill>
+            <a:srgbClr val="FBF7EF"/>
+          </a:solidFill>
+          <a:ln>
+            <a:noFill/>
+          </a:ln>
+        </p:spPr>
+        <p:style>
+          <a:lnRef idx="1">
+            <a:schemeClr val="accent1"/>
+          </a:lnRef>
+          <a:fillRef idx="3">
+            <a:schemeClr val="accent1"/>
+          </a:fillRef>
+          <a:effectRef idx="2">
+            <a:schemeClr val="accent1"/>
+          </a:effectRef>
+          <a:fontRef idx="minor">
+            <a:schemeClr val="lt1"/>
+          </a:fontRef>
+        </p:style>
+        <p:txBody>
+          <a:bodyPr rtlCol="0" anchor="ctr"/>
+          <a:lstStyle/>
+          <a:p>
+            <a:pPr algn="ctr"/>
+          </a:p>
+        </p:txBody>
+      </p:sp>
+      <p:sp>
+        <p:nvSpPr>
+          <p:cNvPr id="5" name="TextBox 4"/>
+          <p:cNvSpPr txBox="1"/>
+          <p:nvPr/>
+        </p:nvSpPr>
+        <p:spPr>
+          <a:xfrm>
+            <a:off x="790000" y="2100000"/>
+            <a:ext cx="3204000" cy="700000"/>
+          </a:xfrm>
+          <a:prstGeom prst="rect">
+            <a:avLst/>
+          </a:prstGeom>
+          <a:noFill/>
+        </p:spPr>
+        <p:txBody>
+          <a:bodyPr wrap="square">
+            <a:spAutoFit/>
+          </a:bodyPr>
+          <a:lstStyle/>
+          <a:p>
+            <a:pPr>
+              <a:spcAft>
+                <a:spcPts val="990"/>
+              </a:spcAft>
+            </a:pPr>
+            <a:r>
+              <a:rPr sz="2200" b="1">
+                <a:solidFill>
+                  <a:srgbClr val="E8793A"/>
+                </a:solidFill>
+                <a:latin typeface="Nunito Sans"/>
+              </a:rPr>
+              <a:t>Peldaño 1 · Todos</a:t>
+            </a:r>
+          </a:p>
+        </p:txBody>
+      </p:sp>
+      <p:sp>
+        <p:nvSpPr>
+          <p:cNvPr id="6" name="TextBox 5"/>
+          <p:cNvSpPr txBox="1"/>
+          <p:nvPr/>
+        </p:nvSpPr>
+        <p:spPr>
+          <a:xfrm>
+            <a:off x="790000" y="2900000"/>
+            <a:ext cx="3204000" cy="700000"/>
+          </a:xfrm>
+          <a:prstGeom prst="rect">
+            <a:avLst/>
+          </a:prstGeom>
+          <a:noFill/>
+        </p:spPr>
+        <p:txBody>
+          <a:bodyPr wrap="square">
+            <a:spAutoFit/>
+          </a:bodyPr>
+          <a:lstStyle/>
+          <a:p>
+            <a:pPr>
+              <a:spcAft>
+                <a:spcPts val="900"/>
+              </a:spcAft>
+            </a:pPr>
+            <a:r>
+              <a:rPr sz="2000" b="0">
+                <a:solidFill>
+                  <a:srgbClr val="4A5568"/>
+                </a:solidFill>
+                <a:latin typeface="Nunito Sans"/>
+              </a:rPr>
+              <a:t>6 puntos</a:t>
+            </a:r>
+          </a:p>
+        </p:txBody>
+      </p:sp>
+      <p:sp>
+        <p:nvSpPr>
+          <p:cNvPr id="7" name="Rectangle 6"/>
+          <p:cNvSpPr/>
+          <p:nvPr/>
+        </p:nvSpPr>
+        <p:spPr>
+          <a:xfrm>
+            <a:off x="4344000" y="2000000"/>
+            <a:ext cx="3504000" cy="1800000"/>
+          </a:xfrm>
+          <a:prstGeom prst="rect">
+            <a:avLst/>
+          </a:prstGeom>
+          <a:solidFill>
+            <a:srgbClr val="FBF7EF"/>
+          </a:solidFill>
+          <a:ln>
+            <a:noFill/>
+          </a:ln>
+        </p:spPr>
+        <p:style>
+          <a:lnRef idx="1">
+            <a:schemeClr val="accent1"/>
+          </a:lnRef>
+          <a:fillRef idx="3">
+            <a:schemeClr val="accent1"/>
+          </a:fillRef>
+          <a:effectRef idx="2">
+            <a:schemeClr val="accent1"/>
+          </a:effectRef>
+          <a:fontRef idx="minor">
+            <a:schemeClr val="lt1"/>
+          </a:fontRef>
+        </p:style>
+        <p:txBody>
+          <a:bodyPr rtlCol="0" anchor="ctr"/>
+          <a:lstStyle/>
+          <a:p>
+            <a:pPr algn="ctr"/>
+          </a:p>
+        </p:txBody>
+      </p:sp>
+      <p:sp>
+        <p:nvSpPr>
+          <p:cNvPr id="8" name="TextBox 7"/>
+          <p:cNvSpPr txBox="1"/>
+          <p:nvPr/>
+        </p:nvSpPr>
+        <p:spPr>
+          <a:xfrm>
+            <a:off x="4494000" y="2100000"/>
+            <a:ext cx="3204000" cy="700000"/>
+          </a:xfrm>
+          <a:prstGeom prst="rect">
+            <a:avLst/>
+          </a:prstGeom>
+          <a:noFill/>
+        </p:spPr>
+        <p:txBody>
+          <a:bodyPr wrap="square">
+            <a:spAutoFit/>
+          </a:bodyPr>
+          <a:lstStyle/>
+          <a:p>
+            <a:pPr>
+              <a:spcAft>
+                <a:spcPts val="990"/>
+              </a:spcAft>
+            </a:pPr>
+            <a:r>
+              <a:rPr sz="2200" b="1">
+                <a:solidFill>
+                  <a:srgbClr val="E8793A"/>
+                </a:solidFill>
+                <a:latin typeface="Nunito Sans"/>
+              </a:rPr>
+              <a:t>Peldaño 2 · Repaso</a:t>
+            </a:r>
+          </a:p>
+        </p:txBody>
+      </p:sp>
+      <p:sp>
+        <p:nvSpPr>
+          <p:cNvPr id="9" name="TextBox 8"/>
+          <p:cNvSpPr txBox="1"/>
+          <p:nvPr/>
+        </p:nvSpPr>
+        <p:spPr>
+          <a:xfrm>
+            <a:off x="4494000" y="2900000"/>
+            <a:ext cx="3204000" cy="700000"/>
+          </a:xfrm>
+          <a:prstGeom prst="rect">
+            <a:avLst/>
+          </a:prstGeom>
+          <a:noFill/>
+        </p:spPr>
+        <p:txBody>
+          <a:bodyPr wrap="square">
+            <a:spAutoFit/>
+          </a:bodyPr>
+          <a:lstStyle/>
+          <a:p>
+            <a:pPr>
+              <a:spcAft>
+                <a:spcPts val="900"/>
+              </a:spcAft>
+            </a:pPr>
+            <a:r>
+              <a:rPr sz="2000" b="0">
+                <a:solidFill>
+                  <a:srgbClr val="4A5568"/>
+                </a:solidFill>
+                <a:latin typeface="Nunito Sans"/>
+              </a:rPr>
+              <a:t>2 puntos</a:t>
+            </a:r>
+          </a:p>
+        </p:txBody>
+      </p:sp>
+      <p:sp>
+        <p:nvSpPr>
+          <p:cNvPr id="10" name="Rectangle 9"/>
+          <p:cNvSpPr/>
+          <p:nvPr/>
+        </p:nvSpPr>
+        <p:spPr>
+          <a:xfrm>
+            <a:off x="8048000" y="2000000"/>
+            <a:ext cx="3504000" cy="1800000"/>
+          </a:xfrm>
+          <a:prstGeom prst="rect">
+            <a:avLst/>
+          </a:prstGeom>
+          <a:solidFill>
+            <a:srgbClr val="FBF7EF"/>
+          </a:solidFill>
+          <a:ln>
+            <a:noFill/>
+          </a:ln>
+        </p:spPr>
+        <p:style>
+          <a:lnRef idx="1">
+            <a:schemeClr val="accent1"/>
+          </a:lnRef>
+          <a:fillRef idx="3">
+            <a:schemeClr val="accent1"/>
+          </a:fillRef>
+          <a:effectRef idx="2">
+            <a:schemeClr val="accent1"/>
+          </a:effectRef>
+          <a:fontRef idx="minor">
+            <a:schemeClr val="lt1"/>
+          </a:fontRef>
+        </p:style>
+        <p:txBody>
+          <a:bodyPr rtlCol="0" anchor="ctr"/>
+          <a:lstStyle/>
+          <a:p>
+            <a:pPr algn="ctr"/>
+          </a:p>
+        </p:txBody>
+      </p:sp>
+      <p:sp>
+        <p:nvSpPr>
+          <p:cNvPr id="11" name="TextBox 10"/>
+          <p:cNvSpPr txBox="1"/>
+          <p:nvPr/>
+        </p:nvSpPr>
+        <p:spPr>
+          <a:xfrm>
+            <a:off x="8198000" y="2100000"/>
+            <a:ext cx="3204000" cy="700000"/>
+          </a:xfrm>
+          <a:prstGeom prst="rect">
+            <a:avLst/>
+          </a:prstGeom>
+          <a:noFill/>
+        </p:spPr>
+        <p:txBody>
+          <a:bodyPr wrap="square">
+            <a:spAutoFit/>
+          </a:bodyPr>
+          <a:lstStyle/>
+          <a:p>
+            <a:pPr>
+              <a:spcAft>
+                <a:spcPts val="990"/>
+              </a:spcAft>
+            </a:pPr>
+            <a:r>
+              <a:rPr sz="2200" b="1">
+                <a:solidFill>
+                  <a:srgbClr val="E8793A"/>
+                </a:solidFill>
+                <a:latin typeface="Nunito Sans"/>
+              </a:rPr>
+              <a:t>Peldaño 3 · Reto</a:t>
+            </a:r>
+          </a:p>
+        </p:txBody>
+      </p:sp>
+      <p:sp>
+        <p:nvSpPr>
+          <p:cNvPr id="12" name="TextBox 11"/>
+          <p:cNvSpPr txBox="1"/>
+          <p:nvPr/>
+        </p:nvSpPr>
+        <p:spPr>
+          <a:xfrm>
+            <a:off x="8198000" y="2900000"/>
+            <a:ext cx="3204000" cy="700000"/>
+          </a:xfrm>
+          <a:prstGeom prst="rect">
+            <a:avLst/>
+          </a:prstGeom>
+          <a:noFill/>
+        </p:spPr>
+        <p:txBody>
+          <a:bodyPr wrap="square">
+            <a:spAutoFit/>
+          </a:bodyPr>
+          <a:lstStyle/>
+          <a:p>
+            <a:pPr>
+              <a:spcAft>
+                <a:spcPts val="900"/>
+              </a:spcAft>
+            </a:pPr>
+            <a:r>
+              <a:rPr sz="2000" b="0">
+                <a:solidFill>
+                  <a:srgbClr val="4A5568"/>
+                </a:solidFill>
+                <a:latin typeface="Nunito Sans"/>
+              </a:rPr>
+              <a:t>2 puntos</a:t>
+            </a:r>
+          </a:p>
+        </p:txBody>
+      </p:sp>
+      <p:sp>
+        <p:nvSpPr>
+          <p:cNvPr id="13" name="TextBox 12"/>
+          <p:cNvSpPr txBox="1"/>
+          <p:nvPr/>
+        </p:nvSpPr>
+        <p:spPr>
+          <a:xfrm>
+            <a:off x="640000" y="4200000"/>
+            <a:ext cx="10912000" cy="1500000"/>
+          </a:xfrm>
+          <a:prstGeom prst="rect">
+            <a:avLst/>
+          </a:prstGeom>
+          <a:noFill/>
+        </p:spPr>
+        <p:txBody>
+          <a:bodyPr wrap="square">
+            <a:spAutoFit/>
+          </a:bodyPr>
+          <a:lstStyle/>
+          <a:p>
+            <a:pPr>
+              <a:spcAft>
+                <a:spcPts val="990"/>
+              </a:spcAft>
+            </a:pPr>
+            <a:r>
+              <a:rPr sz="2200" b="0">
+                <a:solidFill>
+                  <a:srgbClr val="C9D3E6"/>
+                </a:solidFill>
+                <a:latin typeface="Nunito Sans"/>
+              </a:rPr>
+              <a:t>1.ª pasada: sin apuntes, con bolígrafo. 2.ª pasada: con los apuntes, en otro color. Marca «seguro» o «dudo» en cada respuesta.</a:t>
+            </a:r>
+          </a:p>
+        </p:txBody>
+      </p:sp>
+    </p:spTree>
+  </p:cSld>
+  <p:clrMapOvr>
+    <a:masterClrMapping/>
+  </p:clrMapOvr>
+</p:sld>
+</file>
+
+<file path=ppt/slides/slide2.xml><?xml version="1.0" encoding="utf-8"?>
+<p:sld xmlns:a="http://schemas.openxmlformats.org/drawingml/2006/main" xmlns:p="http://schemas.openxmlformats.org/presentationml/2006/main" xmlns:r="http://schemas.openxmlformats.org/officeDocument/2006/relationships">
+  <p:cSld>
+    <p:bg>
+      <p:bgPr>
+        <a:solidFill>
+          <a:srgbClr val="FBF7EF"/>
+        </a:solidFill>
+        <a:effectLst/>
+      </p:bgPr>
+    </p:bg>
+    <p:spTree>
+      <p:nvGrpSpPr>
+        <p:cNvPr id="1" name=""/>
+        <p:cNvGrpSpPr/>
+        <p:nvPr/>
+      </p:nvGrpSpPr>
+      <p:grpSpPr/>
+      <p:sp>
+        <p:nvSpPr>
+          <p:cNvPr id="2" name="TextBox 1"/>
+          <p:cNvSpPr txBox="1"/>
+          <p:nvPr/>
+        </p:nvSpPr>
+        <p:spPr>
+          <a:xfrm>
+            <a:off x="640000" y="380000"/>
+            <a:ext cx="10912000" cy="420000"/>
+          </a:xfrm>
+          <a:prstGeom prst="rect">
+            <a:avLst/>
+          </a:prstGeom>
+          <a:noFill/>
+        </p:spPr>
+        <p:txBody>
+          <a:bodyPr wrap="square">
+            <a:spAutoFit/>
+          </a:bodyPr>
+          <a:lstStyle/>
+          <a:p>
+            <a:pPr>
+              <a:spcAft>
+                <a:spcPts val="630"/>
+              </a:spcAft>
+            </a:pPr>
+            <a:r>
+              <a:rPr sz="1400" b="1">
+                <a:solidFill>
+                  <a:srgbClr val="E8793A"/>
+                </a:solidFill>
+                <a:latin typeface="Nunito Sans"/>
+              </a:rPr>
+              <a:t>ANTES DE EMPEZAR · SIN MIRAR</a:t>
+            </a:r>
+          </a:p>
+        </p:txBody>
+      </p:sp>
+      <p:sp>
+        <p:nvSpPr>
+          <p:cNvPr id="3" name="TextBox 2"/>
+          <p:cNvSpPr txBox="1"/>
+          <p:nvPr/>
+        </p:nvSpPr>
+        <p:spPr>
+          <a:xfrm>
+            <a:off x="640000" y="760000"/>
+            <a:ext cx="10912000" cy="800000"/>
+          </a:xfrm>
+          <a:prstGeom prst="rect">
+            <a:avLst/>
+          </a:prstGeom>
+          <a:noFill/>
+        </p:spPr>
+        <p:txBody>
+          <a:bodyPr wrap="square">
+            <a:spAutoFit/>
+          </a:bodyPr>
+          <a:lstStyle/>
+          <a:p>
+            <a:pPr>
+              <a:spcAft>
+                <a:spcPts val="1440"/>
+              </a:spcAft>
+            </a:pPr>
+            <a:r>
+              <a:rPr sz="3200" b="1">
+                <a:solidFill>
+                  <a:srgbClr val="1F2A44"/>
+                </a:solidFill>
+                <a:latin typeface="Fredoka"/>
+              </a:rPr>
+              <a:t>Escribe en tu hoja las palabras que faltan</a:t>
+            </a:r>
+          </a:p>
+        </p:txBody>
+      </p:sp>
+      <p:sp>
+        <p:nvSpPr>
+          <p:cNvPr id="4" name="TextBox 3"/>
+          <p:cNvSpPr txBox="1"/>
+          <p:nvPr/>
+        </p:nvSpPr>
+        <p:spPr>
+          <a:xfrm>
+            <a:off x="640000" y="1800000"/>
+            <a:ext cx="10912000" cy="4300000"/>
+          </a:xfrm>
+          <a:prstGeom prst="rect">
+            <a:avLst/>
+          </a:prstGeom>
+          <a:noFill/>
+        </p:spPr>
+        <p:txBody>
+          <a:bodyPr wrap="square">
+            <a:spAutoFit/>
+          </a:bodyPr>
+          <a:lstStyle/>
+          <a:p>
+            <a:pPr>
+              <a:spcAft>
+                <a:spcPts val="1170"/>
+              </a:spcAft>
+            </a:pPr>
+            <a:r>
+              <a:rPr sz="2600" b="1">
+                <a:solidFill>
+                  <a:srgbClr val="E8793A"/>
+                </a:solidFill>
+                <a:latin typeface="Nunito Sans"/>
+              </a:rPr>
+              <a:t>1. </a:t>
+            </a:r>
+            <a:r>
+              <a:rPr sz="2600" b="0">
+                <a:solidFill>
+                  <a:srgbClr val="1F2A44"/>
+                </a:solidFill>
+                <a:latin typeface="Nunito Sans"/>
+              </a:rPr>
+              <a:t>La lectura ______ es salir de la página y buscar qué dicen otros de ella.  (sesión 35)</a:t>
+            </a:r>
+          </a:p>
+          <a:p>
+            <a:pPr>
+              <a:spcAft>
+                <a:spcPts val="1170"/>
+              </a:spcAft>
+            </a:pPr>
+            <a:r>
+              <a:rPr sz="2600" b="1">
+                <a:solidFill>
+                  <a:srgbClr val="E8793A"/>
+                </a:solidFill>
+                <a:latin typeface="Nunito Sans"/>
+              </a:rPr>
+              <a:t>2. </a:t>
+            </a:r>
+            <a:r>
+              <a:rPr sz="2600" b="0">
+                <a:solidFill>
+                  <a:srgbClr val="1F2A44"/>
+                </a:solidFill>
+                <a:latin typeface="Nunito Sans"/>
+              </a:rPr>
+              <a:t>Para saber de dónde viene una foto, hago una búsqueda ______.  (sesión 35)</a:t>
+            </a:r>
+          </a:p>
+          <a:p>
+            <a:pPr>
+              <a:spcAft>
+                <a:spcPts val="1170"/>
+              </a:spcAft>
+            </a:pPr>
+            <a:r>
+              <a:rPr sz="2600" b="1">
+                <a:solidFill>
+                  <a:srgbClr val="E8793A"/>
+                </a:solidFill>
+                <a:latin typeface="Nunito Sans"/>
+              </a:rPr>
+              <a:t>3. </a:t>
+            </a:r>
+            <a:r>
+              <a:rPr sz="2600" b="0">
+                <a:solidFill>
+                  <a:srgbClr val="1F2A44"/>
+                </a:solidFill>
+                <a:latin typeface="Nunito Sans"/>
+              </a:rPr>
+              <a:t>Creer es pensar que algo es ______.  (sesión 31)</a:t>
+            </a:r>
+          </a:p>
+        </p:txBody>
+      </p:sp>
+    </p:spTree>
+  </p:cSld>
+  <p:clrMapOvr>
+    <a:masterClrMapping/>
+  </p:clrMapOvr>
+</p:sld>
+</file>
+
+<file path=ppt/slides/slide3.xml><?xml version="1.0" encoding="utf-8"?>
+<p:sld xmlns:a="http://schemas.openxmlformats.org/drawingml/2006/main" xmlns:p="http://schemas.openxmlformats.org/presentationml/2006/main" xmlns:r="http://schemas.openxmlformats.org/officeDocument/2006/relationships">
+  <p:cSld>
+    <p:bg>
+      <p:bgPr>
+        <a:solidFill>
+          <a:srgbClr val="FBF7EF"/>
+        </a:solidFill>
+        <a:effectLst/>
+      </p:bgPr>
+    </p:bg>
+    <p:spTree>
+      <p:nvGrpSpPr>
+        <p:cNvPr id="1" name=""/>
+        <p:cNvGrpSpPr/>
+        <p:nvPr/>
+      </p:nvGrpSpPr>
+      <p:grpSpPr/>
+      <p:sp>
+        <p:nvSpPr>
+          <p:cNvPr id="2" name="TextBox 1"/>
+          <p:cNvSpPr txBox="1"/>
+          <p:nvPr/>
+        </p:nvSpPr>
+        <p:spPr>
+          <a:xfrm>
+            <a:off x="640000" y="380000"/>
+            <a:ext cx="10912000" cy="420000"/>
+          </a:xfrm>
+          <a:prstGeom prst="rect">
+            <a:avLst/>
+          </a:prstGeom>
+          <a:noFill/>
+        </p:spPr>
+        <p:txBody>
+          <a:bodyPr wrap="square">
+            <a:spAutoFit/>
+          </a:bodyPr>
+          <a:lstStyle/>
+          <a:p>
+            <a:pPr>
+              <a:spcAft>
+                <a:spcPts val="630"/>
+              </a:spcAft>
+            </a:pPr>
+            <a:r>
+              <a:rPr sz="1400" b="1">
+                <a:solidFill>
+                  <a:srgbClr val="E8793A"/>
+                </a:solidFill>
+                <a:latin typeface="Nunito Sans"/>
+              </a:rPr>
+              <a:t>ANTES DE EMPEZAR · SIN MIRAR</a:t>
+            </a:r>
+          </a:p>
+        </p:txBody>
+      </p:sp>
+      <p:sp>
+        <p:nvSpPr>
+          <p:cNvPr id="3" name="TextBox 2"/>
+          <p:cNvSpPr txBox="1"/>
+          <p:nvPr/>
+        </p:nvSpPr>
+        <p:spPr>
+          <a:xfrm>
+            <a:off x="640000" y="760000"/>
+            <a:ext cx="10912000" cy="800000"/>
+          </a:xfrm>
+          <a:prstGeom prst="rect">
+            <a:avLst/>
+          </a:prstGeom>
+          <a:noFill/>
+        </p:spPr>
+        <p:txBody>
+          <a:bodyPr wrap="square">
+            <a:spAutoFit/>
+          </a:bodyPr>
+          <a:lstStyle/>
+          <a:p>
+            <a:pPr>
+              <a:spcAft>
+                <a:spcPts val="1440"/>
+              </a:spcAft>
+            </a:pPr>
+            <a:r>
+              <a:rPr sz="3200" b="1">
+                <a:solidFill>
+                  <a:srgbClr val="1F2A44"/>
+                </a:solidFill>
+                <a:latin typeface="Fredoka"/>
+              </a:rPr>
+              <a:t>Corrige con otro color</a:t>
+            </a:r>
+          </a:p>
+        </p:txBody>
+      </p:sp>
+      <p:sp>
+        <p:nvSpPr>
+          <p:cNvPr id="4" name="TextBox 3"/>
+          <p:cNvSpPr txBox="1"/>
+          <p:nvPr/>
+        </p:nvSpPr>
+        <p:spPr>
+          <a:xfrm>
+            <a:off x="640000" y="1800000"/>
+            <a:ext cx="10912000" cy="4300000"/>
+          </a:xfrm>
+          <a:prstGeom prst="rect">
+            <a:avLst/>
+          </a:prstGeom>
+          <a:noFill/>
+        </p:spPr>
+        <p:txBody>
+          <a:bodyPr wrap="square">
+            <a:spAutoFit/>
+          </a:bodyPr>
+          <a:lstStyle/>
+          <a:p>
+            <a:pPr>
+              <a:spcAft>
+                <a:spcPts val="1170"/>
+              </a:spcAft>
+            </a:pPr>
+            <a:r>
+              <a:rPr sz="2600" b="1">
+                <a:solidFill>
+                  <a:srgbClr val="E8793A"/>
+                </a:solidFill>
+                <a:latin typeface="Nunito Sans"/>
+              </a:rPr>
+              <a:t>1. </a:t>
+            </a:r>
+            <a:r>
+              <a:rPr sz="2600" b="0">
+                <a:solidFill>
+                  <a:srgbClr val="1F2A44"/>
+                </a:solidFill>
+                <a:latin typeface="Nunito Sans"/>
+              </a:rPr>
+              <a:t>La lectura </a:t>
+            </a:r>
+            <a:r>
+              <a:rPr sz="2600" b="1">
+                <a:solidFill>
+                  <a:srgbClr val="1F2A44"/>
+                </a:solidFill>
+                <a:latin typeface="Nunito Sans"/>
+              </a:rPr>
+              <a:t>lateral</a:t>
+            </a:r>
+            <a:r>
+              <a:rPr sz="2600" b="0">
+                <a:solidFill>
+                  <a:srgbClr val="1F2A44"/>
+                </a:solidFill>
+                <a:latin typeface="Nunito Sans"/>
+              </a:rPr>
+              <a:t> es salir de la página y buscar qué dicen otros de ella.  (sesión 35)</a:t>
+            </a:r>
+          </a:p>
+          <a:p>
+            <a:pPr>
+              <a:spcAft>
+                <a:spcPts val="1170"/>
+              </a:spcAft>
+            </a:pPr>
+            <a:r>
+              <a:rPr sz="2600" b="1">
+                <a:solidFill>
+                  <a:srgbClr val="E8793A"/>
+                </a:solidFill>
+                <a:latin typeface="Nunito Sans"/>
+              </a:rPr>
+              <a:t>2. </a:t>
+            </a:r>
+            <a:r>
+              <a:rPr sz="2600" b="0">
+                <a:solidFill>
+                  <a:srgbClr val="1F2A44"/>
+                </a:solidFill>
+                <a:latin typeface="Nunito Sans"/>
+              </a:rPr>
+              <a:t>Para saber de dónde viene una foto, hago una búsqueda </a:t>
+            </a:r>
+            <a:r>
+              <a:rPr sz="2600" b="1">
+                <a:solidFill>
+                  <a:srgbClr val="1F2A44"/>
+                </a:solidFill>
+                <a:latin typeface="Nunito Sans"/>
+              </a:rPr>
+              <a:t>inversa</a:t>
+            </a:r>
+            <a:r>
+              <a:rPr sz="2600" b="0">
+                <a:solidFill>
+                  <a:srgbClr val="1F2A44"/>
+                </a:solidFill>
+                <a:latin typeface="Nunito Sans"/>
+              </a:rPr>
+              <a:t>.  (sesión 35)</a:t>
+            </a:r>
+          </a:p>
+          <a:p>
+            <a:pPr>
+              <a:spcAft>
+                <a:spcPts val="1170"/>
+              </a:spcAft>
+            </a:pPr>
+            <a:r>
+              <a:rPr sz="2600" b="1">
+                <a:solidFill>
+                  <a:srgbClr val="E8793A"/>
+                </a:solidFill>
+                <a:latin typeface="Nunito Sans"/>
+              </a:rPr>
+              <a:t>3. </a:t>
+            </a:r>
+            <a:r>
+              <a:rPr sz="2600" b="0">
+                <a:solidFill>
+                  <a:srgbClr val="1F2A44"/>
+                </a:solidFill>
+                <a:latin typeface="Nunito Sans"/>
+              </a:rPr>
+              <a:t>Creer es pensar que algo es </a:t>
+            </a:r>
+            <a:r>
+              <a:rPr sz="2600" b="1">
+                <a:solidFill>
+                  <a:srgbClr val="1F2A44"/>
+                </a:solidFill>
+                <a:latin typeface="Nunito Sans"/>
+              </a:rPr>
+              <a:t>verdad</a:t>
+            </a:r>
+            <a:r>
+              <a:rPr sz="2600" b="0">
+                <a:solidFill>
+                  <a:srgbClr val="1F2A44"/>
+                </a:solidFill>
+                <a:latin typeface="Nunito Sans"/>
+              </a:rPr>
+              <a:t>.  (sesión 31)</a:t>
+            </a:r>
+          </a:p>
+        </p:txBody>
+      </p:sp>
+    </p:spTree>
+  </p:cSld>
+  <p:clrMapOvr>
+    <a:masterClrMapping/>
+  </p:clrMapOvr>
+</p:sld>
+</file>
+
+<file path=ppt/slides/slide4.xml><?xml version="1.0" encoding="utf-8"?>
+<p:sld xmlns:a="http://schemas.openxmlformats.org/drawingml/2006/main" xmlns:p="http://schemas.openxmlformats.org/presentationml/2006/main" xmlns:r="http://schemas.openxmlformats.org/officeDocument/2006/relationships">
+  <p:cSld>
+    <p:bg>
+      <p:bgPr>
+        <a:solidFill>
+          <a:srgbClr val="FBF7EF"/>
+        </a:solidFill>
+        <a:effectLst/>
+      </p:bgPr>
+    </p:bg>
+    <p:spTree>
+      <p:nvGrpSpPr>
+        <p:cNvPr id="1" name=""/>
+        <p:cNvGrpSpPr/>
+        <p:nvPr/>
+      </p:nvGrpSpPr>
+      <p:grpSpPr/>
+      <p:sp>
+        <p:nvSpPr>
+          <p:cNvPr id="2" name="TextBox 1"/>
+          <p:cNvSpPr txBox="1"/>
+          <p:nvPr/>
+        </p:nvSpPr>
+        <p:spPr>
+          <a:xfrm>
+            <a:off x="640000" y="380000"/>
+            <a:ext cx="10912000" cy="420000"/>
+          </a:xfrm>
+          <a:prstGeom prst="rect">
+            <a:avLst/>
+          </a:prstGeom>
+          <a:noFill/>
+        </p:spPr>
+        <p:txBody>
+          <a:bodyPr wrap="square">
+            <a:spAutoFit/>
+          </a:bodyPr>
+          <a:lstStyle/>
+          <a:p>
+            <a:pPr>
+              <a:spcAft>
+                <a:spcPts val="630"/>
+              </a:spcAft>
+            </a:pPr>
+            <a:r>
+              <a:rPr sz="1400" b="1">
+                <a:solidFill>
+                  <a:srgbClr val="E8793A"/>
+                </a:solidFill>
+                <a:latin typeface="Nunito Sans"/>
+              </a:rPr>
+              <a:t>PARA EMPEZAR</a:t>
+            </a:r>
+          </a:p>
+        </p:txBody>
+      </p:sp>
+      <p:sp>
+        <p:nvSpPr>
+          <p:cNvPr id="3" name="Rectangle 2"/>
+          <p:cNvSpPr/>
+          <p:nvPr/>
+        </p:nvSpPr>
+        <p:spPr>
+          <a:xfrm>
+            <a:off x="640000" y="1300000"/>
+            <a:ext cx="90000" cy="2400000"/>
+          </a:xfrm>
+          <a:prstGeom prst="rect">
+            <a:avLst/>
+          </a:prstGeom>
+          <a:solidFill>
+            <a:srgbClr val="E8793A"/>
+          </a:solidFill>
+          <a:ln>
+            <a:noFill/>
+          </a:ln>
+        </p:spPr>
+        <p:style>
+          <a:lnRef idx="1">
+            <a:schemeClr val="accent1"/>
+          </a:lnRef>
+          <a:fillRef idx="3">
+            <a:schemeClr val="accent1"/>
+          </a:fillRef>
+          <a:effectRef idx="2">
+            <a:schemeClr val="accent1"/>
+          </a:effectRef>
+          <a:fontRef idx="minor">
+            <a:schemeClr val="lt1"/>
+          </a:fontRef>
+        </p:style>
+        <p:txBody>
+          <a:bodyPr rtlCol="0" anchor="ctr"/>
+          <a:lstStyle/>
+          <a:p>
+            <a:pPr algn="ctr"/>
+          </a:p>
+        </p:txBody>
+      </p:sp>
+      <p:sp>
+        <p:nvSpPr>
+          <p:cNvPr id="4" name="TextBox 3"/>
+          <p:cNvSpPr txBox="1"/>
+          <p:nvPr/>
+        </p:nvSpPr>
+        <p:spPr>
+          <a:xfrm>
+            <a:off x="940000" y="1300000"/>
+            <a:ext cx="10612000" cy="2600000"/>
+          </a:xfrm>
+          <a:prstGeom prst="rect">
+            <a:avLst/>
+          </a:prstGeom>
+          <a:noFill/>
+        </p:spPr>
+        <p:txBody>
+          <a:bodyPr wrap="square" anchor="ctr">
+            <a:spAutoFit/>
+          </a:bodyPr>
+          <a:lstStyle/>
+          <a:p>
+            <a:pPr>
+              <a:spcAft>
+                <a:spcPts val="1530"/>
+              </a:spcAft>
+            </a:pPr>
+            <a:r>
+              <a:rPr sz="3400" b="1">
+                <a:solidFill>
+                  <a:srgbClr val="1F2A44"/>
+                </a:solidFill>
+                <a:latin typeface="Nunito Sans"/>
+              </a:rPr>
+              <a:t>Dicen que «una imagen vale más que mil palabras». Pero alguien eligió qué salía en la foto y qué se quedaba fuera.</a:t>
+            </a:r>
+          </a:p>
+        </p:txBody>
+      </p:sp>
+      <p:sp>
+        <p:nvSpPr>
+          <p:cNvPr id="5" name="TextBox 4"/>
+          <p:cNvSpPr txBox="1"/>
+          <p:nvPr/>
+        </p:nvSpPr>
+        <p:spPr>
+          <a:xfrm>
+            <a:off x="640000" y="4300000"/>
+            <a:ext cx="10912000" cy="1200000"/>
+          </a:xfrm>
+          <a:prstGeom prst="rect">
+            <a:avLst/>
+          </a:prstGeom>
+          <a:noFill/>
+        </p:spPr>
+        <p:txBody>
+          <a:bodyPr wrap="square">
+            <a:spAutoFit/>
+          </a:bodyPr>
+          <a:lstStyle/>
+          <a:p>
+            <a:pPr>
+              <a:spcAft>
+                <a:spcPts val="1170"/>
+              </a:spcAft>
+            </a:pPr>
+            <a:r>
+              <a:rPr sz="2600" b="0">
+                <a:solidFill>
+                  <a:srgbClr val="4A5568"/>
+                </a:solidFill>
+                <a:latin typeface="Nunito Sans"/>
+              </a:rPr>
+              <a:t>¿Te fías más de una foto que de un texto? ¿Por qué?</a:t>
+            </a:r>
+          </a:p>
+        </p:txBody>
+      </p:sp>
+    </p:spTree>
+  </p:cSld>
+  <p:clrMapOvr>
+    <a:masterClrMapping/>
+  </p:clrMapOvr>
+</p:sld>
+</file>
+
+<file path=ppt/slides/slide5.xml><?xml version="1.0" encoding="utf-8"?>
+<p:sld xmlns:a="http://schemas.openxmlformats.org/drawingml/2006/main" xmlns:p="http://schemas.openxmlformats.org/presentationml/2006/main" xmlns:r="http://schemas.openxmlformats.org/officeDocument/2006/relationships">
+  <p:cSld>
+    <p:bg>
+      <p:bgPr>
+        <a:solidFill>
+          <a:srgbClr val="1F2A44"/>
+        </a:solidFill>
+        <a:effectLst/>
+      </p:bgPr>
+    </p:bg>
+    <p:spTree>
+      <p:nvGrpSpPr>
+        <p:cNvPr id="1" name=""/>
+        <p:cNvGrpSpPr/>
+        <p:nvPr/>
+      </p:nvGrpSpPr>
+      <p:grpSpPr/>
+      <p:sp>
+        <p:nvSpPr>
+          <p:cNvPr id="2" name="TextBox 1"/>
+          <p:cNvSpPr txBox="1"/>
+          <p:nvPr/>
+        </p:nvSpPr>
+        <p:spPr>
+          <a:xfrm>
+            <a:off x="640000" y="2300000"/>
+            <a:ext cx="10912000" cy="500000"/>
+          </a:xfrm>
+          <a:prstGeom prst="rect">
+            <a:avLst/>
+          </a:prstGeom>
+          <a:noFill/>
+        </p:spPr>
+        <p:txBody>
+          <a:bodyPr wrap="square">
+            <a:spAutoFit/>
+          </a:bodyPr>
+          <a:lstStyle/>
+          <a:p>
+            <a:pPr>
+              <a:spcAft>
+                <a:spcPts val="810"/>
+              </a:spcAft>
+            </a:pPr>
+            <a:r>
+              <a:rPr sz="1800" b="1">
+                <a:solidFill>
+                  <a:srgbClr val="F4B183"/>
+                </a:solidFill>
+                <a:latin typeface="Nunito Sans"/>
+              </a:rPr>
+              <a:t>BLOQUE 1</a:t>
+            </a:r>
+          </a:p>
+        </p:txBody>
+      </p:sp>
+      <p:sp>
+        <p:nvSpPr>
+          <p:cNvPr id="3" name="TextBox 2"/>
+          <p:cNvSpPr txBox="1"/>
+          <p:nvPr/>
+        </p:nvSpPr>
+        <p:spPr>
+          <a:xfrm>
+            <a:off x="640000" y="2800000"/>
+            <a:ext cx="10912000" cy="800000"/>
+          </a:xfrm>
+          <a:prstGeom prst="rect">
+            <a:avLst/>
+          </a:prstGeom>
+          <a:noFill/>
+        </p:spPr>
+        <p:txBody>
+          <a:bodyPr wrap="square">
+            <a:spAutoFit/>
+          </a:bodyPr>
+          <a:lstStyle/>
+          <a:p>
+            <a:pPr>
+              <a:spcAft>
+                <a:spcPts val="2160"/>
+              </a:spcAft>
+            </a:pPr>
+            <a:r>
+              <a:rPr sz="4800" b="1">
+                <a:solidFill>
+                  <a:srgbClr val="FBF7EF"/>
+                </a:solidFill>
+                <a:latin typeface="Fredoka"/>
+              </a:rPr>
+              <a:t>Cuatro formas de engañar con imágenes</a:t>
+            </a:r>
+          </a:p>
+        </p:txBody>
+      </p:sp>
+    </p:spTree>
+  </p:cSld>
+  <p:clrMapOvr>
+    <a:masterClrMapping/>
+  </p:clrMapOvr>
+</p:sld>
+</file>
+
+<file path=ppt/slides/slide6.xml><?xml version="1.0" encoding="utf-8"?>
+<p:sld xmlns:a="http://schemas.openxmlformats.org/drawingml/2006/main" xmlns:p="http://schemas.openxmlformats.org/presentationml/2006/main" xmlns:r="http://schemas.openxmlformats.org/officeDocument/2006/relationships">
+  <p:cSld>
+    <p:bg>
+      <p:bgPr>
+        <a:solidFill>
+          <a:srgbClr val="FBF7EF"/>
+        </a:solidFill>
+        <a:effectLst/>
+      </p:bgPr>
+    </p:bg>
+    <p:spTree>
+      <p:nvGrpSpPr>
+        <p:cNvPr id="1" name=""/>
+        <p:cNvGrpSpPr/>
+        <p:nvPr/>
+      </p:nvGrpSpPr>
+      <p:grpSpPr/>
+      <p:sp>
+        <p:nvSpPr>
+          <p:cNvPr id="2" name="TextBox 1"/>
+          <p:cNvSpPr txBox="1"/>
+          <p:nvPr/>
+        </p:nvSpPr>
+        <p:spPr>
+          <a:xfrm>
+            <a:off x="640000" y="380000"/>
+            <a:ext cx="10912000" cy="420000"/>
+          </a:xfrm>
+          <a:prstGeom prst="rect">
+            <a:avLst/>
+          </a:prstGeom>
+          <a:noFill/>
+        </p:spPr>
+        <p:txBody>
+          <a:bodyPr wrap="square">
+            <a:spAutoFit/>
+          </a:bodyPr>
+          <a:lstStyle/>
+          <a:p>
+            <a:pPr>
+              <a:spcAft>
+                <a:spcPts val="630"/>
+              </a:spcAft>
+            </a:pPr>
+            <a:r>
+              <a:rPr sz="1400" b="1">
+                <a:solidFill>
+                  <a:srgbClr val="E8793A"/>
+                </a:solidFill>
+                <a:latin typeface="Nunito Sans"/>
+              </a:rPr>
+              <a:t>BLOQUE 1 · CUATRO FORMAS DE ENGAÑAR CON IMÁGENES</a:t>
+            </a:r>
+          </a:p>
+        </p:txBody>
+      </p:sp>
+      <p:sp>
+        <p:nvSpPr>
+          <p:cNvPr id="3" name="TextBox 2"/>
+          <p:cNvSpPr txBox="1"/>
+          <p:nvPr/>
+        </p:nvSpPr>
+        <p:spPr>
+          <a:xfrm>
+            <a:off x="640000" y="760000"/>
+            <a:ext cx="10912000" cy="800000"/>
+          </a:xfrm>
+          <a:prstGeom prst="rect">
+            <a:avLst/>
+          </a:prstGeom>
+          <a:noFill/>
+        </p:spPr>
+        <p:txBody>
+          <a:bodyPr wrap="square">
+            <a:spAutoFit/>
+          </a:bodyPr>
+          <a:lstStyle/>
+          <a:p>
+            <a:pPr>
+              <a:spcAft>
+                <a:spcPts val="1710"/>
+              </a:spcAft>
+            </a:pPr>
+            <a:r>
+              <a:rPr sz="3800" b="1">
+                <a:solidFill>
+                  <a:srgbClr val="1F2A44"/>
+                </a:solidFill>
+                <a:latin typeface="Fredoka"/>
+              </a:rPr>
+              <a:t>Cuatro trucos</a:t>
             </a:r>
           </a:p>
         </p:txBody>
@@ -3740,8 +6705,9 @@
                 <a:tableStyleId>{5C22544A-7EE6-4342-B048-85BDC9FD1C3A}</a:tableStyleId>
               </a:tblPr>
               <a:tblGrid>
-                <a:gridCol w="5456000"/>
-                <a:gridCol w="5456000"/>
+                <a:gridCol w="3637333"/>
+                <a:gridCol w="3637333"/>
+                <a:gridCol w="3637334"/>
               </a:tblGrid>
               <a:tr h="600000">
                 <a:tc>
@@ -3779,6 +6745,28 @@
                           <a:latin typeface="Fredoka"/>
                         </a:rPr>
                         <a:t>Qué es</a:t>
+                      </a:r>
+                    </a:p>
+                  </a:txBody>
+                  <a:tcPr>
+                    <a:solidFill>
+                      <a:srgbClr val="1F2A44"/>
+                    </a:solidFill>
+                  </a:tcPr>
+                </a:tc>
+                <a:tc>
+                  <a:txBody>
+                    <a:bodyPr/>
+                    <a:lstStyle/>
+                    <a:p>
+                      <a:r>
+                        <a:rPr sz="2000" b="1">
+                          <a:solidFill>
+                            <a:srgbClr val="FBF7EF"/>
+                          </a:solidFill>
+                          <a:latin typeface="Fredoka"/>
+                        </a:rPr>
+                        <a:t>Ejemplo</a:t>
                       </a:r>
                     </a:p>
                   </a:txBody>
@@ -3834,6 +6822,28 @@
                     </a:solidFill>
                   </a:tcPr>
                 </a:tc>
+                <a:tc>
+                  <a:txBody>
+                    <a:bodyPr/>
+                    <a:lstStyle/>
+                    <a:p>
+                      <a:r>
+                        <a:rPr sz="2000" b="0">
+                          <a:solidFill>
+                            <a:srgbClr val="1F2A44"/>
+                          </a:solidFill>
+                          <a:latin typeface="Nunito Sans"/>
+                        </a:rPr>
+                        <a:t>Parece que hay poca gente; fuera, hay una multitud</a:t>
+                      </a:r>
+                    </a:p>
+                  </a:txBody>
+                  <a:tcPr>
+                    <a:solidFill>
+                      <a:srgbClr val="FFFFFF"/>
+                    </a:solidFill>
+                  </a:tcPr>
+                </a:tc>
               </a:tr>
               <a:tr h="600000">
                 <a:tc>
@@ -3871,6 +6881,28 @@
                           <a:latin typeface="Nunito Sans"/>
                         </a:rPr>
                         <a:t>Se juntan o cambian partes de imágenes</a:t>
+                      </a:r>
+                    </a:p>
+                  </a:txBody>
+                  <a:tcPr>
+                    <a:solidFill>
+                      <a:srgbClr val="EAF0F7"/>
+                    </a:solidFill>
+                  </a:tcPr>
+                </a:tc>
+                <a:tc>
+                  <a:txBody>
+                    <a:bodyPr/>
+                    <a:lstStyle/>
+                    <a:p>
+                      <a:r>
+                        <a:rPr sz="2000" b="0">
+                          <a:solidFill>
+                            <a:srgbClr val="1F2A44"/>
+                          </a:solidFill>
+                          <a:latin typeface="Nunito Sans"/>
+                        </a:rPr>
+                        <a:t>El tiburón en la autopista (sesión 35)</a:t>
                       </a:r>
                     </a:p>
                   </a:txBody>
@@ -3926,6 +6958,28 @@
                     </a:solidFill>
                   </a:tcPr>
                 </a:tc>
+                <a:tc>
+                  <a:txBody>
+                    <a:bodyPr/>
+                    <a:lstStyle/>
+                    <a:p>
+                      <a:r>
+                        <a:rPr sz="2000" b="0">
+                          <a:solidFill>
+                            <a:srgbClr val="1F2A44"/>
+                          </a:solidFill>
+                          <a:latin typeface="Nunito Sans"/>
+                        </a:rPr>
+                        <a:t>Una inundación de otro país como «Bilbao, ayer»</a:t>
+                      </a:r>
+                    </a:p>
+                  </a:txBody>
+                  <a:tcPr>
+                    <a:solidFill>
+                      <a:srgbClr val="FFFFFF"/>
+                    </a:solidFill>
+                  </a:tcPr>
+                </a:tc>
               </a:tr>
               <a:tr h="600000">
                 <a:tc>
@@ -3962,2560 +7016,7 @@
                           </a:solidFill>
                           <a:latin typeface="Nunito Sans"/>
                         </a:rPr>
-                        <a:t>Hecho con IA; mirar no basta, busco la fuente</a:t>
-                      </a:r>
-                    </a:p>
-                  </a:txBody>
-                  <a:tcPr>
-                    <a:solidFill>
-                      <a:srgbClr val="EAF0F7"/>
-                    </a:solidFill>
-                  </a:tcPr>
-                </a:tc>
-              </a:tr>
-            </a:tbl>
-          </a:graphicData>
-        </a:graphic>
-      </p:graphicFrame>
-    </p:spTree>
-  </p:cSld>
-  <p:clrMapOvr>
-    <a:masterClrMapping/>
-  </p:clrMapOvr>
-</p:sld>
-</file>
-
-<file path=ppt/slides/slide11.xml><?xml version="1.0" encoding="utf-8"?>
-<p:sld xmlns:a="http://schemas.openxmlformats.org/drawingml/2006/main" xmlns:p="http://schemas.openxmlformats.org/presentationml/2006/main" xmlns:r="http://schemas.openxmlformats.org/officeDocument/2006/relationships">
-  <p:cSld>
-    <p:bg>
-      <p:bgPr>
-        <a:solidFill>
-          <a:srgbClr val="1F2A44"/>
-        </a:solidFill>
-        <a:effectLst/>
-      </p:bgPr>
-    </p:bg>
-    <p:spTree>
-      <p:nvGrpSpPr>
-        <p:cNvPr id="1" name=""/>
-        <p:cNvGrpSpPr/>
-        <p:nvPr/>
-      </p:nvGrpSpPr>
-      <p:grpSpPr/>
-      <p:sp>
-        <p:nvSpPr>
-          <p:cNvPr id="2" name="TextBox 1"/>
-          <p:cNvSpPr txBox="1"/>
-          <p:nvPr/>
-        </p:nvSpPr>
-        <p:spPr>
-          <a:xfrm>
-            <a:off x="640000" y="2300000"/>
-            <a:ext cx="10912000" cy="500000"/>
-          </a:xfrm>
-          <a:prstGeom prst="rect">
-            <a:avLst/>
-          </a:prstGeom>
-          <a:noFill/>
-        </p:spPr>
-        <p:txBody>
-          <a:bodyPr wrap="square">
-            <a:spAutoFit/>
-          </a:bodyPr>
-          <a:lstStyle/>
-          <a:p>
-            <a:pPr>
-              <a:spcAft>
-                <a:spcPts val="810"/>
-              </a:spcAft>
-            </a:pPr>
-            <a:r>
-              <a:rPr sz="1800" b="1">
-                <a:solidFill>
-                  <a:srgbClr val="F4B183"/>
-                </a:solidFill>
-                <a:latin typeface="Nunito Sans"/>
-              </a:rPr>
-              <a:t>BLOQUE 2</a:t>
-            </a:r>
-          </a:p>
-        </p:txBody>
-      </p:sp>
-      <p:sp>
-        <p:nvSpPr>
-          <p:cNvPr id="3" name="TextBox 2"/>
-          <p:cNvSpPr txBox="1"/>
-          <p:nvPr/>
-        </p:nvSpPr>
-        <p:spPr>
-          <a:xfrm>
-            <a:off x="640000" y="2800000"/>
-            <a:ext cx="10912000" cy="800000"/>
-          </a:xfrm>
-          <a:prstGeom prst="rect">
-            <a:avLst/>
-          </a:prstGeom>
-          <a:noFill/>
-        </p:spPr>
-        <p:txBody>
-          <a:bodyPr wrap="square">
-            <a:spAutoFit/>
-          </a:bodyPr>
-          <a:lstStyle/>
-          <a:p>
-            <a:pPr>
-              <a:spcAft>
-                <a:spcPts val="2160"/>
-              </a:spcAft>
-            </a:pPr>
-            <a:r>
-              <a:rPr sz="4800" b="1">
-                <a:solidFill>
-                  <a:srgbClr val="FBF7EF"/>
-                </a:solidFill>
-                <a:latin typeface="Fredoka"/>
-              </a:rPr>
-              <a:t>Un caso que lo mezcla todo</a:t>
-            </a:r>
-          </a:p>
-        </p:txBody>
-      </p:sp>
-    </p:spTree>
-  </p:cSld>
-  <p:clrMapOvr>
-    <a:masterClrMapping/>
-  </p:clrMapOvr>
-</p:sld>
-</file>
-
-<file path=ppt/slides/slide12.xml><?xml version="1.0" encoding="utf-8"?>
-<p:sld xmlns:a="http://schemas.openxmlformats.org/drawingml/2006/main" xmlns:p="http://schemas.openxmlformats.org/presentationml/2006/main" xmlns:r="http://schemas.openxmlformats.org/officeDocument/2006/relationships">
-  <p:cSld>
-    <p:bg>
-      <p:bgPr>
-        <a:solidFill>
-          <a:srgbClr val="FBF7EF"/>
-        </a:solidFill>
-        <a:effectLst/>
-      </p:bgPr>
-    </p:bg>
-    <p:spTree>
-      <p:nvGrpSpPr>
-        <p:cNvPr id="1" name=""/>
-        <p:cNvGrpSpPr/>
-        <p:nvPr/>
-      </p:nvGrpSpPr>
-      <p:grpSpPr/>
-      <p:sp>
-        <p:nvSpPr>
-          <p:cNvPr id="2" name="TextBox 1"/>
-          <p:cNvSpPr txBox="1"/>
-          <p:nvPr/>
-        </p:nvSpPr>
-        <p:spPr>
-          <a:xfrm>
-            <a:off x="640000" y="380000"/>
-            <a:ext cx="10912000" cy="420000"/>
-          </a:xfrm>
-          <a:prstGeom prst="rect">
-            <a:avLst/>
-          </a:prstGeom>
-          <a:noFill/>
-        </p:spPr>
-        <p:txBody>
-          <a:bodyPr wrap="square">
-            <a:spAutoFit/>
-          </a:bodyPr>
-          <a:lstStyle/>
-          <a:p>
-            <a:pPr>
-              <a:spcAft>
-                <a:spcPts val="630"/>
-              </a:spcAft>
-            </a:pPr>
-            <a:r>
-              <a:rPr sz="1400" b="1">
-                <a:solidFill>
-                  <a:srgbClr val="E8793A"/>
-                </a:solidFill>
-                <a:latin typeface="Nunito Sans"/>
-              </a:rPr>
-              <a:t>BLOQUE 2 · UN CASO QUE LO MEZCLA TODO</a:t>
-            </a:r>
-          </a:p>
-        </p:txBody>
-      </p:sp>
-      <p:sp>
-        <p:nvSpPr>
-          <p:cNvPr id="3" name="TextBox 2"/>
-          <p:cNvSpPr txBox="1"/>
-          <p:nvPr/>
-        </p:nvSpPr>
-        <p:spPr>
-          <a:xfrm>
-            <a:off x="640000" y="760000"/>
-            <a:ext cx="10912000" cy="800000"/>
-          </a:xfrm>
-          <a:prstGeom prst="rect">
-            <a:avLst/>
-          </a:prstGeom>
-          <a:noFill/>
-        </p:spPr>
-        <p:txBody>
-          <a:bodyPr wrap="square">
-            <a:spAutoFit/>
-          </a:bodyPr>
-          <a:lstStyle/>
-          <a:p>
-            <a:pPr>
-              <a:spcAft>
-                <a:spcPts val="1710"/>
-              </a:spcAft>
-            </a:pPr>
-            <a:r>
-              <a:rPr sz="3800" b="1">
-                <a:solidFill>
-                  <a:srgbClr val="1F2A44"/>
-                </a:solidFill>
-                <a:latin typeface="Fredoka"/>
-              </a:rPr>
-              <a:t>Caso · El mensaje del grupo</a:t>
-            </a:r>
-          </a:p>
-        </p:txBody>
-      </p:sp>
-      <p:sp>
-        <p:nvSpPr>
-          <p:cNvPr id="4" name="Rectangle 3"/>
-          <p:cNvSpPr/>
-          <p:nvPr/>
-        </p:nvSpPr>
-        <p:spPr>
-          <a:xfrm>
-            <a:off x="640000" y="1600000"/>
-            <a:ext cx="10912000" cy="1100000"/>
-          </a:xfrm>
-          <a:prstGeom prst="rect">
-            <a:avLst/>
-          </a:prstGeom>
-          <a:solidFill>
-            <a:srgbClr val="FFFFFF"/>
-          </a:solidFill>
-          <a:ln>
-            <a:noFill/>
-          </a:ln>
-        </p:spPr>
-        <p:style>
-          <a:lnRef idx="1">
-            <a:schemeClr val="accent1"/>
-          </a:lnRef>
-          <a:fillRef idx="3">
-            <a:schemeClr val="accent1"/>
-          </a:fillRef>
-          <a:effectRef idx="2">
-            <a:schemeClr val="accent1"/>
-          </a:effectRef>
-          <a:fontRef idx="minor">
-            <a:schemeClr val="lt1"/>
-          </a:fontRef>
-        </p:style>
-        <p:txBody>
-          <a:bodyPr rtlCol="0" anchor="ctr"/>
-          <a:lstStyle/>
-          <a:p>
-            <a:pPr algn="ctr"/>
-          </a:p>
-        </p:txBody>
-      </p:sp>
-      <p:sp>
-        <p:nvSpPr>
-          <p:cNvPr id="5" name="TextBox 4"/>
-          <p:cNvSpPr txBox="1"/>
-          <p:nvPr/>
-        </p:nvSpPr>
-        <p:spPr>
-          <a:xfrm>
-            <a:off x="840000" y="1650000"/>
-            <a:ext cx="10512000" cy="1000000"/>
-          </a:xfrm>
-          <a:prstGeom prst="rect">
-            <a:avLst/>
-          </a:prstGeom>
-          <a:noFill/>
-        </p:spPr>
-        <p:txBody>
-          <a:bodyPr wrap="square" anchor="ctr">
-            <a:spAutoFit/>
-          </a:bodyPr>
-          <a:lstStyle/>
-          <a:p>
-            <a:pPr>
-              <a:spcAft>
-                <a:spcPts val="1170"/>
-              </a:spcAft>
-            </a:pPr>
-            <a:r>
-              <a:rPr sz="2600" b="1">
-                <a:solidFill>
-                  <a:srgbClr val="1F2A44"/>
-                </a:solidFill>
-                <a:latin typeface="Nunito Sans"/>
-              </a:rPr>
-              <a:t>En el grupo de clase: «¡¡INCREÍBLE!! Un famoso youtuber pillado robando en una tienda de Bilbao» y una foto borrosa. Sin enlace ni fecha.</a:t>
-            </a:r>
-          </a:p>
-        </p:txBody>
-      </p:sp>
-      <p:sp>
-        <p:nvSpPr>
-          <p:cNvPr id="6" name="TextBox 5"/>
-          <p:cNvSpPr txBox="1"/>
-          <p:nvPr/>
-        </p:nvSpPr>
-        <p:spPr>
-          <a:xfrm>
-            <a:off x="640000" y="2900000"/>
-            <a:ext cx="10912000" cy="3500000"/>
-          </a:xfrm>
-          <a:prstGeom prst="rect">
-            <a:avLst/>
-          </a:prstGeom>
-          <a:noFill/>
-        </p:spPr>
-        <p:txBody>
-          <a:bodyPr wrap="square">
-            <a:spAutoFit/>
-          </a:bodyPr>
-          <a:lstStyle/>
-          <a:p>
-            <a:pPr>
-              <a:spcAft>
-                <a:spcPts val="1080"/>
-              </a:spcAft>
-            </a:pPr>
-            <a:r>
-              <a:rPr sz="2400" b="1">
-                <a:solidFill>
-                  <a:srgbClr val="E8793A"/>
-                </a:solidFill>
-                <a:latin typeface="Nunito Sans"/>
-              </a:rPr>
-              <a:t>1. </a:t>
-            </a:r>
-            <a:r>
-              <a:rPr sz="2400" b="0">
-                <a:solidFill>
-                  <a:srgbClr val="1F2A44"/>
-                </a:solidFill>
-                <a:latin typeface="Nunito Sans"/>
-              </a:rPr>
-              <a:t>Titular clickbait: mayúsculas, «increíble», emoción fuerte.</a:t>
-            </a:r>
-          </a:p>
-          <a:p>
-            <a:pPr>
-              <a:spcAft>
-                <a:spcPts val="1080"/>
-              </a:spcAft>
-            </a:pPr>
-            <a:r>
-              <a:rPr sz="2400" b="1">
-                <a:solidFill>
-                  <a:srgbClr val="E8793A"/>
-                </a:solidFill>
-                <a:latin typeface="Nunito Sans"/>
-              </a:rPr>
-              <a:t>2. </a:t>
-            </a:r>
-            <a:r>
-              <a:rPr sz="2400" b="0">
-                <a:solidFill>
-                  <a:srgbClr val="1F2A44"/>
-                </a:solidFill>
-                <a:latin typeface="Nunito Sans"/>
-              </a:rPr>
-              <a:t>Fuente: no hay. ¿Quién lo dice? ¿Cómo lo sabe? Sin fecha: ingredientes de bulo.</a:t>
-            </a:r>
-          </a:p>
-          <a:p>
-            <a:pPr>
-              <a:spcAft>
-                <a:spcPts val="1080"/>
-              </a:spcAft>
-            </a:pPr>
-            <a:r>
-              <a:rPr sz="2400" b="1">
-                <a:solidFill>
-                  <a:srgbClr val="E8793A"/>
-                </a:solidFill>
-                <a:latin typeface="Nunito Sans"/>
-              </a:rPr>
-              <a:t>3. </a:t>
-            </a:r>
-            <a:r>
-              <a:rPr sz="2400" b="0">
-                <a:solidFill>
-                  <a:srgbClr val="1F2A44"/>
-                </a:solidFill>
-                <a:latin typeface="Nunito Sans"/>
-              </a:rPr>
-              <a:t>Verifico: búsqueda inversa de la foto y lectura lateral. ¿Lo cuentan medios serios?</a:t>
-            </a:r>
-          </a:p>
-          <a:p>
-            <a:pPr>
-              <a:spcAft>
-                <a:spcPts val="1080"/>
-              </a:spcAft>
-            </a:pPr>
-            <a:r>
-              <a:rPr sz="2400" b="1">
-                <a:solidFill>
-                  <a:srgbClr val="E8793A"/>
-                </a:solidFill>
-                <a:latin typeface="Nunito Sans"/>
-              </a:rPr>
-              <a:t>4. </a:t>
-            </a:r>
-            <a:r>
-              <a:rPr sz="2400" b="0">
-                <a:solidFill>
-                  <a:srgbClr val="1F2A44"/>
-                </a:solidFill>
-                <a:latin typeface="Nunito Sans"/>
-              </a:rPr>
-              <a:t>Conclusión: no lo reenvío hasta comprobarlo. Puede hacer daño a una persona real.</a:t>
-            </a:r>
-          </a:p>
-        </p:txBody>
-      </p:sp>
-    </p:spTree>
-  </p:cSld>
-  <p:clrMapOvr>
-    <a:masterClrMapping/>
-  </p:clrMapOvr>
-</p:sld>
-</file>
-
-<file path=ppt/slides/slide13.xml><?xml version="1.0" encoding="utf-8"?>
-<p:sld xmlns:a="http://schemas.openxmlformats.org/drawingml/2006/main" xmlns:p="http://schemas.openxmlformats.org/presentationml/2006/main" xmlns:r="http://schemas.openxmlformats.org/officeDocument/2006/relationships">
-  <p:cSld>
-    <p:bg>
-      <p:bgPr>
-        <a:solidFill>
-          <a:srgbClr val="F6C9A8"/>
-        </a:solidFill>
-        <a:effectLst/>
-      </p:bgPr>
-    </p:bg>
-    <p:spTree>
-      <p:nvGrpSpPr>
-        <p:cNvPr id="1" name=""/>
-        <p:cNvGrpSpPr/>
-        <p:nvPr/>
-      </p:nvGrpSpPr>
-      <p:grpSpPr/>
-      <p:sp>
-        <p:nvSpPr>
-          <p:cNvPr id="2" name="TextBox 1"/>
-          <p:cNvSpPr txBox="1"/>
-          <p:nvPr/>
-        </p:nvSpPr>
-        <p:spPr>
-          <a:xfrm>
-            <a:off x="640000" y="380000"/>
-            <a:ext cx="10912000" cy="420000"/>
-          </a:xfrm>
-          <a:prstGeom prst="rect">
-            <a:avLst/>
-          </a:prstGeom>
-          <a:noFill/>
-        </p:spPr>
-        <p:txBody>
-          <a:bodyPr wrap="square">
-            <a:spAutoFit/>
-          </a:bodyPr>
-          <a:lstStyle/>
-          <a:p>
-            <a:pPr>
-              <a:spcAft>
-                <a:spcPts val="630"/>
-              </a:spcAft>
-            </a:pPr>
-            <a:r>
-              <a:rPr sz="1400" b="1">
-                <a:solidFill>
-                  <a:srgbClr val="1F2A44"/>
-                </a:solidFill>
-                <a:latin typeface="Nunito Sans"/>
-              </a:rPr>
-              <a:t>CASO TRAMPA · BLOQUE 2 · UN CASO QUE LO MEZCLA TODO</a:t>
-            </a:r>
-          </a:p>
-        </p:txBody>
-      </p:sp>
-      <p:sp>
-        <p:nvSpPr>
-          <p:cNvPr id="3" name="TextBox 2"/>
-          <p:cNvSpPr txBox="1"/>
-          <p:nvPr/>
-        </p:nvSpPr>
-        <p:spPr>
-          <a:xfrm>
-            <a:off x="640000" y="760000"/>
-            <a:ext cx="10912000" cy="800000"/>
-          </a:xfrm>
-          <a:prstGeom prst="rect">
-            <a:avLst/>
-          </a:prstGeom>
-          <a:noFill/>
-        </p:spPr>
-        <p:txBody>
-          <a:bodyPr wrap="square">
-            <a:spAutoFit/>
-          </a:bodyPr>
-          <a:lstStyle/>
-          <a:p>
-            <a:pPr>
-              <a:spcAft>
-                <a:spcPts val="1710"/>
-              </a:spcAft>
-            </a:pPr>
-            <a:r>
-              <a:rPr sz="3800" b="1">
-                <a:solidFill>
-                  <a:srgbClr val="1F2A44"/>
-                </a:solidFill>
-                <a:latin typeface="Fredoka"/>
-              </a:rPr>
-              <a:t>⚠ La cuenta sin nombre</a:t>
-            </a:r>
-          </a:p>
-        </p:txBody>
-      </p:sp>
-      <p:sp>
-        <p:nvSpPr>
-          <p:cNvPr id="4" name="Rectangle 3"/>
-          <p:cNvSpPr/>
-          <p:nvPr/>
-        </p:nvSpPr>
-        <p:spPr>
-          <a:xfrm>
-            <a:off x="640000" y="1600000"/>
-            <a:ext cx="10912000" cy="1100000"/>
-          </a:xfrm>
-          <a:prstGeom prst="rect">
-            <a:avLst/>
-          </a:prstGeom>
-          <a:solidFill>
-            <a:srgbClr val="FBF7EF"/>
-          </a:solidFill>
-          <a:ln>
-            <a:noFill/>
-          </a:ln>
-        </p:spPr>
-        <p:style>
-          <a:lnRef idx="1">
-            <a:schemeClr val="accent1"/>
-          </a:lnRef>
-          <a:fillRef idx="3">
-            <a:schemeClr val="accent1"/>
-          </a:fillRef>
-          <a:effectRef idx="2">
-            <a:schemeClr val="accent1"/>
-          </a:effectRef>
-          <a:fontRef idx="minor">
-            <a:schemeClr val="lt1"/>
-          </a:fontRef>
-        </p:style>
-        <p:txBody>
-          <a:bodyPr rtlCol="0" anchor="ctr"/>
-          <a:lstStyle/>
-          <a:p>
-            <a:pPr algn="ctr"/>
-          </a:p>
-        </p:txBody>
-      </p:sp>
-      <p:sp>
-        <p:nvSpPr>
-          <p:cNvPr id="5" name="TextBox 4"/>
-          <p:cNvSpPr txBox="1"/>
-          <p:nvPr/>
-        </p:nvSpPr>
-        <p:spPr>
-          <a:xfrm>
-            <a:off x="840000" y="1650000"/>
-            <a:ext cx="10512000" cy="1000000"/>
-          </a:xfrm>
-          <a:prstGeom prst="rect">
-            <a:avLst/>
-          </a:prstGeom>
-          <a:noFill/>
-        </p:spPr>
-        <p:txBody>
-          <a:bodyPr wrap="square" anchor="ctr">
-            <a:spAutoFit/>
-          </a:bodyPr>
-          <a:lstStyle/>
-          <a:p>
-            <a:pPr>
-              <a:spcAft>
-                <a:spcPts val="1170"/>
-              </a:spcAft>
-            </a:pPr>
-            <a:r>
-              <a:rPr sz="2600" b="1">
-                <a:solidFill>
-                  <a:srgbClr val="1F2A44"/>
-                </a:solidFill>
-                <a:latin typeface="Nunito Sans"/>
-              </a:rPr>
-              <a:t>Una cuenta sin nombre avisa en redes: «Accidente en la autopista, todo cortado». Una hora después, los medios serios lo confirman. (Ejemplo inventado.)</a:t>
-            </a:r>
-          </a:p>
-        </p:txBody>
-      </p:sp>
-      <p:sp>
-        <p:nvSpPr>
-          <p:cNvPr id="6" name="TextBox 5"/>
-          <p:cNvSpPr txBox="1"/>
-          <p:nvPr/>
-        </p:nvSpPr>
-        <p:spPr>
-          <a:xfrm>
-            <a:off x="640000" y="2900000"/>
-            <a:ext cx="10912000" cy="3500000"/>
-          </a:xfrm>
-          <a:prstGeom prst="rect">
-            <a:avLst/>
-          </a:prstGeom>
-          <a:noFill/>
-        </p:spPr>
-        <p:txBody>
-          <a:bodyPr wrap="square">
-            <a:spAutoFit/>
-          </a:bodyPr>
-          <a:lstStyle/>
-          <a:p>
-            <a:pPr>
-              <a:spcAft>
-                <a:spcPts val="1080"/>
-              </a:spcAft>
-            </a:pPr>
-            <a:r>
-              <a:rPr sz="2400" b="1">
-                <a:solidFill>
-                  <a:srgbClr val="E8793A"/>
-                </a:solidFill>
-                <a:latin typeface="Nunito Sans"/>
-              </a:rPr>
-              <a:t>1. </a:t>
-            </a:r>
-            <a:r>
-              <a:rPr sz="2400" b="0">
-                <a:solidFill>
-                  <a:srgbClr val="1F2A44"/>
-                </a:solidFill>
-                <a:latin typeface="Nunito Sans"/>
-              </a:rPr>
-              <a:t>No tenía nombre ni fuente. ¿Era un bulo?</a:t>
-            </a:r>
-          </a:p>
-          <a:p>
-            <a:pPr>
-              <a:spcAft>
-                <a:spcPts val="1080"/>
-              </a:spcAft>
-            </a:pPr>
-            <a:r>
-              <a:rPr sz="2400" b="1">
-                <a:solidFill>
-                  <a:srgbClr val="E8793A"/>
-                </a:solidFill>
-                <a:latin typeface="Nunito Sans"/>
-              </a:rPr>
-              <a:t>2. </a:t>
-            </a:r>
-            <a:r>
-              <a:rPr sz="2400" b="0">
-                <a:solidFill>
-                  <a:srgbClr val="1F2A44"/>
-                </a:solidFill>
-                <a:latin typeface="Nunito Sans"/>
-              </a:rPr>
-              <a:t>Sin nombre ni fuente, hice bien en no creérmelo del todo.</a:t>
-            </a:r>
-          </a:p>
-          <a:p>
-            <a:pPr>
-              <a:spcAft>
-                <a:spcPts val="1080"/>
-              </a:spcAft>
-            </a:pPr>
-            <a:r>
-              <a:rPr sz="2400" b="1">
-                <a:solidFill>
-                  <a:srgbClr val="E8793A"/>
-                </a:solidFill>
-                <a:latin typeface="Nunito Sans"/>
-              </a:rPr>
-              <a:t>3. </a:t>
-            </a:r>
-            <a:r>
-              <a:rPr sz="2400" b="0">
-                <a:solidFill>
-                  <a:srgbClr val="1F2A44"/>
-                </a:solidFill>
-                <a:latin typeface="Nunito Sans"/>
-              </a:rPr>
-              <a:t>Pero una fuente anónima puede acertar: quizá alguien lo estaba viendo.</a:t>
-            </a:r>
-          </a:p>
-          <a:p>
-            <a:pPr>
-              <a:spcAft>
-                <a:spcPts val="1080"/>
-              </a:spcAft>
-            </a:pPr>
-            <a:r>
-              <a:rPr sz="2400" b="1">
-                <a:solidFill>
-                  <a:srgbClr val="E8793A"/>
-                </a:solidFill>
-                <a:latin typeface="Nunito Sans"/>
-              </a:rPr>
-              <a:t>4. </a:t>
-            </a:r>
-            <a:r>
-              <a:rPr sz="2400" b="0">
-                <a:solidFill>
-                  <a:srgbClr val="1F2A44"/>
-                </a:solidFill>
-                <a:latin typeface="Nunito Sans"/>
-              </a:rPr>
-              <a:t>«Sin nombre» no quiere decir «falso»: quiere decir «sin comprobar».</a:t>
-            </a:r>
-          </a:p>
-          <a:p>
-            <a:pPr>
-              <a:spcAft>
-                <a:spcPts val="1080"/>
-              </a:spcAft>
-            </a:pPr>
-            <a:r>
-              <a:rPr sz="2400" b="1">
-                <a:solidFill>
-                  <a:srgbClr val="E8793A"/>
-                </a:solidFill>
-                <a:latin typeface="Nunito Sans"/>
-              </a:rPr>
-              <a:t>5. </a:t>
-            </a:r>
-            <a:r>
-              <a:rPr sz="2400" b="0">
-                <a:solidFill>
-                  <a:srgbClr val="1F2A44"/>
-                </a:solidFill>
-                <a:latin typeface="Nunito Sans"/>
-              </a:rPr>
-              <a:t>Conclusión: las señales no dicen si algo es verdad; dicen cuánto tengo que comprobar antes de creerlo.</a:t>
-            </a:r>
-          </a:p>
-        </p:txBody>
-      </p:sp>
-    </p:spTree>
-  </p:cSld>
-  <p:clrMapOvr>
-    <a:masterClrMapping/>
-  </p:clrMapOvr>
-</p:sld>
-</file>
-
-<file path=ppt/slides/slide14.xml><?xml version="1.0" encoding="utf-8"?>
-<p:sld xmlns:a="http://schemas.openxmlformats.org/drawingml/2006/main" xmlns:p="http://schemas.openxmlformats.org/presentationml/2006/main" xmlns:r="http://schemas.openxmlformats.org/officeDocument/2006/relationships">
-  <p:cSld>
-    <p:bg>
-      <p:bgPr>
-        <a:solidFill>
-          <a:srgbClr val="FBF7EF"/>
-        </a:solidFill>
-        <a:effectLst/>
-      </p:bgPr>
-    </p:bg>
-    <p:spTree>
-      <p:nvGrpSpPr>
-        <p:cNvPr id="1" name=""/>
-        <p:cNvGrpSpPr/>
-        <p:nvPr/>
-      </p:nvGrpSpPr>
-      <p:grpSpPr/>
-      <p:sp>
-        <p:nvSpPr>
-          <p:cNvPr id="2" name="TextBox 1"/>
-          <p:cNvSpPr txBox="1"/>
-          <p:nvPr/>
-        </p:nvSpPr>
-        <p:spPr>
-          <a:xfrm>
-            <a:off x="640000" y="380000"/>
-            <a:ext cx="10912000" cy="420000"/>
-          </a:xfrm>
-          <a:prstGeom prst="rect">
-            <a:avLst/>
-          </a:prstGeom>
-          <a:noFill/>
-        </p:spPr>
-        <p:txBody>
-          <a:bodyPr wrap="square">
-            <a:spAutoFit/>
-          </a:bodyPr>
-          <a:lstStyle/>
-          <a:p>
-            <a:pPr>
-              <a:spcAft>
-                <a:spcPts val="630"/>
-              </a:spcAft>
-            </a:pPr>
-            <a:r>
-              <a:rPr sz="1400" b="1">
-                <a:solidFill>
-                  <a:srgbClr val="E8793A"/>
-                </a:solidFill>
-                <a:latin typeface="Nunito Sans"/>
-              </a:rPr>
-              <a:t>LO DE HOY EN TRES LÍNEAS</a:t>
-            </a:r>
-          </a:p>
-        </p:txBody>
-      </p:sp>
-      <p:sp>
-        <p:nvSpPr>
-          <p:cNvPr id="3" name="TextBox 2"/>
-          <p:cNvSpPr txBox="1"/>
-          <p:nvPr/>
-        </p:nvSpPr>
-        <p:spPr>
-          <a:xfrm>
-            <a:off x="640000" y="760000"/>
-            <a:ext cx="10912000" cy="800000"/>
-          </a:xfrm>
-          <a:prstGeom prst="rect">
-            <a:avLst/>
-          </a:prstGeom>
-          <a:noFill/>
-        </p:spPr>
-        <p:txBody>
-          <a:bodyPr wrap="square">
-            <a:spAutoFit/>
-          </a:bodyPr>
-          <a:lstStyle/>
-          <a:p>
-            <a:pPr>
-              <a:spcAft>
-                <a:spcPts val="1710"/>
-              </a:spcAft>
-            </a:pPr>
-            <a:r>
-              <a:rPr sz="3800" b="1">
-                <a:solidFill>
-                  <a:srgbClr val="1F2A44"/>
-                </a:solidFill>
-                <a:latin typeface="Fredoka"/>
-              </a:rPr>
-              <a:t>Escríbelo tú primero, sin mirar</a:t>
-            </a:r>
-          </a:p>
-        </p:txBody>
-      </p:sp>
-      <p:sp>
-        <p:nvSpPr>
-          <p:cNvPr id="4" name="TextBox 3"/>
-          <p:cNvSpPr txBox="1"/>
-          <p:nvPr/>
-        </p:nvSpPr>
-        <p:spPr>
-          <a:xfrm>
-            <a:off x="640000" y="1800000"/>
-            <a:ext cx="10912000" cy="1500000"/>
-          </a:xfrm>
-          <a:prstGeom prst="rect">
-            <a:avLst/>
-          </a:prstGeom>
-          <a:noFill/>
-        </p:spPr>
-        <p:txBody>
-          <a:bodyPr wrap="square">
-            <a:spAutoFit/>
-          </a:bodyPr>
-          <a:lstStyle/>
-          <a:p>
-            <a:pPr>
-              <a:spcAft>
-                <a:spcPts val="1170"/>
-              </a:spcAft>
-            </a:pPr>
-            <a:r>
-              <a:rPr sz="2600" b="0">
-                <a:solidFill>
-                  <a:srgbClr val="4A5568"/>
-                </a:solidFill>
-                <a:latin typeface="Nunito Sans"/>
-              </a:rPr>
-              <a:t>Dos minutos. Después lo comparamos.</a:t>
-            </a:r>
-          </a:p>
-        </p:txBody>
-      </p:sp>
-    </p:spTree>
-  </p:cSld>
-  <p:clrMapOvr>
-    <a:masterClrMapping/>
-  </p:clrMapOvr>
-</p:sld>
-</file>
-
-<file path=ppt/slides/slide15.xml><?xml version="1.0" encoding="utf-8"?>
-<p:sld xmlns:a="http://schemas.openxmlformats.org/drawingml/2006/main" xmlns:p="http://schemas.openxmlformats.org/presentationml/2006/main" xmlns:r="http://schemas.openxmlformats.org/officeDocument/2006/relationships">
-  <p:cSld>
-    <p:bg>
-      <p:bgPr>
-        <a:solidFill>
-          <a:srgbClr val="FBF7EF"/>
-        </a:solidFill>
-        <a:effectLst/>
-      </p:bgPr>
-    </p:bg>
-    <p:spTree>
-      <p:nvGrpSpPr>
-        <p:cNvPr id="1" name=""/>
-        <p:cNvGrpSpPr/>
-        <p:nvPr/>
-      </p:nvGrpSpPr>
-      <p:grpSpPr/>
-      <p:sp>
-        <p:nvSpPr>
-          <p:cNvPr id="2" name="TextBox 1"/>
-          <p:cNvSpPr txBox="1"/>
-          <p:nvPr/>
-        </p:nvSpPr>
-        <p:spPr>
-          <a:xfrm>
-            <a:off x="640000" y="380000"/>
-            <a:ext cx="10912000" cy="420000"/>
-          </a:xfrm>
-          <a:prstGeom prst="rect">
-            <a:avLst/>
-          </a:prstGeom>
-          <a:noFill/>
-        </p:spPr>
-        <p:txBody>
-          <a:bodyPr wrap="square">
-            <a:spAutoFit/>
-          </a:bodyPr>
-          <a:lstStyle/>
-          <a:p>
-            <a:pPr>
-              <a:spcAft>
-                <a:spcPts val="630"/>
-              </a:spcAft>
-            </a:pPr>
-            <a:r>
-              <a:rPr sz="1400" b="1">
-                <a:solidFill>
-                  <a:srgbClr val="E8793A"/>
-                </a:solidFill>
-                <a:latin typeface="Nunito Sans"/>
-              </a:rPr>
-              <a:t>LO DE HOY EN TRES LÍNEAS</a:t>
-            </a:r>
-          </a:p>
-        </p:txBody>
-      </p:sp>
-      <p:sp>
-        <p:nvSpPr>
-          <p:cNvPr id="3" name="TextBox 2"/>
-          <p:cNvSpPr txBox="1"/>
-          <p:nvPr/>
-        </p:nvSpPr>
-        <p:spPr>
-          <a:xfrm>
-            <a:off x="640000" y="1300000"/>
-            <a:ext cx="10912000" cy="4800000"/>
-          </a:xfrm>
-          <a:prstGeom prst="rect">
-            <a:avLst/>
-          </a:prstGeom>
-          <a:noFill/>
-        </p:spPr>
-        <p:txBody>
-          <a:bodyPr wrap="square">
-            <a:spAutoFit/>
-          </a:bodyPr>
-          <a:lstStyle/>
-          <a:p>
-            <a:pPr>
-              <a:spcAft>
-                <a:spcPts val="1350"/>
-              </a:spcAft>
-            </a:pPr>
-            <a:r>
-              <a:rPr sz="3000" b="1">
-                <a:solidFill>
-                  <a:srgbClr val="E8793A"/>
-                </a:solidFill>
-                <a:latin typeface="Nunito Sans"/>
-              </a:rPr>
-              <a:t>1. </a:t>
-            </a:r>
-            <a:r>
-              <a:rPr sz="3000" b="0">
-                <a:solidFill>
-                  <a:srgbClr val="1F2A44"/>
-                </a:solidFill>
-                <a:latin typeface="Nunito Sans"/>
-              </a:rPr>
-              <a:t>Ninguna fuente es infalible: mira quién lo dice, cómo lo sabe y qué gana.</a:t>
-            </a:r>
-          </a:p>
-          <a:p>
-            <a:pPr>
-              <a:spcAft>
-                <a:spcPts val="1350"/>
-              </a:spcAft>
-            </a:pPr>
-            <a:r>
-              <a:rPr sz="3000" b="1">
-                <a:solidFill>
-                  <a:srgbClr val="E8793A"/>
-                </a:solidFill>
-                <a:latin typeface="Nunito Sans"/>
-              </a:rPr>
-              <a:t>2. </a:t>
-            </a:r>
-            <a:r>
-              <a:rPr sz="3000" b="0">
-                <a:solidFill>
-                  <a:srgbClr val="1F2A44"/>
-                </a:solidFill>
-                <a:latin typeface="Nunito Sans"/>
-              </a:rPr>
-              <a:t>El clickbait y los bulos usan la emoción para que hagas clic y compartas.</a:t>
-            </a:r>
-          </a:p>
-          <a:p>
-            <a:pPr>
-              <a:spcAft>
-                <a:spcPts val="1350"/>
-              </a:spcAft>
-            </a:pPr>
-            <a:r>
-              <a:rPr sz="3000" b="1">
-                <a:solidFill>
-                  <a:srgbClr val="E8793A"/>
-                </a:solidFill>
-                <a:latin typeface="Nunito Sans"/>
-              </a:rPr>
-              <a:t>3. </a:t>
-            </a:r>
-            <a:r>
-              <a:rPr sz="3000" b="0">
-                <a:solidFill>
-                  <a:srgbClr val="1F2A44"/>
-                </a:solidFill>
-                <a:latin typeface="Nunito Sans"/>
-              </a:rPr>
-              <a:t>Para verificar: lectura lateral, fecha y origen de la imagen; si no encuentras nada, espera.</a:t>
-            </a:r>
-          </a:p>
-        </p:txBody>
-      </p:sp>
-    </p:spTree>
-  </p:cSld>
-  <p:clrMapOvr>
-    <a:masterClrMapping/>
-  </p:clrMapOvr>
-</p:sld>
-</file>
-
-<file path=ppt/slides/slide16.xml><?xml version="1.0" encoding="utf-8"?>
-<p:sld xmlns:a="http://schemas.openxmlformats.org/drawingml/2006/main" xmlns:p="http://schemas.openxmlformats.org/presentationml/2006/main" xmlns:r="http://schemas.openxmlformats.org/officeDocument/2006/relationships">
-  <p:cSld>
-    <p:bg>
-      <p:bgPr>
-        <a:solidFill>
-          <a:srgbClr val="1F2A44"/>
-        </a:solidFill>
-        <a:effectLst/>
-      </p:bgPr>
-    </p:bg>
-    <p:spTree>
-      <p:nvGrpSpPr>
-        <p:cNvPr id="1" name=""/>
-        <p:cNvGrpSpPr/>
-        <p:nvPr/>
-      </p:nvGrpSpPr>
-      <p:grpSpPr/>
-      <p:sp>
-        <p:nvSpPr>
-          <p:cNvPr id="2" name="TextBox 1"/>
-          <p:cNvSpPr txBox="1"/>
-          <p:nvPr/>
-        </p:nvSpPr>
-        <p:spPr>
-          <a:xfrm>
-            <a:off x="640000" y="380000"/>
-            <a:ext cx="10912000" cy="420000"/>
-          </a:xfrm>
-          <a:prstGeom prst="rect">
-            <a:avLst/>
-          </a:prstGeom>
-          <a:noFill/>
-        </p:spPr>
-        <p:txBody>
-          <a:bodyPr wrap="square">
-            <a:spAutoFit/>
-          </a:bodyPr>
-          <a:lstStyle/>
-          <a:p>
-            <a:pPr>
-              <a:spcAft>
-                <a:spcPts val="630"/>
-              </a:spcAft>
-            </a:pPr>
-            <a:r>
-              <a:rPr sz="1400" b="1">
-                <a:solidFill>
-                  <a:srgbClr val="F4B183"/>
-                </a:solidFill>
-                <a:latin typeface="Nunito Sans"/>
-              </a:rPr>
-              <a:t>AHORA, LA HOJA DEL DÍA</a:t>
-            </a:r>
-          </a:p>
-        </p:txBody>
-      </p:sp>
-      <p:sp>
-        <p:nvSpPr>
-          <p:cNvPr id="3" name="TextBox 2"/>
-          <p:cNvSpPr txBox="1"/>
-          <p:nvPr/>
-        </p:nvSpPr>
-        <p:spPr>
-          <a:xfrm>
-            <a:off x="640000" y="760000"/>
-            <a:ext cx="10912000" cy="800000"/>
-          </a:xfrm>
-          <a:prstGeom prst="rect">
-            <a:avLst/>
-          </a:prstGeom>
-          <a:noFill/>
-        </p:spPr>
-        <p:txBody>
-          <a:bodyPr wrap="square">
-            <a:spAutoFit/>
-          </a:bodyPr>
-          <a:lstStyle/>
-          <a:p>
-            <a:pPr>
-              <a:spcAft>
-                <a:spcPts val="1710"/>
-              </a:spcAft>
-            </a:pPr>
-            <a:r>
-              <a:rPr sz="3800" b="1">
-                <a:solidFill>
-                  <a:srgbClr val="FBF7EF"/>
-                </a:solidFill>
-                <a:latin typeface="Fredoka"/>
-              </a:rPr>
-              <a:t>20 minutos · individual · en silencio</a:t>
-            </a:r>
-          </a:p>
-        </p:txBody>
-      </p:sp>
-      <p:sp>
-        <p:nvSpPr>
-          <p:cNvPr id="4" name="Rectangle 3"/>
-          <p:cNvSpPr/>
-          <p:nvPr/>
-        </p:nvSpPr>
-        <p:spPr>
-          <a:xfrm>
-            <a:off x="640000" y="2000000"/>
-            <a:ext cx="3504000" cy="1800000"/>
-          </a:xfrm>
-          <a:prstGeom prst="rect">
-            <a:avLst/>
-          </a:prstGeom>
-          <a:solidFill>
-            <a:srgbClr val="FBF7EF"/>
-          </a:solidFill>
-          <a:ln>
-            <a:noFill/>
-          </a:ln>
-        </p:spPr>
-        <p:style>
-          <a:lnRef idx="1">
-            <a:schemeClr val="accent1"/>
-          </a:lnRef>
-          <a:fillRef idx="3">
-            <a:schemeClr val="accent1"/>
-          </a:fillRef>
-          <a:effectRef idx="2">
-            <a:schemeClr val="accent1"/>
-          </a:effectRef>
-          <a:fontRef idx="minor">
-            <a:schemeClr val="lt1"/>
-          </a:fontRef>
-        </p:style>
-        <p:txBody>
-          <a:bodyPr rtlCol="0" anchor="ctr"/>
-          <a:lstStyle/>
-          <a:p>
-            <a:pPr algn="ctr"/>
-          </a:p>
-        </p:txBody>
-      </p:sp>
-      <p:sp>
-        <p:nvSpPr>
-          <p:cNvPr id="5" name="TextBox 4"/>
-          <p:cNvSpPr txBox="1"/>
-          <p:nvPr/>
-        </p:nvSpPr>
-        <p:spPr>
-          <a:xfrm>
-            <a:off x="790000" y="2100000"/>
-            <a:ext cx="3204000" cy="700000"/>
-          </a:xfrm>
-          <a:prstGeom prst="rect">
-            <a:avLst/>
-          </a:prstGeom>
-          <a:noFill/>
-        </p:spPr>
-        <p:txBody>
-          <a:bodyPr wrap="square">
-            <a:spAutoFit/>
-          </a:bodyPr>
-          <a:lstStyle/>
-          <a:p>
-            <a:pPr>
-              <a:spcAft>
-                <a:spcPts val="990"/>
-              </a:spcAft>
-            </a:pPr>
-            <a:r>
-              <a:rPr sz="2200" b="1">
-                <a:solidFill>
-                  <a:srgbClr val="E8793A"/>
-                </a:solidFill>
-                <a:latin typeface="Nunito Sans"/>
-              </a:rPr>
-              <a:t>Peldaño 1 · Todos</a:t>
-            </a:r>
-          </a:p>
-        </p:txBody>
-      </p:sp>
-      <p:sp>
-        <p:nvSpPr>
-          <p:cNvPr id="6" name="TextBox 5"/>
-          <p:cNvSpPr txBox="1"/>
-          <p:nvPr/>
-        </p:nvSpPr>
-        <p:spPr>
-          <a:xfrm>
-            <a:off x="790000" y="2900000"/>
-            <a:ext cx="3204000" cy="700000"/>
-          </a:xfrm>
-          <a:prstGeom prst="rect">
-            <a:avLst/>
-          </a:prstGeom>
-          <a:noFill/>
-        </p:spPr>
-        <p:txBody>
-          <a:bodyPr wrap="square">
-            <a:spAutoFit/>
-          </a:bodyPr>
-          <a:lstStyle/>
-          <a:p>
-            <a:pPr>
-              <a:spcAft>
-                <a:spcPts val="900"/>
-              </a:spcAft>
-            </a:pPr>
-            <a:r>
-              <a:rPr sz="2000" b="0">
-                <a:solidFill>
-                  <a:srgbClr val="4A5568"/>
-                </a:solidFill>
-                <a:latin typeface="Nunito Sans"/>
-              </a:rPr>
-              <a:t>6 puntos</a:t>
-            </a:r>
-          </a:p>
-        </p:txBody>
-      </p:sp>
-      <p:sp>
-        <p:nvSpPr>
-          <p:cNvPr id="7" name="Rectangle 6"/>
-          <p:cNvSpPr/>
-          <p:nvPr/>
-        </p:nvSpPr>
-        <p:spPr>
-          <a:xfrm>
-            <a:off x="4344000" y="2000000"/>
-            <a:ext cx="3504000" cy="1800000"/>
-          </a:xfrm>
-          <a:prstGeom prst="rect">
-            <a:avLst/>
-          </a:prstGeom>
-          <a:solidFill>
-            <a:srgbClr val="FBF7EF"/>
-          </a:solidFill>
-          <a:ln>
-            <a:noFill/>
-          </a:ln>
-        </p:spPr>
-        <p:style>
-          <a:lnRef idx="1">
-            <a:schemeClr val="accent1"/>
-          </a:lnRef>
-          <a:fillRef idx="3">
-            <a:schemeClr val="accent1"/>
-          </a:fillRef>
-          <a:effectRef idx="2">
-            <a:schemeClr val="accent1"/>
-          </a:effectRef>
-          <a:fontRef idx="minor">
-            <a:schemeClr val="lt1"/>
-          </a:fontRef>
-        </p:style>
-        <p:txBody>
-          <a:bodyPr rtlCol="0" anchor="ctr"/>
-          <a:lstStyle/>
-          <a:p>
-            <a:pPr algn="ctr"/>
-          </a:p>
-        </p:txBody>
-      </p:sp>
-      <p:sp>
-        <p:nvSpPr>
-          <p:cNvPr id="8" name="TextBox 7"/>
-          <p:cNvSpPr txBox="1"/>
-          <p:nvPr/>
-        </p:nvSpPr>
-        <p:spPr>
-          <a:xfrm>
-            <a:off x="4494000" y="2100000"/>
-            <a:ext cx="3204000" cy="700000"/>
-          </a:xfrm>
-          <a:prstGeom prst="rect">
-            <a:avLst/>
-          </a:prstGeom>
-          <a:noFill/>
-        </p:spPr>
-        <p:txBody>
-          <a:bodyPr wrap="square">
-            <a:spAutoFit/>
-          </a:bodyPr>
-          <a:lstStyle/>
-          <a:p>
-            <a:pPr>
-              <a:spcAft>
-                <a:spcPts val="990"/>
-              </a:spcAft>
-            </a:pPr>
-            <a:r>
-              <a:rPr sz="2200" b="1">
-                <a:solidFill>
-                  <a:srgbClr val="E8793A"/>
-                </a:solidFill>
-                <a:latin typeface="Nunito Sans"/>
-              </a:rPr>
-              <a:t>Peldaño 2 · Repaso</a:t>
-            </a:r>
-          </a:p>
-        </p:txBody>
-      </p:sp>
-      <p:sp>
-        <p:nvSpPr>
-          <p:cNvPr id="9" name="TextBox 8"/>
-          <p:cNvSpPr txBox="1"/>
-          <p:nvPr/>
-        </p:nvSpPr>
-        <p:spPr>
-          <a:xfrm>
-            <a:off x="4494000" y="2900000"/>
-            <a:ext cx="3204000" cy="700000"/>
-          </a:xfrm>
-          <a:prstGeom prst="rect">
-            <a:avLst/>
-          </a:prstGeom>
-          <a:noFill/>
-        </p:spPr>
-        <p:txBody>
-          <a:bodyPr wrap="square">
-            <a:spAutoFit/>
-          </a:bodyPr>
-          <a:lstStyle/>
-          <a:p>
-            <a:pPr>
-              <a:spcAft>
-                <a:spcPts val="900"/>
-              </a:spcAft>
-            </a:pPr>
-            <a:r>
-              <a:rPr sz="2000" b="0">
-                <a:solidFill>
-                  <a:srgbClr val="4A5568"/>
-                </a:solidFill>
-                <a:latin typeface="Nunito Sans"/>
-              </a:rPr>
-              <a:t>2 puntos</a:t>
-            </a:r>
-          </a:p>
-        </p:txBody>
-      </p:sp>
-      <p:sp>
-        <p:nvSpPr>
-          <p:cNvPr id="10" name="Rectangle 9"/>
-          <p:cNvSpPr/>
-          <p:nvPr/>
-        </p:nvSpPr>
-        <p:spPr>
-          <a:xfrm>
-            <a:off x="8048000" y="2000000"/>
-            <a:ext cx="3504000" cy="1800000"/>
-          </a:xfrm>
-          <a:prstGeom prst="rect">
-            <a:avLst/>
-          </a:prstGeom>
-          <a:solidFill>
-            <a:srgbClr val="FBF7EF"/>
-          </a:solidFill>
-          <a:ln>
-            <a:noFill/>
-          </a:ln>
-        </p:spPr>
-        <p:style>
-          <a:lnRef idx="1">
-            <a:schemeClr val="accent1"/>
-          </a:lnRef>
-          <a:fillRef idx="3">
-            <a:schemeClr val="accent1"/>
-          </a:fillRef>
-          <a:effectRef idx="2">
-            <a:schemeClr val="accent1"/>
-          </a:effectRef>
-          <a:fontRef idx="minor">
-            <a:schemeClr val="lt1"/>
-          </a:fontRef>
-        </p:style>
-        <p:txBody>
-          <a:bodyPr rtlCol="0" anchor="ctr"/>
-          <a:lstStyle/>
-          <a:p>
-            <a:pPr algn="ctr"/>
-          </a:p>
-        </p:txBody>
-      </p:sp>
-      <p:sp>
-        <p:nvSpPr>
-          <p:cNvPr id="11" name="TextBox 10"/>
-          <p:cNvSpPr txBox="1"/>
-          <p:nvPr/>
-        </p:nvSpPr>
-        <p:spPr>
-          <a:xfrm>
-            <a:off x="8198000" y="2100000"/>
-            <a:ext cx="3204000" cy="700000"/>
-          </a:xfrm>
-          <a:prstGeom prst="rect">
-            <a:avLst/>
-          </a:prstGeom>
-          <a:noFill/>
-        </p:spPr>
-        <p:txBody>
-          <a:bodyPr wrap="square">
-            <a:spAutoFit/>
-          </a:bodyPr>
-          <a:lstStyle/>
-          <a:p>
-            <a:pPr>
-              <a:spcAft>
-                <a:spcPts val="990"/>
-              </a:spcAft>
-            </a:pPr>
-            <a:r>
-              <a:rPr sz="2200" b="1">
-                <a:solidFill>
-                  <a:srgbClr val="E8793A"/>
-                </a:solidFill>
-                <a:latin typeface="Nunito Sans"/>
-              </a:rPr>
-              <a:t>Peldaño 3 · Reto</a:t>
-            </a:r>
-          </a:p>
-        </p:txBody>
-      </p:sp>
-      <p:sp>
-        <p:nvSpPr>
-          <p:cNvPr id="12" name="TextBox 11"/>
-          <p:cNvSpPr txBox="1"/>
-          <p:nvPr/>
-        </p:nvSpPr>
-        <p:spPr>
-          <a:xfrm>
-            <a:off x="8198000" y="2900000"/>
-            <a:ext cx="3204000" cy="700000"/>
-          </a:xfrm>
-          <a:prstGeom prst="rect">
-            <a:avLst/>
-          </a:prstGeom>
-          <a:noFill/>
-        </p:spPr>
-        <p:txBody>
-          <a:bodyPr wrap="square">
-            <a:spAutoFit/>
-          </a:bodyPr>
-          <a:lstStyle/>
-          <a:p>
-            <a:pPr>
-              <a:spcAft>
-                <a:spcPts val="900"/>
-              </a:spcAft>
-            </a:pPr>
-            <a:r>
-              <a:rPr sz="2000" b="0">
-                <a:solidFill>
-                  <a:srgbClr val="4A5568"/>
-                </a:solidFill>
-                <a:latin typeface="Nunito Sans"/>
-              </a:rPr>
-              <a:t>2 puntos</a:t>
-            </a:r>
-          </a:p>
-        </p:txBody>
-      </p:sp>
-      <p:sp>
-        <p:nvSpPr>
-          <p:cNvPr id="13" name="TextBox 12"/>
-          <p:cNvSpPr txBox="1"/>
-          <p:nvPr/>
-        </p:nvSpPr>
-        <p:spPr>
-          <a:xfrm>
-            <a:off x="640000" y="4200000"/>
-            <a:ext cx="10912000" cy="1500000"/>
-          </a:xfrm>
-          <a:prstGeom prst="rect">
-            <a:avLst/>
-          </a:prstGeom>
-          <a:noFill/>
-        </p:spPr>
-        <p:txBody>
-          <a:bodyPr wrap="square">
-            <a:spAutoFit/>
-          </a:bodyPr>
-          <a:lstStyle/>
-          <a:p>
-            <a:pPr>
-              <a:spcAft>
-                <a:spcPts val="990"/>
-              </a:spcAft>
-            </a:pPr>
-            <a:r>
-              <a:rPr sz="2200" b="0">
-                <a:solidFill>
-                  <a:srgbClr val="C9D3E6"/>
-                </a:solidFill>
-                <a:latin typeface="Nunito Sans"/>
-              </a:rPr>
-              <a:t>Sin apuntes. Junto a cada respuesta, marca «seguro» o «dudo».</a:t>
-            </a:r>
-          </a:p>
-        </p:txBody>
-      </p:sp>
-    </p:spTree>
-  </p:cSld>
-  <p:clrMapOvr>
-    <a:masterClrMapping/>
-  </p:clrMapOvr>
-</p:sld>
-</file>
-
-<file path=ppt/slides/slide2.xml><?xml version="1.0" encoding="utf-8"?>
-<p:sld xmlns:a="http://schemas.openxmlformats.org/drawingml/2006/main" xmlns:p="http://schemas.openxmlformats.org/presentationml/2006/main" xmlns:r="http://schemas.openxmlformats.org/officeDocument/2006/relationships">
-  <p:cSld>
-    <p:bg>
-      <p:bgPr>
-        <a:solidFill>
-          <a:srgbClr val="FBF7EF"/>
-        </a:solidFill>
-        <a:effectLst/>
-      </p:bgPr>
-    </p:bg>
-    <p:spTree>
-      <p:nvGrpSpPr>
-        <p:cNvPr id="1" name=""/>
-        <p:cNvGrpSpPr/>
-        <p:nvPr/>
-      </p:nvGrpSpPr>
-      <p:grpSpPr/>
-      <p:sp>
-        <p:nvSpPr>
-          <p:cNvPr id="2" name="TextBox 1"/>
-          <p:cNvSpPr txBox="1"/>
-          <p:nvPr/>
-        </p:nvSpPr>
-        <p:spPr>
-          <a:xfrm>
-            <a:off x="640000" y="380000"/>
-            <a:ext cx="10912000" cy="420000"/>
-          </a:xfrm>
-          <a:prstGeom prst="rect">
-            <a:avLst/>
-          </a:prstGeom>
-          <a:noFill/>
-        </p:spPr>
-        <p:txBody>
-          <a:bodyPr wrap="square">
-            <a:spAutoFit/>
-          </a:bodyPr>
-          <a:lstStyle/>
-          <a:p>
-            <a:pPr>
-              <a:spcAft>
-                <a:spcPts val="630"/>
-              </a:spcAft>
-            </a:pPr>
-            <a:r>
-              <a:rPr sz="1400" b="1">
-                <a:solidFill>
-                  <a:srgbClr val="E8793A"/>
-                </a:solidFill>
-                <a:latin typeface="Nunito Sans"/>
-              </a:rPr>
-              <a:t>ANTES DE EMPEZAR · SIN MIRAR</a:t>
-            </a:r>
-          </a:p>
-        </p:txBody>
-      </p:sp>
-      <p:sp>
-        <p:nvSpPr>
-          <p:cNvPr id="3" name="TextBox 2"/>
-          <p:cNvSpPr txBox="1"/>
-          <p:nvPr/>
-        </p:nvSpPr>
-        <p:spPr>
-          <a:xfrm>
-            <a:off x="640000" y="760000"/>
-            <a:ext cx="10912000" cy="800000"/>
-          </a:xfrm>
-          <a:prstGeom prst="rect">
-            <a:avLst/>
-          </a:prstGeom>
-          <a:noFill/>
-        </p:spPr>
-        <p:txBody>
-          <a:bodyPr wrap="square">
-            <a:spAutoFit/>
-          </a:bodyPr>
-          <a:lstStyle/>
-          <a:p>
-            <a:pPr>
-              <a:spcAft>
-                <a:spcPts val="1440"/>
-              </a:spcAft>
-            </a:pPr>
-            <a:r>
-              <a:rPr sz="3200" b="1">
-                <a:solidFill>
-                  <a:srgbClr val="1F2A44"/>
-                </a:solidFill>
-                <a:latin typeface="Fredoka"/>
-              </a:rPr>
-              <a:t>Escribe en tu hoja las palabras que faltan</a:t>
-            </a:r>
-          </a:p>
-        </p:txBody>
-      </p:sp>
-      <p:sp>
-        <p:nvSpPr>
-          <p:cNvPr id="4" name="TextBox 3"/>
-          <p:cNvSpPr txBox="1"/>
-          <p:nvPr/>
-        </p:nvSpPr>
-        <p:spPr>
-          <a:xfrm>
-            <a:off x="640000" y="1800000"/>
-            <a:ext cx="10912000" cy="4300000"/>
-          </a:xfrm>
-          <a:prstGeom prst="rect">
-            <a:avLst/>
-          </a:prstGeom>
-          <a:noFill/>
-        </p:spPr>
-        <p:txBody>
-          <a:bodyPr wrap="square">
-            <a:spAutoFit/>
-          </a:bodyPr>
-          <a:lstStyle/>
-          <a:p>
-            <a:pPr>
-              <a:spcAft>
-                <a:spcPts val="1170"/>
-              </a:spcAft>
-            </a:pPr>
-            <a:r>
-              <a:rPr sz="2600" b="1">
-                <a:solidFill>
-                  <a:srgbClr val="E8793A"/>
-                </a:solidFill>
-                <a:latin typeface="Nunito Sans"/>
-              </a:rPr>
-              <a:t>1. </a:t>
-            </a:r>
-            <a:r>
-              <a:rPr sz="2600" b="0">
-                <a:solidFill>
-                  <a:srgbClr val="1F2A44"/>
-                </a:solidFill>
-                <a:latin typeface="Nunito Sans"/>
-              </a:rPr>
-              <a:t>Una foto fuera de ______ es real, pero de otro sitio o de otra fecha.  (sesión 35)</a:t>
-            </a:r>
-          </a:p>
-          <a:p>
-            <a:pPr>
-              <a:spcAft>
-                <a:spcPts val="1170"/>
-              </a:spcAft>
-            </a:pPr>
-            <a:r>
-              <a:rPr sz="2600" b="1">
-                <a:solidFill>
-                  <a:srgbClr val="E8793A"/>
-                </a:solidFill>
-                <a:latin typeface="Nunito Sans"/>
-              </a:rPr>
-              <a:t>2. </a:t>
-            </a:r>
-            <a:r>
-              <a:rPr sz="2600" b="0">
-                <a:solidFill>
-                  <a:srgbClr val="1F2A44"/>
-                </a:solidFill>
-                <a:latin typeface="Nunito Sans"/>
-              </a:rPr>
-              <a:t>Para descubrir un deepfake, mejor que mirar el vídeo es buscar la ______.  (sesión 35)</a:t>
-            </a:r>
-          </a:p>
-          <a:p>
-            <a:pPr>
-              <a:spcAft>
-                <a:spcPts val="1170"/>
-              </a:spcAft>
-            </a:pPr>
-            <a:r>
-              <a:rPr sz="2600" b="1">
-                <a:solidFill>
-                  <a:srgbClr val="E8793A"/>
-                </a:solidFill>
-                <a:latin typeface="Nunito Sans"/>
-              </a:rPr>
-              <a:t>3. </a:t>
-            </a:r>
-            <a:r>
-              <a:rPr sz="2600" b="0">
-                <a:solidFill>
-                  <a:srgbClr val="1F2A44"/>
-                </a:solidFill>
-                <a:latin typeface="Nunito Sans"/>
-              </a:rPr>
-              <a:t>La fuente ______ es quien lo vio, lo midió o lo decidió.  (sesión 31)</a:t>
-            </a:r>
-          </a:p>
-        </p:txBody>
-      </p:sp>
-    </p:spTree>
-  </p:cSld>
-  <p:clrMapOvr>
-    <a:masterClrMapping/>
-  </p:clrMapOvr>
-</p:sld>
-</file>
-
-<file path=ppt/slides/slide3.xml><?xml version="1.0" encoding="utf-8"?>
-<p:sld xmlns:a="http://schemas.openxmlformats.org/drawingml/2006/main" xmlns:p="http://schemas.openxmlformats.org/presentationml/2006/main" xmlns:r="http://schemas.openxmlformats.org/officeDocument/2006/relationships">
-  <p:cSld>
-    <p:bg>
-      <p:bgPr>
-        <a:solidFill>
-          <a:srgbClr val="FBF7EF"/>
-        </a:solidFill>
-        <a:effectLst/>
-      </p:bgPr>
-    </p:bg>
-    <p:spTree>
-      <p:nvGrpSpPr>
-        <p:cNvPr id="1" name=""/>
-        <p:cNvGrpSpPr/>
-        <p:nvPr/>
-      </p:nvGrpSpPr>
-      <p:grpSpPr/>
-      <p:sp>
-        <p:nvSpPr>
-          <p:cNvPr id="2" name="TextBox 1"/>
-          <p:cNvSpPr txBox="1"/>
-          <p:nvPr/>
-        </p:nvSpPr>
-        <p:spPr>
-          <a:xfrm>
-            <a:off x="640000" y="380000"/>
-            <a:ext cx="10912000" cy="420000"/>
-          </a:xfrm>
-          <a:prstGeom prst="rect">
-            <a:avLst/>
-          </a:prstGeom>
-          <a:noFill/>
-        </p:spPr>
-        <p:txBody>
-          <a:bodyPr wrap="square">
-            <a:spAutoFit/>
-          </a:bodyPr>
-          <a:lstStyle/>
-          <a:p>
-            <a:pPr>
-              <a:spcAft>
-                <a:spcPts val="630"/>
-              </a:spcAft>
-            </a:pPr>
-            <a:r>
-              <a:rPr sz="1400" b="1">
-                <a:solidFill>
-                  <a:srgbClr val="E8793A"/>
-                </a:solidFill>
-                <a:latin typeface="Nunito Sans"/>
-              </a:rPr>
-              <a:t>ANTES DE EMPEZAR · SIN MIRAR</a:t>
-            </a:r>
-          </a:p>
-        </p:txBody>
-      </p:sp>
-      <p:sp>
-        <p:nvSpPr>
-          <p:cNvPr id="3" name="TextBox 2"/>
-          <p:cNvSpPr txBox="1"/>
-          <p:nvPr/>
-        </p:nvSpPr>
-        <p:spPr>
-          <a:xfrm>
-            <a:off x="640000" y="760000"/>
-            <a:ext cx="10912000" cy="800000"/>
-          </a:xfrm>
-          <a:prstGeom prst="rect">
-            <a:avLst/>
-          </a:prstGeom>
-          <a:noFill/>
-        </p:spPr>
-        <p:txBody>
-          <a:bodyPr wrap="square">
-            <a:spAutoFit/>
-          </a:bodyPr>
-          <a:lstStyle/>
-          <a:p>
-            <a:pPr>
-              <a:spcAft>
-                <a:spcPts val="1440"/>
-              </a:spcAft>
-            </a:pPr>
-            <a:r>
-              <a:rPr sz="3200" b="1">
-                <a:solidFill>
-                  <a:srgbClr val="1F2A44"/>
-                </a:solidFill>
-                <a:latin typeface="Fredoka"/>
-              </a:rPr>
-              <a:t>Corrige con otro color</a:t>
-            </a:r>
-          </a:p>
-        </p:txBody>
-      </p:sp>
-      <p:sp>
-        <p:nvSpPr>
-          <p:cNvPr id="4" name="TextBox 3"/>
-          <p:cNvSpPr txBox="1"/>
-          <p:nvPr/>
-        </p:nvSpPr>
-        <p:spPr>
-          <a:xfrm>
-            <a:off x="640000" y="1800000"/>
-            <a:ext cx="10912000" cy="4300000"/>
-          </a:xfrm>
-          <a:prstGeom prst="rect">
-            <a:avLst/>
-          </a:prstGeom>
-          <a:noFill/>
-        </p:spPr>
-        <p:txBody>
-          <a:bodyPr wrap="square">
-            <a:spAutoFit/>
-          </a:bodyPr>
-          <a:lstStyle/>
-          <a:p>
-            <a:pPr>
-              <a:spcAft>
-                <a:spcPts val="1170"/>
-              </a:spcAft>
-            </a:pPr>
-            <a:r>
-              <a:rPr sz="2600" b="1">
-                <a:solidFill>
-                  <a:srgbClr val="E8793A"/>
-                </a:solidFill>
-                <a:latin typeface="Nunito Sans"/>
-              </a:rPr>
-              <a:t>1. </a:t>
-            </a:r>
-            <a:r>
-              <a:rPr sz="2600" b="0">
-                <a:solidFill>
-                  <a:srgbClr val="1F2A44"/>
-                </a:solidFill>
-                <a:latin typeface="Nunito Sans"/>
-              </a:rPr>
-              <a:t>Una foto fuera de </a:t>
-            </a:r>
-            <a:r>
-              <a:rPr sz="2600" b="1">
-                <a:solidFill>
-                  <a:srgbClr val="1F2A44"/>
-                </a:solidFill>
-                <a:latin typeface="Nunito Sans"/>
-              </a:rPr>
-              <a:t>contexto</a:t>
-            </a:r>
-            <a:r>
-              <a:rPr sz="2600" b="0">
-                <a:solidFill>
-                  <a:srgbClr val="1F2A44"/>
-                </a:solidFill>
-                <a:latin typeface="Nunito Sans"/>
-              </a:rPr>
-              <a:t> es real, pero de otro sitio o de otra fecha.  (sesión 35)</a:t>
-            </a:r>
-          </a:p>
-          <a:p>
-            <a:pPr>
-              <a:spcAft>
-                <a:spcPts val="1170"/>
-              </a:spcAft>
-            </a:pPr>
-            <a:r>
-              <a:rPr sz="2600" b="1">
-                <a:solidFill>
-                  <a:srgbClr val="E8793A"/>
-                </a:solidFill>
-                <a:latin typeface="Nunito Sans"/>
-              </a:rPr>
-              <a:t>2. </a:t>
-            </a:r>
-            <a:r>
-              <a:rPr sz="2600" b="0">
-                <a:solidFill>
-                  <a:srgbClr val="1F2A44"/>
-                </a:solidFill>
-                <a:latin typeface="Nunito Sans"/>
-              </a:rPr>
-              <a:t>Para descubrir un deepfake, mejor que mirar el vídeo es buscar la </a:t>
-            </a:r>
-            <a:r>
-              <a:rPr sz="2600" b="1">
-                <a:solidFill>
-                  <a:srgbClr val="1F2A44"/>
-                </a:solidFill>
-                <a:latin typeface="Nunito Sans"/>
-              </a:rPr>
-              <a:t>fuente</a:t>
-            </a:r>
-            <a:r>
-              <a:rPr sz="2600" b="0">
-                <a:solidFill>
-                  <a:srgbClr val="1F2A44"/>
-                </a:solidFill>
-                <a:latin typeface="Nunito Sans"/>
-              </a:rPr>
-              <a:t>.  (sesión 35)</a:t>
-            </a:r>
-          </a:p>
-          <a:p>
-            <a:pPr>
-              <a:spcAft>
-                <a:spcPts val="1170"/>
-              </a:spcAft>
-            </a:pPr>
-            <a:r>
-              <a:rPr sz="2600" b="1">
-                <a:solidFill>
-                  <a:srgbClr val="E8793A"/>
-                </a:solidFill>
-                <a:latin typeface="Nunito Sans"/>
-              </a:rPr>
-              <a:t>3. </a:t>
-            </a:r>
-            <a:r>
-              <a:rPr sz="2600" b="0">
-                <a:solidFill>
-                  <a:srgbClr val="1F2A44"/>
-                </a:solidFill>
-                <a:latin typeface="Nunito Sans"/>
-              </a:rPr>
-              <a:t>La fuente </a:t>
-            </a:r>
-            <a:r>
-              <a:rPr sz="2600" b="1">
-                <a:solidFill>
-                  <a:srgbClr val="1F2A44"/>
-                </a:solidFill>
-                <a:latin typeface="Nunito Sans"/>
-              </a:rPr>
-              <a:t>original</a:t>
-            </a:r>
-            <a:r>
-              <a:rPr sz="2600" b="0">
-                <a:solidFill>
-                  <a:srgbClr val="1F2A44"/>
-                </a:solidFill>
-                <a:latin typeface="Nunito Sans"/>
-              </a:rPr>
-              <a:t> es quien lo vio, lo midió o lo decidió.  (sesión 31)</a:t>
-            </a:r>
-          </a:p>
-        </p:txBody>
-      </p:sp>
-    </p:spTree>
-  </p:cSld>
-  <p:clrMapOvr>
-    <a:masterClrMapping/>
-  </p:clrMapOvr>
-</p:sld>
-</file>
-
-<file path=ppt/slides/slide4.xml><?xml version="1.0" encoding="utf-8"?>
-<p:sld xmlns:a="http://schemas.openxmlformats.org/drawingml/2006/main" xmlns:p="http://schemas.openxmlformats.org/presentationml/2006/main" xmlns:r="http://schemas.openxmlformats.org/officeDocument/2006/relationships">
-  <p:cSld>
-    <p:bg>
-      <p:bgPr>
-        <a:solidFill>
-          <a:srgbClr val="FBF7EF"/>
-        </a:solidFill>
-        <a:effectLst/>
-      </p:bgPr>
-    </p:bg>
-    <p:spTree>
-      <p:nvGrpSpPr>
-        <p:cNvPr id="1" name=""/>
-        <p:cNvGrpSpPr/>
-        <p:nvPr/>
-      </p:nvGrpSpPr>
-      <p:grpSpPr/>
-      <p:sp>
-        <p:nvSpPr>
-          <p:cNvPr id="2" name="TextBox 1"/>
-          <p:cNvSpPr txBox="1"/>
-          <p:nvPr/>
-        </p:nvSpPr>
-        <p:spPr>
-          <a:xfrm>
-            <a:off x="640000" y="380000"/>
-            <a:ext cx="10912000" cy="420000"/>
-          </a:xfrm>
-          <a:prstGeom prst="rect">
-            <a:avLst/>
-          </a:prstGeom>
-          <a:noFill/>
-        </p:spPr>
-        <p:txBody>
-          <a:bodyPr wrap="square">
-            <a:spAutoFit/>
-          </a:bodyPr>
-          <a:lstStyle/>
-          <a:p>
-            <a:pPr>
-              <a:spcAft>
-                <a:spcPts val="630"/>
-              </a:spcAft>
-            </a:pPr>
-            <a:r>
-              <a:rPr sz="1400" b="1">
-                <a:solidFill>
-                  <a:srgbClr val="E8793A"/>
-                </a:solidFill>
-                <a:latin typeface="Nunito Sans"/>
-              </a:rPr>
-              <a:t>PARA EMPEZAR</a:t>
-            </a:r>
-          </a:p>
-        </p:txBody>
-      </p:sp>
-      <p:sp>
-        <p:nvSpPr>
-          <p:cNvPr id="3" name="Rectangle 2"/>
-          <p:cNvSpPr/>
-          <p:nvPr/>
-        </p:nvSpPr>
-        <p:spPr>
-          <a:xfrm>
-            <a:off x="640000" y="1300000"/>
-            <a:ext cx="90000" cy="2400000"/>
-          </a:xfrm>
-          <a:prstGeom prst="rect">
-            <a:avLst/>
-          </a:prstGeom>
-          <a:solidFill>
-            <a:srgbClr val="E8793A"/>
-          </a:solidFill>
-          <a:ln>
-            <a:noFill/>
-          </a:ln>
-        </p:spPr>
-        <p:style>
-          <a:lnRef idx="1">
-            <a:schemeClr val="accent1"/>
-          </a:lnRef>
-          <a:fillRef idx="3">
-            <a:schemeClr val="accent1"/>
-          </a:fillRef>
-          <a:effectRef idx="2">
-            <a:schemeClr val="accent1"/>
-          </a:effectRef>
-          <a:fontRef idx="minor">
-            <a:schemeClr val="lt1"/>
-          </a:fontRef>
-        </p:style>
-        <p:txBody>
-          <a:bodyPr rtlCol="0" anchor="ctr"/>
-          <a:lstStyle/>
-          <a:p>
-            <a:pPr algn="ctr"/>
-          </a:p>
-        </p:txBody>
-      </p:sp>
-      <p:sp>
-        <p:nvSpPr>
-          <p:cNvPr id="4" name="TextBox 3"/>
-          <p:cNvSpPr txBox="1"/>
-          <p:nvPr/>
-        </p:nvSpPr>
-        <p:spPr>
-          <a:xfrm>
-            <a:off x="940000" y="1300000"/>
-            <a:ext cx="10612000" cy="2600000"/>
-          </a:xfrm>
-          <a:prstGeom prst="rect">
-            <a:avLst/>
-          </a:prstGeom>
-          <a:noFill/>
-        </p:spPr>
-        <p:txBody>
-          <a:bodyPr wrap="square" anchor="ctr">
-            <a:spAutoFit/>
-          </a:bodyPr>
-          <a:lstStyle/>
-          <a:p>
-            <a:pPr>
-              <a:spcAft>
-                <a:spcPts val="1530"/>
-              </a:spcAft>
-            </a:pPr>
-            <a:r>
-              <a:rPr sz="3400" b="1">
-                <a:solidFill>
-                  <a:srgbClr val="1F2A44"/>
-                </a:solidFill>
-                <a:latin typeface="Nunito Sans"/>
-              </a:rPr>
-              <a:t>Cada día te llegan decenas de mensajes, titulares, fotos y vídeos.</a:t>
-            </a:r>
-          </a:p>
-        </p:txBody>
-      </p:sp>
-      <p:sp>
-        <p:nvSpPr>
-          <p:cNvPr id="5" name="TextBox 4"/>
-          <p:cNvSpPr txBox="1"/>
-          <p:nvPr/>
-        </p:nvSpPr>
-        <p:spPr>
-          <a:xfrm>
-            <a:off x="640000" y="4300000"/>
-            <a:ext cx="10912000" cy="1200000"/>
-          </a:xfrm>
-          <a:prstGeom prst="rect">
-            <a:avLst/>
-          </a:prstGeom>
-          <a:noFill/>
-        </p:spPr>
-        <p:txBody>
-          <a:bodyPr wrap="square">
-            <a:spAutoFit/>
-          </a:bodyPr>
-          <a:lstStyle/>
-          <a:p>
-            <a:pPr>
-              <a:spcAft>
-                <a:spcPts val="1170"/>
-              </a:spcAft>
-            </a:pPr>
-            <a:r>
-              <a:rPr sz="2600" b="0">
-                <a:solidFill>
-                  <a:srgbClr val="4A5568"/>
-                </a:solidFill>
-                <a:latin typeface="Nunito Sans"/>
-              </a:rPr>
-              <a:t>¿Cuál de las herramientas de esta unidad vas a usar más?</a:t>
-            </a:r>
-          </a:p>
-        </p:txBody>
-      </p:sp>
-    </p:spTree>
-  </p:cSld>
-  <p:clrMapOvr>
-    <a:masterClrMapping/>
-  </p:clrMapOvr>
-</p:sld>
-</file>
-
-<file path=ppt/slides/slide5.xml><?xml version="1.0" encoding="utf-8"?>
-<p:sld xmlns:a="http://schemas.openxmlformats.org/drawingml/2006/main" xmlns:p="http://schemas.openxmlformats.org/presentationml/2006/main" xmlns:r="http://schemas.openxmlformats.org/officeDocument/2006/relationships">
-  <p:cSld>
-    <p:bg>
-      <p:bgPr>
-        <a:solidFill>
-          <a:srgbClr val="1F2A44"/>
-        </a:solidFill>
-        <a:effectLst/>
-      </p:bgPr>
-    </p:bg>
-    <p:spTree>
-      <p:nvGrpSpPr>
-        <p:cNvPr id="1" name=""/>
-        <p:cNvGrpSpPr/>
-        <p:nvPr/>
-      </p:nvGrpSpPr>
-      <p:grpSpPr/>
-      <p:sp>
-        <p:nvSpPr>
-          <p:cNvPr id="2" name="TextBox 1"/>
-          <p:cNvSpPr txBox="1"/>
-          <p:nvPr/>
-        </p:nvSpPr>
-        <p:spPr>
-          <a:xfrm>
-            <a:off x="640000" y="2300000"/>
-            <a:ext cx="10912000" cy="500000"/>
-          </a:xfrm>
-          <a:prstGeom prst="rect">
-            <a:avLst/>
-          </a:prstGeom>
-          <a:noFill/>
-        </p:spPr>
-        <p:txBody>
-          <a:bodyPr wrap="square">
-            <a:spAutoFit/>
-          </a:bodyPr>
-          <a:lstStyle/>
-          <a:p>
-            <a:pPr>
-              <a:spcAft>
-                <a:spcPts val="810"/>
-              </a:spcAft>
-            </a:pPr>
-            <a:r>
-              <a:rPr sz="1800" b="1">
-                <a:solidFill>
-                  <a:srgbClr val="F4B183"/>
-                </a:solidFill>
-                <a:latin typeface="Nunito Sans"/>
-              </a:rPr>
-              <a:t>BLOQUE 1</a:t>
-            </a:r>
-          </a:p>
-        </p:txBody>
-      </p:sp>
-      <p:sp>
-        <p:nvSpPr>
-          <p:cNvPr id="3" name="TextBox 2"/>
-          <p:cNvSpPr txBox="1"/>
-          <p:nvPr/>
-        </p:nvSpPr>
-        <p:spPr>
-          <a:xfrm>
-            <a:off x="640000" y="2800000"/>
-            <a:ext cx="10912000" cy="800000"/>
-          </a:xfrm>
-          <a:prstGeom prst="rect">
-            <a:avLst/>
-          </a:prstGeom>
-          <a:noFill/>
-        </p:spPr>
-        <p:txBody>
-          <a:bodyPr wrap="square">
-            <a:spAutoFit/>
-          </a:bodyPr>
-          <a:lstStyle/>
-          <a:p>
-            <a:pPr>
-              <a:spcAft>
-                <a:spcPts val="2160"/>
-              </a:spcAft>
-            </a:pPr>
-            <a:r>
-              <a:rPr sz="4800" b="1">
-                <a:solidFill>
-                  <a:srgbClr val="FBF7EF"/>
-                </a:solidFill>
-                <a:latin typeface="Fredoka"/>
-              </a:rPr>
-              <a:t>Repaso de la unidad</a:t>
-            </a:r>
-          </a:p>
-        </p:txBody>
-      </p:sp>
-    </p:spTree>
-  </p:cSld>
-  <p:clrMapOvr>
-    <a:masterClrMapping/>
-  </p:clrMapOvr>
-</p:sld>
-</file>
-
-<file path=ppt/slides/slide6.xml><?xml version="1.0" encoding="utf-8"?>
-<p:sld xmlns:a="http://schemas.openxmlformats.org/drawingml/2006/main" xmlns:p="http://schemas.openxmlformats.org/presentationml/2006/main" xmlns:r="http://schemas.openxmlformats.org/officeDocument/2006/relationships">
-  <p:cSld>
-    <p:bg>
-      <p:bgPr>
-        <a:solidFill>
-          <a:srgbClr val="FBF7EF"/>
-        </a:solidFill>
-        <a:effectLst/>
-      </p:bgPr>
-    </p:bg>
-    <p:spTree>
-      <p:nvGrpSpPr>
-        <p:cNvPr id="1" name=""/>
-        <p:cNvGrpSpPr/>
-        <p:nvPr/>
-      </p:nvGrpSpPr>
-      <p:grpSpPr/>
-      <p:sp>
-        <p:nvSpPr>
-          <p:cNvPr id="2" name="TextBox 1"/>
-          <p:cNvSpPr txBox="1"/>
-          <p:nvPr/>
-        </p:nvSpPr>
-        <p:spPr>
-          <a:xfrm>
-            <a:off x="640000" y="380000"/>
-            <a:ext cx="10912000" cy="420000"/>
-          </a:xfrm>
-          <a:prstGeom prst="rect">
-            <a:avLst/>
-          </a:prstGeom>
-          <a:noFill/>
-        </p:spPr>
-        <p:txBody>
-          <a:bodyPr wrap="square">
-            <a:spAutoFit/>
-          </a:bodyPr>
-          <a:lstStyle/>
-          <a:p>
-            <a:pPr>
-              <a:spcAft>
-                <a:spcPts val="630"/>
-              </a:spcAft>
-            </a:pPr>
-            <a:r>
-              <a:rPr sz="1400" b="1">
-                <a:solidFill>
-                  <a:srgbClr val="E8793A"/>
-                </a:solidFill>
-                <a:latin typeface="Nunito Sans"/>
-              </a:rPr>
-              <a:t>BLOQUE 1 · REPASO DE LA UNIDAD</a:t>
-            </a:r>
-          </a:p>
-        </p:txBody>
-      </p:sp>
-      <p:sp>
-        <p:nvSpPr>
-          <p:cNvPr id="3" name="TextBox 2"/>
-          <p:cNvSpPr txBox="1"/>
-          <p:nvPr/>
-        </p:nvSpPr>
-        <p:spPr>
-          <a:xfrm>
-            <a:off x="640000" y="760000"/>
-            <a:ext cx="10912000" cy="800000"/>
-          </a:xfrm>
-          <a:prstGeom prst="rect">
-            <a:avLst/>
-          </a:prstGeom>
-          <a:noFill/>
-        </p:spPr>
-        <p:txBody>
-          <a:bodyPr wrap="square">
-            <a:spAutoFit/>
-          </a:bodyPr>
-          <a:lstStyle/>
-          <a:p>
-            <a:pPr>
-              <a:spcAft>
-                <a:spcPts val="1710"/>
-              </a:spcAft>
-            </a:pPr>
-            <a:r>
-              <a:rPr sz="3800" b="1">
-                <a:solidFill>
-                  <a:srgbClr val="1F2A44"/>
-                </a:solidFill>
-                <a:latin typeface="Fredoka"/>
-              </a:rPr>
-              <a:t>Tres preguntas a una fuente (sesión 31)</a:t>
-            </a:r>
-          </a:p>
-        </p:txBody>
-      </p:sp>
-      <p:graphicFrame>
-        <p:nvGraphicFramePr>
-          <p:cNvPr id="4" name="Table 3"/>
-          <p:cNvGraphicFramePr>
-            <a:graphicFrameLocks noGrp="1"/>
-          </p:cNvGraphicFramePr>
-          <p:nvPr/>
-        </p:nvGraphicFramePr>
-        <p:xfrm>
-          <a:off x="640000" y="1700000"/>
-          <a:ext cx="10912000" cy="2400000"/>
-        </p:xfrm>
-        <a:graphic>
-          <a:graphicData uri="http://schemas.openxmlformats.org/drawingml/2006/table">
-            <a:tbl>
-              <a:tblPr firstRow="1" bandRow="1">
-                <a:tableStyleId>{5C22544A-7EE6-4342-B048-85BDC9FD1C3A}</a:tableStyleId>
-              </a:tblPr>
-              <a:tblGrid>
-                <a:gridCol w="5456000"/>
-                <a:gridCol w="5456000"/>
-              </a:tblGrid>
-              <a:tr h="600000">
-                <a:tc>
-                  <a:txBody>
-                    <a:bodyPr/>
-                    <a:lstStyle/>
-                    <a:p>
-                      <a:r>
-                        <a:rPr sz="2000" b="1">
-                          <a:solidFill>
-                            <a:srgbClr val="FBF7EF"/>
-                          </a:solidFill>
-                          <a:latin typeface="Fredoka"/>
-                        </a:rPr>
-                        <a:t>Pregunta</a:t>
-                      </a:r>
-                    </a:p>
-                  </a:txBody>
-                  <a:tcPr>
-                    <a:solidFill>
-                      <a:srgbClr val="1F2A44"/>
-                    </a:solidFill>
-                  </a:tcPr>
-                </a:tc>
-                <a:tc>
-                  <a:txBody>
-                    <a:bodyPr/>
-                    <a:lstStyle/>
-                    <a:p>
-                      <a:r>
-                        <a:rPr sz="2000" b="1">
-                          <a:solidFill>
-                            <a:srgbClr val="FBF7EF"/>
-                          </a:solidFill>
-                          <a:latin typeface="Fredoka"/>
-                        </a:rPr>
-                        <a:t>Qué miro</a:t>
-                      </a:r>
-                    </a:p>
-                  </a:txBody>
-                  <a:tcPr>
-                    <a:solidFill>
-                      <a:srgbClr val="1F2A44"/>
-                    </a:solidFill>
-                  </a:tcPr>
-                </a:tc>
-              </a:tr>
-              <a:tr h="600000">
-                <a:tc>
-                  <a:txBody>
-                    <a:bodyPr/>
-                    <a:lstStyle/>
-                    <a:p>
-                      <a:r>
-                        <a:rPr sz="2000" b="1">
-                          <a:solidFill>
-                            <a:srgbClr val="1F2A44"/>
-                          </a:solidFill>
-                          <a:latin typeface="Nunito Sans"/>
-                        </a:rPr>
-                        <a:t>¿Quién lo dice?</a:t>
-                      </a:r>
-                    </a:p>
-                  </a:txBody>
-                  <a:tcPr>
-                    <a:solidFill>
-                      <a:srgbClr val="FFFFFF"/>
-                    </a:solidFill>
-                  </a:tcPr>
-                </a:tc>
-                <a:tc>
-                  <a:txBody>
-                    <a:bodyPr/>
-                    <a:lstStyle/>
-                    <a:p>
-                      <a:r>
-                        <a:rPr sz="2000" b="0">
-                          <a:solidFill>
-                            <a:srgbClr val="1F2A44"/>
-                          </a:solidFill>
-                          <a:latin typeface="Nunito Sans"/>
-                        </a:rPr>
-                        <a:t>¿Tiene nombre? ¿Sabe del tema?</a:t>
-                      </a:r>
-                    </a:p>
-                  </a:txBody>
-                  <a:tcPr>
-                    <a:solidFill>
-                      <a:srgbClr val="FFFFFF"/>
-                    </a:solidFill>
-                  </a:tcPr>
-                </a:tc>
-              </a:tr>
-              <a:tr h="600000">
-                <a:tc>
-                  <a:txBody>
-                    <a:bodyPr/>
-                    <a:lstStyle/>
-                    <a:p>
-                      <a:r>
-                        <a:rPr sz="2000" b="1">
-                          <a:solidFill>
-                            <a:srgbClr val="1F2A44"/>
-                          </a:solidFill>
-                          <a:latin typeface="Nunito Sans"/>
-                        </a:rPr>
-                        <a:t>¿Cómo lo sabe?</a:t>
+                        <a:t>Vídeo o audio falso hecho con inteligencia artificial</a:t>
                       </a:r>
                     </a:p>
                   </a:txBody>
@@ -6537,59 +7038,13 @@
                           </a:solidFill>
                           <a:latin typeface="Nunito Sans"/>
                         </a:rPr>
-                        <a:t>¿Lo vio, lo midió o lo copió?</a:t>
+                        <a:t>Un famoso «dice» algo que nunca dijo</a:t>
                       </a:r>
                     </a:p>
                   </a:txBody>
                   <a:tcPr>
                     <a:solidFill>
                       <a:srgbClr val="EAF0F7"/>
-                    </a:solidFill>
-                  </a:tcPr>
-                </a:tc>
-              </a:tr>
-              <a:tr h="600000">
-                <a:tc>
-                  <a:txBody>
-                    <a:bodyPr/>
-                    <a:lstStyle/>
-                    <a:p>
-                      <a:r>
-                        <a:rPr sz="2000" b="1">
-                          <a:solidFill>
-                            <a:srgbClr val="1F2A44"/>
-                          </a:solidFill>
-                          <a:latin typeface="Nunito Sans"/>
-                        </a:rPr>
-                        <a:t>¿Qué gana?</a:t>
-                      </a:r>
-                    </a:p>
-                  </a:txBody>
-                  <a:tcPr>
-                    <a:solidFill>
-                      <a:srgbClr val="FFFFFF"/>
-                    </a:solidFill>
-                  </a:tcPr>
-                </a:tc>
-                <a:tc>
-                  <a:txBody>
-                    <a:bodyPr/>
-                    <a:lstStyle/>
-                    <a:p>
-                      <a:r>
-                        <a:rPr sz="2000" b="0">
-                          <a:solidFill>
-                            <a:srgbClr val="1F2A44"/>
-                          </a:solidFill>
-                          <a:latin typeface="Nunito Sans"/>
-                        </a:rPr>
-                        <a:t>¿Dinero, visitas, votos, fama?</a:t>
-                      </a:r>
-                    </a:p>
-                  </a:txBody>
-                  <a:tcPr>
-                    <a:solidFill>
-                      <a:srgbClr val="FFFFFF"/>
                     </a:solidFill>
                   </a:tcPr>
                 </a:tc>
@@ -6658,7 +7113,7 @@
                 </a:solidFill>
                 <a:latin typeface="Nunito Sans"/>
               </a:rPr>
-              <a:t>BLOQUE 1 · REPASO DE LA UNIDAD</a:t>
+              <a:t>BLOQUE 1 · CUATRO FORMAS DE ENGAÑAR CON IMÁGENES</a:t>
             </a:r>
           </a:p>
         </p:txBody>
@@ -6697,14 +7152,57 @@
                 </a:solidFill>
                 <a:latin typeface="Fredoka"/>
               </a:rPr>
-              <a:t>Titulares y clickbait (sesión 32)</a:t>
-            </a:r>
-          </a:p>
-        </p:txBody>
-      </p:sp>
-      <p:sp>
-        <p:nvSpPr>
-          <p:cNvPr id="4" name="TextBox 3"/>
+              <a:t>Deepfake</a:t>
+            </a:r>
+          </a:p>
+        </p:txBody>
+      </p:sp>
+      <p:sp>
+        <p:nvSpPr>
+          <p:cNvPr id="4" name="Rectangle 3"/>
+          <p:cNvSpPr/>
+          <p:nvPr/>
+        </p:nvSpPr>
+        <p:spPr>
+          <a:xfrm>
+            <a:off x="640000" y="1650000"/>
+            <a:ext cx="10912000" cy="1150000"/>
+          </a:xfrm>
+          <a:prstGeom prst="rect">
+            <a:avLst/>
+          </a:prstGeom>
+          <a:solidFill>
+            <a:srgbClr val="EAF0F7"/>
+          </a:solidFill>
+          <a:ln>
+            <a:noFill/>
+          </a:ln>
+        </p:spPr>
+        <p:style>
+          <a:lnRef idx="1">
+            <a:schemeClr val="accent1"/>
+          </a:lnRef>
+          <a:fillRef idx="3">
+            <a:schemeClr val="accent1"/>
+          </a:fillRef>
+          <a:effectRef idx="2">
+            <a:schemeClr val="accent1"/>
+          </a:effectRef>
+          <a:fontRef idx="minor">
+            <a:schemeClr val="lt1"/>
+          </a:fontRef>
+        </p:style>
+        <p:txBody>
+          <a:bodyPr rtlCol="0" anchor="ctr"/>
+          <a:lstStyle/>
+          <a:p>
+            <a:pPr algn="ctr"/>
+          </a:p>
+        </p:txBody>
+      </p:sp>
+      <p:sp>
+        <p:nvSpPr>
+          <p:cNvPr id="5" name="TextBox 4"/>
           <p:cNvSpPr txBox="1"/>
           <p:nvPr/>
         </p:nvSpPr>
@@ -6720,45 +7218,6 @@
         </p:spPr>
         <p:txBody>
           <a:bodyPr wrap="square" anchor="ctr">
-            <a:spAutoFit/>
-          </a:bodyPr>
-          <a:lstStyle/>
-          <a:p>
-            <a:pPr>
-              <a:spcAft>
-                <a:spcPts val="1080"/>
-              </a:spcAft>
-            </a:pPr>
-            <a:r>
-              <a:rPr sz="2400" b="0">
-                <a:solidFill>
-                  <a:srgbClr val="1F2A44"/>
-                </a:solidFill>
-                <a:latin typeface="Nunito Sans"/>
-              </a:rPr>
-              <a:t>El clickbait exagera o esconde información para que hagas clic.</a:t>
-            </a:r>
-          </a:p>
-        </p:txBody>
-      </p:sp>
-      <p:sp>
-        <p:nvSpPr>
-          <p:cNvPr id="5" name="TextBox 4"/>
-          <p:cNvSpPr txBox="1"/>
-          <p:nvPr/>
-        </p:nvSpPr>
-        <p:spPr>
-          <a:xfrm>
-            <a:off x="640000" y="3000000"/>
-            <a:ext cx="10912000" cy="3458000"/>
-          </a:xfrm>
-          <a:prstGeom prst="rect">
-            <a:avLst/>
-          </a:prstGeom>
-          <a:noFill/>
-        </p:spPr>
-        <p:txBody>
-          <a:bodyPr wrap="square">
             <a:spAutoFit/>
           </a:bodyPr>
           <a:lstStyle/>
@@ -6771,22 +7230,36 @@
             <a:r>
               <a:rPr sz="2800" b="1">
                 <a:solidFill>
-                  <a:srgbClr val="E8793A"/>
-                </a:solidFill>
-                <a:latin typeface="Nunito Sans"/>
-              </a:rPr>
-              <a:t>• </a:t>
-            </a:r>
-            <a:r>
-              <a:rPr sz="2800" b="0">
-                <a:solidFill>
                   <a:srgbClr val="1F2A44"/>
                 </a:solidFill>
                 <a:latin typeface="Nunito Sans"/>
               </a:rPr>
-              <a:t>Esconde el dato: «No creerás lo que pasó»</a:t>
-            </a:r>
-          </a:p>
+              <a:t>Vídeo, audio o imagen hecho con inteligencia artificial que muestra a alguien diciendo o haciendo algo que nunca hizo.</a:t>
+            </a:r>
+          </a:p>
+        </p:txBody>
+      </p:sp>
+      <p:sp>
+        <p:nvSpPr>
+          <p:cNvPr id="6" name="TextBox 5"/>
+          <p:cNvSpPr txBox="1"/>
+          <p:nvPr/>
+        </p:nvSpPr>
+        <p:spPr>
+          <a:xfrm>
+            <a:off x="640000" y="3000000"/>
+            <a:ext cx="10912000" cy="3458000"/>
+          </a:xfrm>
+          <a:prstGeom prst="rect">
+            <a:avLst/>
+          </a:prstGeom>
+          <a:noFill/>
+        </p:spPr>
+        <p:txBody>
+          <a:bodyPr wrap="square">
+            <a:spAutoFit/>
+          </a:bodyPr>
+          <a:lstStyle/>
           <a:p>
             <a:pPr>
               <a:spcAft>
@@ -6809,7 +7282,25 @@
                 </a:solidFill>
                 <a:latin typeface="Nunito Sans"/>
               </a:rPr>
-              <a:t>Exagera: «increíble», «brutal»; mayúsculas y exclamaciones</a:t>
+              <a:t>Cada vez son </a:t>
+            </a:r>
+            <a:r>
+              <a:rPr sz="2800" b="1">
+                <a:solidFill>
+                  <a:srgbClr val="1F2A44"/>
+                </a:solidFill>
+                <a:latin typeface="Nunito Sans"/>
+              </a:rPr>
+              <a:t>más difíciles</a:t>
+            </a:r>
+            <a:r>
+              <a:rPr sz="2800" b="0">
+                <a:solidFill>
+                  <a:srgbClr val="1F2A44"/>
+                </a:solidFill>
+                <a:latin typeface="Nunito Sans"/>
+              </a:rPr>
+              <a:t> de detectar</a:t>
             </a:r>
           </a:p>
           <a:p>
@@ -6834,7 +7325,7 @@
                 </a:solidFill>
                 <a:latin typeface="Nunito Sans"/>
               </a:rPr>
-              <a:t>Pero un titular llamativo no siempre es clickbait</a:t>
+              <a:t>Las pistas de antes (labios, manos raras) ya casi no sirven</a:t>
             </a:r>
           </a:p>
           <a:p>
@@ -6859,7 +7350,50 @@
                 </a:solidFill>
                 <a:latin typeface="Nunito Sans"/>
               </a:rPr>
-              <a:t>Antes de compartir, lee la noticia entera</a:t>
+              <a:t>Mejor que mirar el vídeo: buscar la </a:t>
+            </a:r>
+            <a:r>
+              <a:rPr sz="2800" b="1">
+                <a:solidFill>
+                  <a:srgbClr val="1F2A44"/>
+                </a:solidFill>
+                <a:latin typeface="Nunito Sans"/>
+              </a:rPr>
+              <a:t>fuente</a:t>
+            </a:r>
+          </a:p>
+          <a:p>
+            <a:pPr>
+              <a:spcAft>
+                <a:spcPts val="1260"/>
+              </a:spcAft>
+            </a:pPr>
+            <a:r>
+              <a:rPr sz="2800" b="1">
+                <a:solidFill>
+                  <a:srgbClr val="E8793A"/>
+                </a:solidFill>
+                <a:latin typeface="Nunito Sans"/>
+              </a:rPr>
+              <a:t>• </a:t>
+            </a:r>
+            <a:r>
+              <a:rPr sz="2800" b="0">
+                <a:solidFill>
+                  <a:srgbClr val="1F2A44"/>
+                </a:solidFill>
+                <a:latin typeface="Nunito Sans"/>
+              </a:rPr>
+              <a:t>Hacer un deepfake de alguien sin permiso puede ser un </a:t>
+            </a:r>
+            <a:r>
+              <a:rPr sz="2800" b="1">
+                <a:solidFill>
+                  <a:srgbClr val="1F2A44"/>
+                </a:solidFill>
+                <a:latin typeface="Nunito Sans"/>
+              </a:rPr>
+              <a:t>delito</a:t>
             </a:r>
           </a:p>
         </p:txBody>
@@ -6924,7 +7458,7 @@
                 </a:solidFill>
                 <a:latin typeface="Nunito Sans"/>
               </a:rPr>
-              <a:t>BLOQUE 1 · REPASO DE LA UNIDAD</a:t>
+              <a:t>BLOQUE 1 · CUATRO FORMAS DE ENGAÑAR CON IMÁGENES</a:t>
             </a:r>
           </a:p>
         </p:txBody>
@@ -6963,7 +7497,7 @@
                 </a:solidFill>
                 <a:latin typeface="Fredoka"/>
               </a:rPr>
-              <a:t>Bulos (sesión 33)</a:t>
+              <a:t>Ante una imagen dudosa</a:t>
             </a:r>
           </a:p>
         </p:txBody>
@@ -6976,47 +7510,8 @@
         </p:nvSpPr>
         <p:spPr>
           <a:xfrm>
-            <a:off x="840000" y="1730000"/>
-            <a:ext cx="10512000" cy="1000000"/>
-          </a:xfrm>
-          <a:prstGeom prst="rect">
-            <a:avLst/>
-          </a:prstGeom>
-          <a:noFill/>
-        </p:spPr>
-        <p:txBody>
-          <a:bodyPr wrap="square" anchor="ctr">
-            <a:spAutoFit/>
-          </a:bodyPr>
-          <a:lstStyle/>
-          <a:p>
-            <a:pPr>
-              <a:spcAft>
-                <a:spcPts val="1080"/>
-              </a:spcAft>
-            </a:pPr>
-            <a:r>
-              <a:rPr sz="2400" b="0">
-                <a:solidFill>
-                  <a:srgbClr val="1F2A44"/>
-                </a:solidFill>
-                <a:latin typeface="Nunito Sans"/>
-              </a:rPr>
-              <a:t>Un bulo es una mentira inventada que se hace pasar por noticia.</a:t>
-            </a:r>
-          </a:p>
-        </p:txBody>
-      </p:sp>
-      <p:sp>
-        <p:nvSpPr>
-          <p:cNvPr id="5" name="TextBox 4"/>
-          <p:cNvSpPr txBox="1"/>
-          <p:nvPr/>
-        </p:nvSpPr>
-        <p:spPr>
-          <a:xfrm>
-            <a:off x="640000" y="3000000"/>
-            <a:ext cx="10912000" cy="3458000"/>
+            <a:off x="640000" y="1650000"/>
+            <a:ext cx="10912000" cy="4808000"/>
           </a:xfrm>
           <a:prstGeom prst="rect">
             <a:avLst/>
@@ -7044,13 +7539,22 @@
               <a:t>• </a:t>
             </a:r>
             <a:r>
+              <a:rPr sz="2800" b="1">
+                <a:solidFill>
+                  <a:srgbClr val="1F2A44"/>
+                </a:solidFill>
+                <a:latin typeface="Nunito Sans"/>
+              </a:rPr>
+              <a:t>Para:</a:t>
+            </a:r>
+            <a:r>
               <a:rPr sz="2800" b="0">
                 <a:solidFill>
                   <a:srgbClr val="1F2A44"/>
                 </a:solidFill>
                 <a:latin typeface="Nunito Sans"/>
               </a:rPr>
-              <a:t>Ingredientes: urgencia, emoción fuerte, fuente vaga, sin fecha</a:t>
+              <a:t> si te da mucha emoción, sospecha</a:t>
             </a:r>
           </a:p>
           <a:p>
@@ -7069,13 +7573,22 @@
               <a:t>• </a:t>
             </a:r>
             <a:r>
+              <a:rPr sz="2800" b="1">
+                <a:solidFill>
+                  <a:srgbClr val="1F2A44"/>
+                </a:solidFill>
+                <a:latin typeface="Nunito Sans"/>
+              </a:rPr>
+              <a:t>Busca su origen:</a:t>
+            </a:r>
+            <a:r>
               <a:rPr sz="2800" b="0">
                 <a:solidFill>
                   <a:srgbClr val="1F2A44"/>
                 </a:solidFill>
                 <a:latin typeface="Nunito Sans"/>
               </a:rPr>
-              <a:t>Son señales para sospechar, no pruebas</a:t>
+              <a:t> búsqueda inversa (sesión 35)</a:t>
             </a:r>
           </a:p>
           <a:p>
@@ -7094,13 +7607,22 @@
               <a:t>• </a:t>
             </a:r>
             <a:r>
+              <a:rPr sz="2800" b="1">
+                <a:solidFill>
+                  <a:srgbClr val="1F2A44"/>
+                </a:solidFill>
+                <a:latin typeface="Nunito Sans"/>
+              </a:rPr>
+              <a:t>Mira el contexto:</a:t>
+            </a:r>
+            <a:r>
               <a:rPr sz="2800" b="0">
                 <a:solidFill>
                   <a:srgbClr val="1F2A44"/>
                 </a:solidFill>
                 <a:latin typeface="Nunito Sans"/>
               </a:rPr>
-              <a:t>Lo compartimos porque nos emociona y viene de alguien de confianza</a:t>
+              <a:t> ¿quién la publicó, dónde y cuándo?</a:t>
             </a:r>
           </a:p>
           <a:p>
@@ -7119,13 +7641,22 @@
               <a:t>• </a:t>
             </a:r>
             <a:r>
+              <a:rPr sz="2800" b="1">
+                <a:solidFill>
+                  <a:srgbClr val="1F2A44"/>
+                </a:solidFill>
+                <a:latin typeface="Nunito Sans"/>
+              </a:rPr>
+              <a:t>Busca la fuente:</a:t>
+            </a:r>
+            <a:r>
               <a:rPr sz="2800" b="0">
                 <a:solidFill>
                   <a:srgbClr val="1F2A44"/>
                 </a:solidFill>
                 <a:latin typeface="Nunito Sans"/>
               </a:rPr>
-              <a:t>Una foto verdadera con un contexto falso también es bulo</a:t>
+              <a:t> ¿lo cuentan medios serios o la propia persona?</a:t>
             </a:r>
           </a:p>
         </p:txBody>
@@ -7144,7 +7675,7 @@
     <p:bg>
       <p:bgPr>
         <a:solidFill>
-          <a:srgbClr val="FBF7EF"/>
+          <a:srgbClr val="1F2A44"/>
         </a:solidFill>
         <a:effectLst/>
       </p:bgPr>
@@ -7164,8 +7695,8 @@
         </p:nvSpPr>
         <p:spPr>
           <a:xfrm>
-            <a:off x="640000" y="380000"/>
-            <a:ext cx="10912000" cy="420000"/>
+            <a:off x="640000" y="2300000"/>
+            <a:ext cx="10912000" cy="500000"/>
           </a:xfrm>
           <a:prstGeom prst="rect">
             <a:avLst/>
@@ -7180,17 +7711,17 @@
           <a:p>
             <a:pPr>
               <a:spcAft>
-                <a:spcPts val="630"/>
+                <a:spcPts val="810"/>
               </a:spcAft>
             </a:pPr>
             <a:r>
-              <a:rPr sz="1400" b="1">
-                <a:solidFill>
-                  <a:srgbClr val="E8793A"/>
-                </a:solidFill>
-                <a:latin typeface="Nunito Sans"/>
-              </a:rPr>
-              <a:t>BLOQUE 1 · REPASO DE LA UNIDAD</a:t>
+              <a:rPr sz="1800" b="1">
+                <a:solidFill>
+                  <a:srgbClr val="F4B183"/>
+                </a:solidFill>
+                <a:latin typeface="Nunito Sans"/>
+              </a:rPr>
+              <a:t>BLOQUE 2</a:t>
             </a:r>
           </a:p>
         </p:txBody>
@@ -7203,7 +7734,7 @@
         </p:nvSpPr>
         <p:spPr>
           <a:xfrm>
-            <a:off x="640000" y="760000"/>
+            <a:off x="640000" y="2800000"/>
             <a:ext cx="10912000" cy="800000"/>
           </a:xfrm>
           <a:prstGeom prst="rect">
@@ -7219,277 +7750,21 @@
           <a:p>
             <a:pPr>
               <a:spcAft>
-                <a:spcPts val="1710"/>
+                <a:spcPts val="2160"/>
               </a:spcAft>
             </a:pPr>
             <a:r>
-              <a:rPr sz="3800" b="1">
-                <a:solidFill>
-                  <a:srgbClr val="1F2A44"/>
+              <a:rPr sz="4800" b="1">
+                <a:solidFill>
+                  <a:srgbClr val="FBF7EF"/>
                 </a:solidFill>
                 <a:latin typeface="Fredoka"/>
               </a:rPr>
-              <a:t>Tres pasos para verificar (sesión 34)</a:t>
-            </a:r>
-          </a:p>
-        </p:txBody>
-      </p:sp>
-      <p:graphicFrame>
-        <p:nvGraphicFramePr>
-          <p:cNvPr id="4" name="Table 3"/>
-          <p:cNvGraphicFramePr>
-            <a:graphicFrameLocks noGrp="1"/>
-          </p:cNvGraphicFramePr>
-          <p:nvPr/>
-        </p:nvGraphicFramePr>
-        <p:xfrm>
-          <a:off x="640000" y="1700000"/>
-          <a:ext cx="10912000" cy="3000000"/>
-        </p:xfrm>
-        <a:graphic>
-          <a:graphicData uri="http://schemas.openxmlformats.org/drawingml/2006/table">
-            <a:tbl>
-              <a:tblPr firstRow="1" bandRow="1">
-                <a:tableStyleId>{5C22544A-7EE6-4342-B048-85BDC9FD1C3A}</a:tableStyleId>
-              </a:tblPr>
-              <a:tblGrid>
-                <a:gridCol w="5456000"/>
-                <a:gridCol w="5456000"/>
-              </a:tblGrid>
-              <a:tr h="600000">
-                <a:tc>
-                  <a:txBody>
-                    <a:bodyPr/>
-                    <a:lstStyle/>
-                    <a:p>
-                      <a:r>
-                        <a:rPr sz="2000" b="1">
-                          <a:solidFill>
-                            <a:srgbClr val="FBF7EF"/>
-                          </a:solidFill>
-                          <a:latin typeface="Fredoka"/>
-                        </a:rPr>
-                        <a:t>Paso</a:t>
-                      </a:r>
-                    </a:p>
-                  </a:txBody>
-                  <a:tcPr>
-                    <a:solidFill>
-                      <a:srgbClr val="1F2A44"/>
-                    </a:solidFill>
-                  </a:tcPr>
-                </a:tc>
-                <a:tc>
-                  <a:txBody>
-                    <a:bodyPr/>
-                    <a:lstStyle/>
-                    <a:p>
-                      <a:r>
-                        <a:rPr sz="2000" b="1">
-                          <a:solidFill>
-                            <a:srgbClr val="FBF7EF"/>
-                          </a:solidFill>
-                          <a:latin typeface="Fredoka"/>
-                        </a:rPr>
-                        <a:t>Qué hago</a:t>
-                      </a:r>
-                    </a:p>
-                  </a:txBody>
-                  <a:tcPr>
-                    <a:solidFill>
-                      <a:srgbClr val="1F2A44"/>
-                    </a:solidFill>
-                  </a:tcPr>
-                </a:tc>
-              </a:tr>
-              <a:tr h="600000">
-                <a:tc>
-                  <a:txBody>
-                    <a:bodyPr/>
-                    <a:lstStyle/>
-                    <a:p>
-                      <a:r>
-                        <a:rPr sz="2000" b="1">
-                          <a:solidFill>
-                            <a:srgbClr val="1F2A44"/>
-                          </a:solidFill>
-                          <a:latin typeface="Nunito Sans"/>
-                        </a:rPr>
-                        <a:t>Lectura lateral</a:t>
-                      </a:r>
-                    </a:p>
-                  </a:txBody>
-                  <a:tcPr>
-                    <a:solidFill>
-                      <a:srgbClr val="FFFFFF"/>
-                    </a:solidFill>
-                  </a:tcPr>
-                </a:tc>
-                <a:tc>
-                  <a:txBody>
-                    <a:bodyPr/>
-                    <a:lstStyle/>
-                    <a:p>
-                      <a:r>
-                        <a:rPr sz="2000" b="0">
-                          <a:solidFill>
-                            <a:srgbClr val="1F2A44"/>
-                          </a:solidFill>
-                          <a:latin typeface="Nunito Sans"/>
-                        </a:rPr>
-                        <a:t>Salgo de la página y busco qué dicen otros</a:t>
-                      </a:r>
-                    </a:p>
-                  </a:txBody>
-                  <a:tcPr>
-                    <a:solidFill>
-                      <a:srgbClr val="FFFFFF"/>
-                    </a:solidFill>
-                  </a:tcPr>
-                </a:tc>
-              </a:tr>
-              <a:tr h="600000">
-                <a:tc>
-                  <a:txBody>
-                    <a:bodyPr/>
-                    <a:lstStyle/>
-                    <a:p>
-                      <a:r>
-                        <a:rPr sz="2000" b="1">
-                          <a:solidFill>
-                            <a:srgbClr val="1F2A44"/>
-                          </a:solidFill>
-                          <a:latin typeface="Nunito Sans"/>
-                        </a:rPr>
-                        <a:t>Fecha</a:t>
-                      </a:r>
-                    </a:p>
-                  </a:txBody>
-                  <a:tcPr>
-                    <a:solidFill>
-                      <a:srgbClr val="EAF0F7"/>
-                    </a:solidFill>
-                  </a:tcPr>
-                </a:tc>
-                <a:tc>
-                  <a:txBody>
-                    <a:bodyPr/>
-                    <a:lstStyle/>
-                    <a:p>
-                      <a:r>
-                        <a:rPr sz="2000" b="0">
-                          <a:solidFill>
-                            <a:srgbClr val="1F2A44"/>
-                          </a:solidFill>
-                          <a:latin typeface="Nunito Sans"/>
-                        </a:rPr>
-                        <a:t>Miro cuándo se publicó, no cuándo me llegó</a:t>
-                      </a:r>
-                    </a:p>
-                  </a:txBody>
-                  <a:tcPr>
-                    <a:solidFill>
-                      <a:srgbClr val="EAF0F7"/>
-                    </a:solidFill>
-                  </a:tcPr>
-                </a:tc>
-              </a:tr>
-              <a:tr h="600000">
-                <a:tc>
-                  <a:txBody>
-                    <a:bodyPr/>
-                    <a:lstStyle/>
-                    <a:p>
-                      <a:r>
-                        <a:rPr sz="2000" b="1">
-                          <a:solidFill>
-                            <a:srgbClr val="1F2A44"/>
-                          </a:solidFill>
-                          <a:latin typeface="Nunito Sans"/>
-                        </a:rPr>
-                        <a:t>Origen de la imagen</a:t>
-                      </a:r>
-                    </a:p>
-                  </a:txBody>
-                  <a:tcPr>
-                    <a:solidFill>
-                      <a:srgbClr val="FFFFFF"/>
-                    </a:solidFill>
-                  </a:tcPr>
-                </a:tc>
-                <a:tc>
-                  <a:txBody>
-                    <a:bodyPr/>
-                    <a:lstStyle/>
-                    <a:p>
-                      <a:r>
-                        <a:rPr sz="2000" b="0">
-                          <a:solidFill>
-                            <a:srgbClr val="1F2A44"/>
-                          </a:solidFill>
-                          <a:latin typeface="Nunito Sans"/>
-                        </a:rPr>
-                        <a:t>Hago una búsqueda inversa</a:t>
-                      </a:r>
-                    </a:p>
-                  </a:txBody>
-                  <a:tcPr>
-                    <a:solidFill>
-                      <a:srgbClr val="FFFFFF"/>
-                    </a:solidFill>
-                  </a:tcPr>
-                </a:tc>
-              </a:tr>
-              <a:tr h="600000">
-                <a:tc>
-                  <a:txBody>
-                    <a:bodyPr/>
-                    <a:lstStyle/>
-                    <a:p>
-                      <a:r>
-                        <a:rPr sz="2000" b="1">
-                          <a:solidFill>
-                            <a:srgbClr val="1F2A44"/>
-                          </a:solidFill>
-                          <a:latin typeface="Nunito Sans"/>
-                        </a:rPr>
-                        <a:t>Si no encuentro nada</a:t>
-                      </a:r>
-                    </a:p>
-                  </a:txBody>
-                  <a:tcPr>
-                    <a:solidFill>
-                      <a:srgbClr val="EAF0F7"/>
-                    </a:solidFill>
-                  </a:tcPr>
-                </a:tc>
-                <a:tc>
-                  <a:txBody>
-                    <a:bodyPr/>
-                    <a:lstStyle/>
-                    <a:p>
-                      <a:r>
-                        <a:rPr sz="2000" b="0">
-                          <a:solidFill>
-                            <a:srgbClr val="1F2A44"/>
-                          </a:solidFill>
-                          <a:latin typeface="Nunito Sans"/>
-                        </a:rPr>
-                        <a:t>No está comprobado: espero</a:t>
-                      </a:r>
-                    </a:p>
-                  </a:txBody>
-                  <a:tcPr>
-                    <a:solidFill>
-                      <a:srgbClr val="EAF0F7"/>
-                    </a:solidFill>
-                  </a:tcPr>
-                </a:tc>
-              </a:tr>
-            </a:tbl>
-          </a:graphicData>
-        </a:graphic>
-      </p:graphicFrame>
+              <a:t>Casos resueltos</a:t>
+            </a:r>
+          </a:p>
+        </p:txBody>
+      </p:sp>
     </p:spTree>
   </p:cSld>
   <p:clrMapOvr>
